--- a/presentations/2026-Q3/ЦКБА_III_квартал_2026_Гонка_героев.pptx
+++ b/presentations/2026-Q3/ЦКБА_III_квартал_2026_Гонка_героев.pptx
@@ -520,7 +520,7 @@
           </a:p>
           <a:p>
             <a:r>
-              <a:t>Вместо подписанных мест вставить фотографии «Гонки героев»: общий снимок с флагом и кадр водного препятствия. Фотографии показаны в чате, но их исходные файлы недоступны в рабочей среде.</a:t>
+              <a:t>В титульный слайд вставлены фотографии прохождения дистанции и команды после финиша. Исходные JPEG получены из presentations/2026-Q3/ в репозитории juliashar3-debug/newrepository. Для презентации использованы уменьшенные копии, исходные файлы в репозитории сохранены.</a:t>
             </a:r>
           </a:p>
         </p:txBody>
@@ -605,7 +605,7 @@
           </a:p>
           <a:p>
             <a:r>
-              <a:t>Для правой части выбраны две из четырех фотографий пользователя: фото 3 (с флагом ЦКБА) и фото 4 (водное препятствие). После получения файлов заменить рамки фотографиями, сохранив синюю изогнутую границу.</a:t>
+              <a:t>В правой части размещены три фотографии пользователя: команда после финиша, команда с флагом ЦКБА и команда на препятствии. Сохранена синяя изогнутая граница из предоставленного образца. Все четыре загруженных фотографии использованы в титульном слайде и слайде мероприятия.</a:t>
             </a:r>
           </a:p>
         </p:txBody>
@@ -3764,12 +3764,21 @@
         <p:nvPr/>
       </p:nvGrpSpPr>
       <p:grpSpPr/>
-      <p:sp>
-        <p:nvSpPr>
-          <p:cNvPr id="2" name="Место для фотографии 1"/>
-          <p:cNvSpPr/>
-          <p:nvPr/>
-        </p:nvSpPr>
+      <p:pic>
+        <p:nvPicPr>
+          <p:cNvPr id="2" name="Гонка героев — прохождение дистанции" descr="image-14-10-26-03-39-1.jpeg"/>
+          <p:cNvPicPr>
+            <a:picLocks noChangeAspect="1"/>
+          </p:cNvPicPr>
+          <p:nvPr/>
+        </p:nvPicPr>
+        <p:blipFill>
+          <a:blip r:embed="rId2"/>
+          <a:srcRect t="30339" b="4339"/>
+          <a:stretch>
+            <a:fillRect/>
+          </a:stretch>
+        </p:blipFill>
         <p:spPr>
           <a:xfrm>
             <a:off x="8255000" y="0"/>
@@ -3778,288 +3787,24 @@
           <a:prstGeom prst="rect">
             <a:avLst/>
           </a:prstGeom>
-          <a:solidFill>
-            <a:srgbClr val="E8EDF3"/>
-          </a:solidFill>
-          <a:ln>
-            <a:noFill/>
-          </a:ln>
-          <a:effectLst/>
-        </p:spPr>
-        <p:style>
-          <a:lnRef idx="1">
-            <a:schemeClr val="accent1"/>
-          </a:lnRef>
-          <a:fillRef idx="3">
-            <a:schemeClr val="accent1"/>
-          </a:fillRef>
-          <a:effectRef idx="2">
-            <a:schemeClr val="accent1"/>
-          </a:effectRef>
-          <a:fontRef idx="minor">
-            <a:schemeClr val="lt1"/>
-          </a:fontRef>
-        </p:style>
-        <p:txBody>
-          <a:bodyPr rtlCol="0" anchor="ctr"/>
-          <a:lstStyle/>
-          <a:p>
-            <a:pPr algn="ctr"/>
-          </a:p>
-        </p:txBody>
-      </p:sp>
-      <p:sp>
-        <p:nvSpPr>
-          <p:cNvPr id="3" name="Рамка места для фотографии 1"/>
-          <p:cNvSpPr/>
-          <p:nvPr/>
-        </p:nvSpPr>
-        <p:spPr>
-          <a:xfrm>
-            <a:off x="10236200" y="1257300"/>
-            <a:ext cx="1168400" cy="711200"/>
-          </a:xfrm>
-          <a:prstGeom prst="rect">
-            <a:avLst/>
-          </a:prstGeom>
-          <a:solidFill>
-            <a:srgbClr val="FFFFFF"/>
-          </a:solidFill>
-          <a:ln w="15875">
-            <a:solidFill>
-              <a:srgbClr val="0F3067"/>
-            </a:solidFill>
-          </a:ln>
-          <a:effectLst/>
-        </p:spPr>
-        <p:style>
-          <a:lnRef idx="1">
-            <a:schemeClr val="accent1"/>
-          </a:lnRef>
-          <a:fillRef idx="3">
-            <a:schemeClr val="accent1"/>
-          </a:fillRef>
-          <a:effectRef idx="2">
-            <a:schemeClr val="accent1"/>
-          </a:effectRef>
-          <a:fontRef idx="minor">
-            <a:schemeClr val="lt1"/>
-          </a:fontRef>
-        </p:style>
-        <p:txBody>
-          <a:bodyPr rtlCol="0" anchor="ctr"/>
-          <a:lstStyle/>
-          <a:p>
-            <a:pPr algn="ctr"/>
-          </a:p>
-        </p:txBody>
-      </p:sp>
-      <p:sp>
-        <p:nvSpPr>
-          <p:cNvPr id="4" name="Isosceles Triangle 3"/>
-          <p:cNvSpPr/>
-          <p:nvPr/>
-        </p:nvSpPr>
-        <p:spPr>
-          <a:xfrm>
-            <a:off x="10388600" y="1511300"/>
-            <a:ext cx="546100" cy="368300"/>
-          </a:xfrm>
-          <a:prstGeom prst="triangle">
-            <a:avLst/>
-          </a:prstGeom>
-          <a:solidFill>
-            <a:srgbClr val="0F3067"/>
-          </a:solidFill>
-          <a:ln>
-            <a:noFill/>
-          </a:ln>
-          <a:effectLst/>
-        </p:spPr>
-        <p:style>
-          <a:lnRef idx="1">
-            <a:schemeClr val="accent1"/>
-          </a:lnRef>
-          <a:fillRef idx="3">
-            <a:schemeClr val="accent1"/>
-          </a:fillRef>
-          <a:effectRef idx="2">
-            <a:schemeClr val="accent1"/>
-          </a:effectRef>
-          <a:fontRef idx="minor">
-            <a:schemeClr val="lt1"/>
-          </a:fontRef>
-        </p:style>
-        <p:txBody>
-          <a:bodyPr rtlCol="0" anchor="ctr"/>
-          <a:lstStyle/>
-          <a:p>
-            <a:pPr algn="ctr"/>
-          </a:p>
-        </p:txBody>
-      </p:sp>
-      <p:sp>
-        <p:nvSpPr>
-          <p:cNvPr id="5" name="Isosceles Triangle 4"/>
-          <p:cNvSpPr/>
-          <p:nvPr/>
-        </p:nvSpPr>
-        <p:spPr>
-          <a:xfrm>
-            <a:off x="10782300" y="1625600"/>
-            <a:ext cx="457200" cy="254000"/>
-          </a:xfrm>
-          <a:prstGeom prst="triangle">
-            <a:avLst/>
-          </a:prstGeom>
-          <a:solidFill>
-            <a:srgbClr val="0F3067"/>
-          </a:solidFill>
-          <a:ln>
-            <a:noFill/>
-          </a:ln>
-          <a:effectLst/>
-        </p:spPr>
-        <p:style>
-          <a:lnRef idx="1">
-            <a:schemeClr val="accent1"/>
-          </a:lnRef>
-          <a:fillRef idx="3">
-            <a:schemeClr val="accent1"/>
-          </a:fillRef>
-          <a:effectRef idx="2">
-            <a:schemeClr val="accent1"/>
-          </a:effectRef>
-          <a:fontRef idx="minor">
-            <a:schemeClr val="lt1"/>
-          </a:fontRef>
-        </p:style>
-        <p:txBody>
-          <a:bodyPr rtlCol="0" anchor="ctr"/>
-          <a:lstStyle/>
-          <a:p>
-            <a:pPr algn="ctr"/>
-          </a:p>
-        </p:txBody>
-      </p:sp>
-      <p:sp>
-        <p:nvSpPr>
-          <p:cNvPr id="6" name="Oval 5"/>
-          <p:cNvSpPr/>
-          <p:nvPr/>
-        </p:nvSpPr>
-        <p:spPr>
-          <a:xfrm>
-            <a:off x="11112500" y="1358900"/>
-            <a:ext cx="127000" cy="127000"/>
-          </a:xfrm>
-          <a:prstGeom prst="ellipse">
-            <a:avLst/>
-          </a:prstGeom>
-          <a:solidFill>
-            <a:srgbClr val="0F3067"/>
-          </a:solidFill>
-          <a:ln>
-            <a:noFill/>
-          </a:ln>
-          <a:effectLst/>
-        </p:spPr>
-        <p:style>
-          <a:lnRef idx="1">
-            <a:schemeClr val="accent1"/>
-          </a:lnRef>
-          <a:fillRef idx="3">
-            <a:schemeClr val="accent1"/>
-          </a:fillRef>
-          <a:effectRef idx="2">
-            <a:schemeClr val="accent1"/>
-          </a:effectRef>
-          <a:fontRef idx="minor">
-            <a:schemeClr val="lt1"/>
-          </a:fontRef>
-        </p:style>
-        <p:txBody>
-          <a:bodyPr rtlCol="0" anchor="ctr"/>
-          <a:lstStyle/>
-          <a:p>
-            <a:pPr algn="ctr"/>
-          </a:p>
-        </p:txBody>
-      </p:sp>
-      <p:sp>
-        <p:nvSpPr>
-          <p:cNvPr id="7" name="Подпись места для фотографии 1"/>
-          <p:cNvSpPr txBox="1"/>
-          <p:nvPr/>
-        </p:nvSpPr>
-        <p:spPr>
-          <a:xfrm>
-            <a:off x="9753600" y="2133600"/>
-            <a:ext cx="2324100" cy="774700"/>
-          </a:xfrm>
-          <a:prstGeom prst="rect">
-            <a:avLst/>
-          </a:prstGeom>
-          <a:noFill/>
-          <a:effectLst/>
-        </p:spPr>
-        <p:txBody>
-          <a:bodyPr wrap="square" lIns="0" rIns="0" tIns="0" bIns="0" anchor="t">
-            <a:spAutoFit/>
-          </a:bodyPr>
-          <a:lstStyle/>
-          <a:p>
-            <a:pPr algn="ctr">
-              <a:lnSpc>
-                <a:spcPts val="1700"/>
-              </a:lnSpc>
-              <a:spcBef>
-                <a:spcPts val="0"/>
-              </a:spcBef>
-              <a:spcAft>
-                <a:spcPts val="0"/>
-              </a:spcAft>
-            </a:pPr>
-            <a:r>
-              <a:rPr sz="1250" b="1" i="0" lang="ru-RU">
-                <a:solidFill>
-                  <a:srgbClr val="0F3067"/>
-                </a:solidFill>
-                <a:latin typeface="Verdana"/>
-              </a:rPr>
-              <a:t>ФОТО КОМАНДЫ</a:t>
-            </a:r>
-          </a:p>
-          <a:p>
-            <a:pPr algn="ctr">
-              <a:lnSpc>
-                <a:spcPts val="1700"/>
-              </a:lnSpc>
-              <a:spcBef>
-                <a:spcPts val="0"/>
-              </a:spcBef>
-              <a:spcAft>
-                <a:spcPts val="0"/>
-              </a:spcAft>
-            </a:pPr>
-            <a:r>
-              <a:rPr sz="1250" b="1" i="0" lang="ru-RU">
-                <a:solidFill>
-                  <a:srgbClr val="0F3067"/>
-                </a:solidFill>
-                <a:latin typeface="Verdana"/>
-              </a:rPr>
-              <a:t>С ФЛАГОМ ЦКБА</a:t>
-            </a:r>
-          </a:p>
-        </p:txBody>
-      </p:sp>
-      <p:sp>
-        <p:nvSpPr>
-          <p:cNvPr id="8" name="Место для фотографии 2"/>
-          <p:cNvSpPr/>
-          <p:nvPr/>
-        </p:nvSpPr>
+          <a:effectLst/>
+        </p:spPr>
+      </p:pic>
+      <p:pic>
+        <p:nvPicPr>
+          <p:cNvPr id="3" name="Гонка героев — команда после финиша" descr="image-14-10-26-03-39-2.jpeg"/>
+          <p:cNvPicPr>
+            <a:picLocks noChangeAspect="1"/>
+          </p:cNvPicPr>
+          <p:nvPr/>
+        </p:nvPicPr>
+        <p:blipFill>
+          <a:blip r:embed="rId3"/>
+          <a:srcRect l="9944" r="3944"/>
+          <a:stretch>
+            <a:fillRect/>
+          </a:stretch>
+        </p:blipFill>
         <p:spPr>
           <a:xfrm>
             <a:off x="8255000" y="3429000"/>
@@ -4068,285 +3813,12 @@
           <a:prstGeom prst="rect">
             <a:avLst/>
           </a:prstGeom>
-          <a:solidFill>
-            <a:srgbClr val="D3DDE9"/>
-          </a:solidFill>
-          <a:ln>
-            <a:noFill/>
-          </a:ln>
-          <a:effectLst/>
-        </p:spPr>
-        <p:style>
-          <a:lnRef idx="1">
-            <a:schemeClr val="accent1"/>
-          </a:lnRef>
-          <a:fillRef idx="3">
-            <a:schemeClr val="accent1"/>
-          </a:fillRef>
-          <a:effectRef idx="2">
-            <a:schemeClr val="accent1"/>
-          </a:effectRef>
-          <a:fontRef idx="minor">
-            <a:schemeClr val="lt1"/>
-          </a:fontRef>
-        </p:style>
-        <p:txBody>
-          <a:bodyPr rtlCol="0" anchor="ctr"/>
-          <a:lstStyle/>
-          <a:p>
-            <a:pPr algn="ctr"/>
-          </a:p>
-        </p:txBody>
-      </p:sp>
-      <p:sp>
-        <p:nvSpPr>
-          <p:cNvPr id="9" name="Рамка места для фотографии 2"/>
-          <p:cNvSpPr/>
-          <p:nvPr/>
-        </p:nvSpPr>
-        <p:spPr>
-          <a:xfrm>
-            <a:off x="10236200" y="4686300"/>
-            <a:ext cx="1168400" cy="711200"/>
-          </a:xfrm>
-          <a:prstGeom prst="rect">
-            <a:avLst/>
-          </a:prstGeom>
-          <a:solidFill>
-            <a:srgbClr val="FFFFFF"/>
-          </a:solidFill>
-          <a:ln w="15875">
-            <a:solidFill>
-              <a:srgbClr val="0F3067"/>
-            </a:solidFill>
-          </a:ln>
-          <a:effectLst/>
-        </p:spPr>
-        <p:style>
-          <a:lnRef idx="1">
-            <a:schemeClr val="accent1"/>
-          </a:lnRef>
-          <a:fillRef idx="3">
-            <a:schemeClr val="accent1"/>
-          </a:fillRef>
-          <a:effectRef idx="2">
-            <a:schemeClr val="accent1"/>
-          </a:effectRef>
-          <a:fontRef idx="minor">
-            <a:schemeClr val="lt1"/>
-          </a:fontRef>
-        </p:style>
-        <p:txBody>
-          <a:bodyPr rtlCol="0" anchor="ctr"/>
-          <a:lstStyle/>
-          <a:p>
-            <a:pPr algn="ctr"/>
-          </a:p>
-        </p:txBody>
-      </p:sp>
-      <p:sp>
-        <p:nvSpPr>
-          <p:cNvPr id="10" name="Isosceles Triangle 9"/>
-          <p:cNvSpPr/>
-          <p:nvPr/>
-        </p:nvSpPr>
-        <p:spPr>
-          <a:xfrm>
-            <a:off x="10388600" y="4940300"/>
-            <a:ext cx="546100" cy="368300"/>
-          </a:xfrm>
-          <a:prstGeom prst="triangle">
-            <a:avLst/>
-          </a:prstGeom>
-          <a:solidFill>
-            <a:srgbClr val="0F3067"/>
-          </a:solidFill>
-          <a:ln>
-            <a:noFill/>
-          </a:ln>
-          <a:effectLst/>
-        </p:spPr>
-        <p:style>
-          <a:lnRef idx="1">
-            <a:schemeClr val="accent1"/>
-          </a:lnRef>
-          <a:fillRef idx="3">
-            <a:schemeClr val="accent1"/>
-          </a:fillRef>
-          <a:effectRef idx="2">
-            <a:schemeClr val="accent1"/>
-          </a:effectRef>
-          <a:fontRef idx="minor">
-            <a:schemeClr val="lt1"/>
-          </a:fontRef>
-        </p:style>
-        <p:txBody>
-          <a:bodyPr rtlCol="0" anchor="ctr"/>
-          <a:lstStyle/>
-          <a:p>
-            <a:pPr algn="ctr"/>
-          </a:p>
-        </p:txBody>
-      </p:sp>
-      <p:sp>
-        <p:nvSpPr>
-          <p:cNvPr id="11" name="Isosceles Triangle 10"/>
-          <p:cNvSpPr/>
-          <p:nvPr/>
-        </p:nvSpPr>
-        <p:spPr>
-          <a:xfrm>
-            <a:off x="10782300" y="5054600"/>
-            <a:ext cx="457200" cy="254000"/>
-          </a:xfrm>
-          <a:prstGeom prst="triangle">
-            <a:avLst/>
-          </a:prstGeom>
-          <a:solidFill>
-            <a:srgbClr val="0F3067"/>
-          </a:solidFill>
-          <a:ln>
-            <a:noFill/>
-          </a:ln>
-          <a:effectLst/>
-        </p:spPr>
-        <p:style>
-          <a:lnRef idx="1">
-            <a:schemeClr val="accent1"/>
-          </a:lnRef>
-          <a:fillRef idx="3">
-            <a:schemeClr val="accent1"/>
-          </a:fillRef>
-          <a:effectRef idx="2">
-            <a:schemeClr val="accent1"/>
-          </a:effectRef>
-          <a:fontRef idx="minor">
-            <a:schemeClr val="lt1"/>
-          </a:fontRef>
-        </p:style>
-        <p:txBody>
-          <a:bodyPr rtlCol="0" anchor="ctr"/>
-          <a:lstStyle/>
-          <a:p>
-            <a:pPr algn="ctr"/>
-          </a:p>
-        </p:txBody>
-      </p:sp>
-      <p:sp>
-        <p:nvSpPr>
-          <p:cNvPr id="12" name="Oval 11"/>
-          <p:cNvSpPr/>
-          <p:nvPr/>
-        </p:nvSpPr>
-        <p:spPr>
-          <a:xfrm>
-            <a:off x="11112500" y="4787900"/>
-            <a:ext cx="127000" cy="127000"/>
-          </a:xfrm>
-          <a:prstGeom prst="ellipse">
-            <a:avLst/>
-          </a:prstGeom>
-          <a:solidFill>
-            <a:srgbClr val="0F3067"/>
-          </a:solidFill>
-          <a:ln>
-            <a:noFill/>
-          </a:ln>
-          <a:effectLst/>
-        </p:spPr>
-        <p:style>
-          <a:lnRef idx="1">
-            <a:schemeClr val="accent1"/>
-          </a:lnRef>
-          <a:fillRef idx="3">
-            <a:schemeClr val="accent1"/>
-          </a:fillRef>
-          <a:effectRef idx="2">
-            <a:schemeClr val="accent1"/>
-          </a:effectRef>
-          <a:fontRef idx="minor">
-            <a:schemeClr val="lt1"/>
-          </a:fontRef>
-        </p:style>
-        <p:txBody>
-          <a:bodyPr rtlCol="0" anchor="ctr"/>
-          <a:lstStyle/>
-          <a:p>
-            <a:pPr algn="ctr"/>
-          </a:p>
-        </p:txBody>
-      </p:sp>
-      <p:sp>
-        <p:nvSpPr>
-          <p:cNvPr id="13" name="Подпись места для фотографии 2"/>
-          <p:cNvSpPr txBox="1"/>
-          <p:nvPr/>
-        </p:nvSpPr>
-        <p:spPr>
-          <a:xfrm>
-            <a:off x="9753600" y="5562600"/>
-            <a:ext cx="2324100" cy="774700"/>
-          </a:xfrm>
-          <a:prstGeom prst="rect">
-            <a:avLst/>
-          </a:prstGeom>
-          <a:noFill/>
-          <a:effectLst/>
-        </p:spPr>
-        <p:txBody>
-          <a:bodyPr wrap="square" lIns="0" rIns="0" tIns="0" bIns="0" anchor="t">
-            <a:spAutoFit/>
-          </a:bodyPr>
-          <a:lstStyle/>
-          <a:p>
-            <a:pPr algn="ctr">
-              <a:lnSpc>
-                <a:spcPts val="1700"/>
-              </a:lnSpc>
-              <a:spcBef>
-                <a:spcPts val="0"/>
-              </a:spcBef>
-              <a:spcAft>
-                <a:spcPts val="0"/>
-              </a:spcAft>
-            </a:pPr>
-            <a:r>
-              <a:rPr sz="1250" b="1" i="0" lang="ru-RU">
-                <a:solidFill>
-                  <a:srgbClr val="0F3067"/>
-                </a:solidFill>
-                <a:latin typeface="Verdana"/>
-              </a:rPr>
-              <a:t>ПРОХОЖДЕНИЕ</a:t>
-            </a:r>
-          </a:p>
-          <a:p>
-            <a:pPr algn="ctr">
-              <a:lnSpc>
-                <a:spcPts val="1700"/>
-              </a:lnSpc>
-              <a:spcBef>
-                <a:spcPts val="0"/>
-              </a:spcBef>
-              <a:spcAft>
-                <a:spcPts val="0"/>
-              </a:spcAft>
-            </a:pPr>
-            <a:r>
-              <a:rPr sz="1250" b="1" i="0" lang="ru-RU">
-                <a:solidFill>
-                  <a:srgbClr val="0F3067"/>
-                </a:solidFill>
-                <a:latin typeface="Verdana"/>
-              </a:rPr>
-              <a:t>ВОДНОГО ПРЕПЯТСТВИЯ</a:t>
-            </a:r>
-          </a:p>
-        </p:txBody>
-      </p:sp>
-      <p:sp>
-        <p:nvSpPr>
-          <p:cNvPr id="14" name="Rectangle 13"/>
+          <a:effectLst/>
+        </p:spPr>
+      </p:pic>
+      <p:sp>
+        <p:nvSpPr>
+          <p:cNvPr id="4" name="Rectangle 3"/>
           <p:cNvSpPr/>
           <p:nvPr/>
         </p:nvSpPr>
@@ -4401,7 +3873,7 @@
           <a:fillRef idx="3">
             <a:schemeClr val="accent1"/>
           </a:fillRef>
-          <a:effectRef idx="2">
+          <a:effectRef idx="0">
             <a:schemeClr val="accent1"/>
           </a:effectRef>
           <a:fontRef idx="minor">
@@ -4418,14 +3890,14 @@
       </p:sp>
       <p:pic>
         <p:nvPicPr>
-          <p:cNvPr id="15" name="Логотип из предоставленного образца" descr="logo_navy.png"/>
+          <p:cNvPr id="5" name="Логотип из предоставленного образца" descr="logo_navy.png"/>
           <p:cNvPicPr>
             <a:picLocks noChangeAspect="1"/>
           </p:cNvPicPr>
           <p:nvPr/>
         </p:nvPicPr>
         <p:blipFill>
-          <a:blip r:embed="rId2"/>
+          <a:blip r:embed="rId4"/>
           <a:stretch>
             <a:fillRect/>
           </a:stretch>
@@ -4443,7 +3915,7 @@
       </p:pic>
       <p:sp>
         <p:nvSpPr>
-          <p:cNvPr id="16" name="TextBox 15"/>
+          <p:cNvPr id="6" name="TextBox 5"/>
           <p:cNvSpPr txBox="1"/>
           <p:nvPr/>
         </p:nvSpPr>
@@ -4489,7 +3961,7 @@
       </p:sp>
       <p:sp>
         <p:nvSpPr>
-          <p:cNvPr id="17" name="TextBox 16"/>
+          <p:cNvPr id="7" name="TextBox 6"/>
           <p:cNvSpPr txBox="1"/>
           <p:nvPr/>
         </p:nvSpPr>
@@ -4579,7 +4051,7 @@
       </p:sp>
       <p:sp>
         <p:nvSpPr>
-          <p:cNvPr id="18" name="TextBox 17"/>
+          <p:cNvPr id="8" name="TextBox 7"/>
           <p:cNvSpPr txBox="1"/>
           <p:nvPr/>
         </p:nvSpPr>
@@ -4625,7 +4097,7 @@
       </p:sp>
       <p:sp>
         <p:nvSpPr>
-          <p:cNvPr id="19" name="TextBox 18"/>
+          <p:cNvPr id="9" name="TextBox 8"/>
           <p:cNvSpPr txBox="1"/>
           <p:nvPr/>
         </p:nvSpPr>
@@ -4693,7 +4165,7 @@
       </p:sp>
       <p:sp>
         <p:nvSpPr>
-          <p:cNvPr id="20" name="TextBox 19"/>
+          <p:cNvPr id="10" name="TextBox 9"/>
           <p:cNvSpPr txBox="1"/>
           <p:nvPr/>
         </p:nvSpPr>
@@ -4739,7 +4211,7 @@
       </p:sp>
       <p:sp>
         <p:nvSpPr>
-          <p:cNvPr id="21" name="TextBox 20"/>
+          <p:cNvPr id="11" name="TextBox 10"/>
           <p:cNvSpPr txBox="1"/>
           <p:nvPr/>
         </p:nvSpPr>
@@ -4785,7 +4257,7 @@
       </p:sp>
       <p:sp>
         <p:nvSpPr>
-          <p:cNvPr id="22" name="TextBox 21"/>
+          <p:cNvPr id="12" name="TextBox 11"/>
           <p:cNvSpPr txBox="1"/>
           <p:nvPr/>
         </p:nvSpPr>
@@ -4831,7 +4303,7 @@
       </p:sp>
       <p:sp>
         <p:nvSpPr>
-          <p:cNvPr id="23" name="TextBox 22"/>
+          <p:cNvPr id="13" name="TextBox 12"/>
           <p:cNvSpPr txBox="1"/>
           <p:nvPr/>
         </p:nvSpPr>
@@ -4901,589 +4373,87 @@
         <p:nvPr/>
       </p:nvGrpSpPr>
       <p:grpSpPr/>
-      <p:sp>
-        <p:nvSpPr>
-          <p:cNvPr id="2" name="Место для фотографии 1"/>
-          <p:cNvSpPr/>
-          <p:nvPr/>
-        </p:nvSpPr>
+      <p:pic>
+        <p:nvPicPr>
+          <p:cNvPr id="2" name="Гонка героев — команда с медалями" descr="image-14-10-26-03-39-2.jpeg"/>
+          <p:cNvPicPr>
+            <a:picLocks noChangeAspect="1"/>
+          </p:cNvPicPr>
+          <p:nvPr/>
+        </p:nvPicPr>
+        <p:blipFill>
+          <a:blip r:embed="rId2"/>
+          <a:srcRect t="15290" b="7290"/>
+          <a:stretch>
+            <a:fillRect/>
+          </a:stretch>
+        </p:blipFill>
         <p:spPr>
           <a:xfrm>
             <a:off x="8255000" y="0"/>
-            <a:ext cx="3937000" cy="3429000"/>
-          </a:xfrm>
-          <a:prstGeom prst="rect">
-            <a:avLst/>
-          </a:prstGeom>
-          <a:solidFill>
-            <a:srgbClr val="E8EDF3"/>
-          </a:solidFill>
-          <a:ln>
-            <a:noFill/>
-          </a:ln>
-          <a:effectLst/>
-        </p:spPr>
-        <p:style>
-          <a:lnRef idx="1">
-            <a:schemeClr val="accent1"/>
-          </a:lnRef>
-          <a:fillRef idx="3">
-            <a:schemeClr val="accent1"/>
-          </a:fillRef>
-          <a:effectRef idx="2">
-            <a:schemeClr val="accent1"/>
-          </a:effectRef>
-          <a:fontRef idx="minor">
-            <a:schemeClr val="lt1"/>
-          </a:fontRef>
-        </p:style>
-        <p:txBody>
-          <a:bodyPr rtlCol="0" anchor="ctr"/>
-          <a:lstStyle/>
-          <a:p>
-            <a:pPr algn="ctr"/>
-          </a:p>
-        </p:txBody>
-      </p:sp>
-      <p:sp>
-        <p:nvSpPr>
-          <p:cNvPr id="3" name="Рамка места для фотографии 1"/>
-          <p:cNvSpPr/>
-          <p:nvPr/>
-        </p:nvSpPr>
+            <a:ext cx="3937000" cy="2286000"/>
+          </a:xfrm>
+          <a:prstGeom prst="rect">
+            <a:avLst/>
+          </a:prstGeom>
+          <a:effectLst/>
+        </p:spPr>
+      </p:pic>
+      <p:pic>
+        <p:nvPicPr>
+          <p:cNvPr id="3" name="Гонка героев — команда с флагом ЦКБА" descr="image-14-10-26-03-39-3.jpeg"/>
+          <p:cNvPicPr>
+            <a:picLocks noChangeAspect="1"/>
+          </p:cNvPicPr>
+          <p:nvPr/>
+        </p:nvPicPr>
+        <p:blipFill>
+          <a:blip r:embed="rId3"/>
+          <a:srcRect t="3452" b="9452"/>
+          <a:stretch>
+            <a:fillRect/>
+          </a:stretch>
+        </p:blipFill>
         <p:spPr>
           <a:xfrm>
-            <a:off x="10236200" y="1257300"/>
-            <a:ext cx="1168400" cy="711200"/>
-          </a:xfrm>
-          <a:prstGeom prst="rect">
-            <a:avLst/>
-          </a:prstGeom>
-          <a:solidFill>
-            <a:srgbClr val="FFFFFF"/>
-          </a:solidFill>
-          <a:ln w="15875">
-            <a:solidFill>
-              <a:srgbClr val="0F3067"/>
-            </a:solidFill>
-          </a:ln>
-          <a:effectLst/>
-        </p:spPr>
-        <p:style>
-          <a:lnRef idx="1">
-            <a:schemeClr val="accent1"/>
-          </a:lnRef>
-          <a:fillRef idx="3">
-            <a:schemeClr val="accent1"/>
-          </a:fillRef>
-          <a:effectRef idx="2">
-            <a:schemeClr val="accent1"/>
-          </a:effectRef>
-          <a:fontRef idx="minor">
-            <a:schemeClr val="lt1"/>
-          </a:fontRef>
-        </p:style>
-        <p:txBody>
-          <a:bodyPr rtlCol="0" anchor="ctr"/>
-          <a:lstStyle/>
-          <a:p>
-            <a:pPr algn="ctr"/>
-          </a:p>
-        </p:txBody>
-      </p:sp>
-      <p:sp>
-        <p:nvSpPr>
-          <p:cNvPr id="4" name="Isosceles Triangle 3"/>
-          <p:cNvSpPr/>
-          <p:nvPr/>
-        </p:nvSpPr>
+            <a:off x="8255000" y="2286000"/>
+            <a:ext cx="3937000" cy="2286000"/>
+          </a:xfrm>
+          <a:prstGeom prst="rect">
+            <a:avLst/>
+          </a:prstGeom>
+          <a:effectLst/>
+        </p:spPr>
+      </p:pic>
+      <p:pic>
+        <p:nvPicPr>
+          <p:cNvPr id="4" name="Гонка героев — команда на препятствии" descr="image-14-10-26-03-39.jpeg"/>
+          <p:cNvPicPr>
+            <a:picLocks noChangeAspect="1"/>
+          </p:cNvPicPr>
+          <p:nvPr/>
+        </p:nvPicPr>
+        <p:blipFill>
+          <a:blip r:embed="rId4"/>
+          <a:srcRect t="12903"/>
+          <a:stretch>
+            <a:fillRect/>
+          </a:stretch>
+        </p:blipFill>
         <p:spPr>
           <a:xfrm>
-            <a:off x="10388600" y="1511300"/>
-            <a:ext cx="546100" cy="368300"/>
-          </a:xfrm>
-          <a:prstGeom prst="triangle">
-            <a:avLst/>
-          </a:prstGeom>
-          <a:solidFill>
-            <a:srgbClr val="0F3067"/>
-          </a:solidFill>
-          <a:ln>
-            <a:noFill/>
-          </a:ln>
-          <a:effectLst/>
-        </p:spPr>
-        <p:style>
-          <a:lnRef idx="1">
-            <a:schemeClr val="accent1"/>
-          </a:lnRef>
-          <a:fillRef idx="3">
-            <a:schemeClr val="accent1"/>
-          </a:fillRef>
-          <a:effectRef idx="2">
-            <a:schemeClr val="accent1"/>
-          </a:effectRef>
-          <a:fontRef idx="minor">
-            <a:schemeClr val="lt1"/>
-          </a:fontRef>
-        </p:style>
-        <p:txBody>
-          <a:bodyPr rtlCol="0" anchor="ctr"/>
-          <a:lstStyle/>
-          <a:p>
-            <a:pPr algn="ctr"/>
-          </a:p>
-        </p:txBody>
-      </p:sp>
-      <p:sp>
-        <p:nvSpPr>
-          <p:cNvPr id="5" name="Isosceles Triangle 4"/>
-          <p:cNvSpPr/>
-          <p:nvPr/>
-        </p:nvSpPr>
-        <p:spPr>
-          <a:xfrm>
-            <a:off x="10782300" y="1625600"/>
-            <a:ext cx="457200" cy="254000"/>
-          </a:xfrm>
-          <a:prstGeom prst="triangle">
-            <a:avLst/>
-          </a:prstGeom>
-          <a:solidFill>
-            <a:srgbClr val="0F3067"/>
-          </a:solidFill>
-          <a:ln>
-            <a:noFill/>
-          </a:ln>
-          <a:effectLst/>
-        </p:spPr>
-        <p:style>
-          <a:lnRef idx="1">
-            <a:schemeClr val="accent1"/>
-          </a:lnRef>
-          <a:fillRef idx="3">
-            <a:schemeClr val="accent1"/>
-          </a:fillRef>
-          <a:effectRef idx="2">
-            <a:schemeClr val="accent1"/>
-          </a:effectRef>
-          <a:fontRef idx="minor">
-            <a:schemeClr val="lt1"/>
-          </a:fontRef>
-        </p:style>
-        <p:txBody>
-          <a:bodyPr rtlCol="0" anchor="ctr"/>
-          <a:lstStyle/>
-          <a:p>
-            <a:pPr algn="ctr"/>
-          </a:p>
-        </p:txBody>
-      </p:sp>
-      <p:sp>
-        <p:nvSpPr>
-          <p:cNvPr id="6" name="Oval 5"/>
-          <p:cNvSpPr/>
-          <p:nvPr/>
-        </p:nvSpPr>
-        <p:spPr>
-          <a:xfrm>
-            <a:off x="11112500" y="1358900"/>
-            <a:ext cx="127000" cy="127000"/>
-          </a:xfrm>
-          <a:prstGeom prst="ellipse">
-            <a:avLst/>
-          </a:prstGeom>
-          <a:solidFill>
-            <a:srgbClr val="0F3067"/>
-          </a:solidFill>
-          <a:ln>
-            <a:noFill/>
-          </a:ln>
-          <a:effectLst/>
-        </p:spPr>
-        <p:style>
-          <a:lnRef idx="1">
-            <a:schemeClr val="accent1"/>
-          </a:lnRef>
-          <a:fillRef idx="3">
-            <a:schemeClr val="accent1"/>
-          </a:fillRef>
-          <a:effectRef idx="2">
-            <a:schemeClr val="accent1"/>
-          </a:effectRef>
-          <a:fontRef idx="minor">
-            <a:schemeClr val="lt1"/>
-          </a:fontRef>
-        </p:style>
-        <p:txBody>
-          <a:bodyPr rtlCol="0" anchor="ctr"/>
-          <a:lstStyle/>
-          <a:p>
-            <a:pPr algn="ctr"/>
-          </a:p>
-        </p:txBody>
-      </p:sp>
-      <p:sp>
-        <p:nvSpPr>
-          <p:cNvPr id="7" name="Подпись места для фотографии 1"/>
-          <p:cNvSpPr txBox="1"/>
-          <p:nvPr/>
-        </p:nvSpPr>
-        <p:spPr>
-          <a:xfrm>
-            <a:off x="9753600" y="2133600"/>
-            <a:ext cx="2324100" cy="774700"/>
-          </a:xfrm>
-          <a:prstGeom prst="rect">
-            <a:avLst/>
-          </a:prstGeom>
-          <a:noFill/>
-          <a:effectLst/>
-        </p:spPr>
-        <p:txBody>
-          <a:bodyPr wrap="square" lIns="0" rIns="0" tIns="0" bIns="0" anchor="t">
-            <a:spAutoFit/>
-          </a:bodyPr>
-          <a:lstStyle/>
-          <a:p>
-            <a:pPr algn="ctr">
-              <a:lnSpc>
-                <a:spcPts val="1700"/>
-              </a:lnSpc>
-              <a:spcBef>
-                <a:spcPts val="0"/>
-              </a:spcBef>
-              <a:spcAft>
-                <a:spcPts val="0"/>
-              </a:spcAft>
-            </a:pPr>
-            <a:r>
-              <a:rPr sz="1250" b="1" i="0" lang="ru-RU">
-                <a:solidFill>
-                  <a:srgbClr val="0F3067"/>
-                </a:solidFill>
-                <a:latin typeface="Verdana"/>
-              </a:rPr>
-              <a:t>ФОТО КОМАНДЫ</a:t>
-            </a:r>
-          </a:p>
-          <a:p>
-            <a:pPr algn="ctr">
-              <a:lnSpc>
-                <a:spcPts val="1700"/>
-              </a:lnSpc>
-              <a:spcBef>
-                <a:spcPts val="0"/>
-              </a:spcBef>
-              <a:spcAft>
-                <a:spcPts val="0"/>
-              </a:spcAft>
-            </a:pPr>
-            <a:r>
-              <a:rPr sz="1250" b="1" i="0" lang="ru-RU">
-                <a:solidFill>
-                  <a:srgbClr val="0F3067"/>
-                </a:solidFill>
-                <a:latin typeface="Verdana"/>
-              </a:rPr>
-              <a:t>С ФЛАГОМ ЦКБА</a:t>
-            </a:r>
-          </a:p>
-        </p:txBody>
-      </p:sp>
-      <p:sp>
-        <p:nvSpPr>
-          <p:cNvPr id="8" name="Место для фотографии 2"/>
-          <p:cNvSpPr/>
-          <p:nvPr/>
-        </p:nvSpPr>
-        <p:spPr>
-          <a:xfrm>
-            <a:off x="8255000" y="3429000"/>
-            <a:ext cx="3937000" cy="3429000"/>
-          </a:xfrm>
-          <a:prstGeom prst="rect">
-            <a:avLst/>
-          </a:prstGeom>
-          <a:solidFill>
-            <a:srgbClr val="D3DDE9"/>
-          </a:solidFill>
-          <a:ln>
-            <a:noFill/>
-          </a:ln>
-          <a:effectLst/>
-        </p:spPr>
-        <p:style>
-          <a:lnRef idx="1">
-            <a:schemeClr val="accent1"/>
-          </a:lnRef>
-          <a:fillRef idx="3">
-            <a:schemeClr val="accent1"/>
-          </a:fillRef>
-          <a:effectRef idx="2">
-            <a:schemeClr val="accent1"/>
-          </a:effectRef>
-          <a:fontRef idx="minor">
-            <a:schemeClr val="lt1"/>
-          </a:fontRef>
-        </p:style>
-        <p:txBody>
-          <a:bodyPr rtlCol="0" anchor="ctr"/>
-          <a:lstStyle/>
-          <a:p>
-            <a:pPr algn="ctr"/>
-          </a:p>
-        </p:txBody>
-      </p:sp>
-      <p:sp>
-        <p:nvSpPr>
-          <p:cNvPr id="9" name="Рамка места для фотографии 2"/>
-          <p:cNvSpPr/>
-          <p:nvPr/>
-        </p:nvSpPr>
-        <p:spPr>
-          <a:xfrm>
-            <a:off x="10236200" y="4686300"/>
-            <a:ext cx="1168400" cy="711200"/>
-          </a:xfrm>
-          <a:prstGeom prst="rect">
-            <a:avLst/>
-          </a:prstGeom>
-          <a:solidFill>
-            <a:srgbClr val="FFFFFF"/>
-          </a:solidFill>
-          <a:ln w="15875">
-            <a:solidFill>
-              <a:srgbClr val="0F3067"/>
-            </a:solidFill>
-          </a:ln>
-          <a:effectLst/>
-        </p:spPr>
-        <p:style>
-          <a:lnRef idx="1">
-            <a:schemeClr val="accent1"/>
-          </a:lnRef>
-          <a:fillRef idx="3">
-            <a:schemeClr val="accent1"/>
-          </a:fillRef>
-          <a:effectRef idx="2">
-            <a:schemeClr val="accent1"/>
-          </a:effectRef>
-          <a:fontRef idx="minor">
-            <a:schemeClr val="lt1"/>
-          </a:fontRef>
-        </p:style>
-        <p:txBody>
-          <a:bodyPr rtlCol="0" anchor="ctr"/>
-          <a:lstStyle/>
-          <a:p>
-            <a:pPr algn="ctr"/>
-          </a:p>
-        </p:txBody>
-      </p:sp>
-      <p:sp>
-        <p:nvSpPr>
-          <p:cNvPr id="10" name="Isosceles Triangle 9"/>
-          <p:cNvSpPr/>
-          <p:nvPr/>
-        </p:nvSpPr>
-        <p:spPr>
-          <a:xfrm>
-            <a:off x="10388600" y="4940300"/>
-            <a:ext cx="546100" cy="368300"/>
-          </a:xfrm>
-          <a:prstGeom prst="triangle">
-            <a:avLst/>
-          </a:prstGeom>
-          <a:solidFill>
-            <a:srgbClr val="0F3067"/>
-          </a:solidFill>
-          <a:ln>
-            <a:noFill/>
-          </a:ln>
-          <a:effectLst/>
-        </p:spPr>
-        <p:style>
-          <a:lnRef idx="1">
-            <a:schemeClr val="accent1"/>
-          </a:lnRef>
-          <a:fillRef idx="3">
-            <a:schemeClr val="accent1"/>
-          </a:fillRef>
-          <a:effectRef idx="2">
-            <a:schemeClr val="accent1"/>
-          </a:effectRef>
-          <a:fontRef idx="minor">
-            <a:schemeClr val="lt1"/>
-          </a:fontRef>
-        </p:style>
-        <p:txBody>
-          <a:bodyPr rtlCol="0" anchor="ctr"/>
-          <a:lstStyle/>
-          <a:p>
-            <a:pPr algn="ctr"/>
-          </a:p>
-        </p:txBody>
-      </p:sp>
-      <p:sp>
-        <p:nvSpPr>
-          <p:cNvPr id="11" name="Isosceles Triangle 10"/>
-          <p:cNvSpPr/>
-          <p:nvPr/>
-        </p:nvSpPr>
-        <p:spPr>
-          <a:xfrm>
-            <a:off x="10782300" y="5054600"/>
-            <a:ext cx="457200" cy="254000"/>
-          </a:xfrm>
-          <a:prstGeom prst="triangle">
-            <a:avLst/>
-          </a:prstGeom>
-          <a:solidFill>
-            <a:srgbClr val="0F3067"/>
-          </a:solidFill>
-          <a:ln>
-            <a:noFill/>
-          </a:ln>
-          <a:effectLst/>
-        </p:spPr>
-        <p:style>
-          <a:lnRef idx="1">
-            <a:schemeClr val="accent1"/>
-          </a:lnRef>
-          <a:fillRef idx="3">
-            <a:schemeClr val="accent1"/>
-          </a:fillRef>
-          <a:effectRef idx="2">
-            <a:schemeClr val="accent1"/>
-          </a:effectRef>
-          <a:fontRef idx="minor">
-            <a:schemeClr val="lt1"/>
-          </a:fontRef>
-        </p:style>
-        <p:txBody>
-          <a:bodyPr rtlCol="0" anchor="ctr"/>
-          <a:lstStyle/>
-          <a:p>
-            <a:pPr algn="ctr"/>
-          </a:p>
-        </p:txBody>
-      </p:sp>
-      <p:sp>
-        <p:nvSpPr>
-          <p:cNvPr id="12" name="Oval 11"/>
-          <p:cNvSpPr/>
-          <p:nvPr/>
-        </p:nvSpPr>
-        <p:spPr>
-          <a:xfrm>
-            <a:off x="11112500" y="4787900"/>
-            <a:ext cx="127000" cy="127000"/>
-          </a:xfrm>
-          <a:prstGeom prst="ellipse">
-            <a:avLst/>
-          </a:prstGeom>
-          <a:solidFill>
-            <a:srgbClr val="0F3067"/>
-          </a:solidFill>
-          <a:ln>
-            <a:noFill/>
-          </a:ln>
-          <a:effectLst/>
-        </p:spPr>
-        <p:style>
-          <a:lnRef idx="1">
-            <a:schemeClr val="accent1"/>
-          </a:lnRef>
-          <a:fillRef idx="3">
-            <a:schemeClr val="accent1"/>
-          </a:fillRef>
-          <a:effectRef idx="2">
-            <a:schemeClr val="accent1"/>
-          </a:effectRef>
-          <a:fontRef idx="minor">
-            <a:schemeClr val="lt1"/>
-          </a:fontRef>
-        </p:style>
-        <p:txBody>
-          <a:bodyPr rtlCol="0" anchor="ctr"/>
-          <a:lstStyle/>
-          <a:p>
-            <a:pPr algn="ctr"/>
-          </a:p>
-        </p:txBody>
-      </p:sp>
-      <p:sp>
-        <p:nvSpPr>
-          <p:cNvPr id="13" name="Подпись места для фотографии 2"/>
-          <p:cNvSpPr txBox="1"/>
-          <p:nvPr/>
-        </p:nvSpPr>
-        <p:spPr>
-          <a:xfrm>
-            <a:off x="9753600" y="5562600"/>
-            <a:ext cx="2324100" cy="774700"/>
-          </a:xfrm>
-          <a:prstGeom prst="rect">
-            <a:avLst/>
-          </a:prstGeom>
-          <a:noFill/>
-          <a:effectLst/>
-        </p:spPr>
-        <p:txBody>
-          <a:bodyPr wrap="square" lIns="0" rIns="0" tIns="0" bIns="0" anchor="t">
-            <a:spAutoFit/>
-          </a:bodyPr>
-          <a:lstStyle/>
-          <a:p>
-            <a:pPr algn="ctr">
-              <a:lnSpc>
-                <a:spcPts val="1700"/>
-              </a:lnSpc>
-              <a:spcBef>
-                <a:spcPts val="0"/>
-              </a:spcBef>
-              <a:spcAft>
-                <a:spcPts val="0"/>
-              </a:spcAft>
-            </a:pPr>
-            <a:r>
-              <a:rPr sz="1250" b="1" i="0" lang="ru-RU">
-                <a:solidFill>
-                  <a:srgbClr val="0F3067"/>
-                </a:solidFill>
-                <a:latin typeface="Verdana"/>
-              </a:rPr>
-              <a:t>ПРОХОЖДЕНИЕ</a:t>
-            </a:r>
-          </a:p>
-          <a:p>
-            <a:pPr algn="ctr">
-              <a:lnSpc>
-                <a:spcPts val="1700"/>
-              </a:lnSpc>
-              <a:spcBef>
-                <a:spcPts val="0"/>
-              </a:spcBef>
-              <a:spcAft>
-                <a:spcPts val="0"/>
-              </a:spcAft>
-            </a:pPr>
-            <a:r>
-              <a:rPr sz="1250" b="1" i="0" lang="ru-RU">
-                <a:solidFill>
-                  <a:srgbClr val="0F3067"/>
-                </a:solidFill>
-                <a:latin typeface="Verdana"/>
-              </a:rPr>
-              <a:t>ВОДНОГО ПРЕПЯТСТВИЯ</a:t>
-            </a:r>
-          </a:p>
-        </p:txBody>
-      </p:sp>
-      <p:sp>
-        <p:nvSpPr>
-          <p:cNvPr id="14" name="Rectangle 13"/>
+            <a:off x="8255000" y="4572000"/>
+            <a:ext cx="3937000" cy="2286000"/>
+          </a:xfrm>
+          <a:prstGeom prst="rect">
+            <a:avLst/>
+          </a:prstGeom>
+          <a:effectLst/>
+        </p:spPr>
+      </p:pic>
+      <p:sp>
+        <p:nvSpPr>
+          <p:cNvPr id="5" name="Rectangle 4"/>
           <p:cNvSpPr/>
           <p:nvPr/>
         </p:nvSpPr>
@@ -5538,7 +4508,7 @@
           <a:fillRef idx="3">
             <a:schemeClr val="accent1"/>
           </a:fillRef>
-          <a:effectRef idx="2">
+          <a:effectRef idx="0">
             <a:schemeClr val="accent1"/>
           </a:effectRef>
           <a:fontRef idx="minor">
@@ -5555,14 +4525,14 @@
       </p:sp>
       <p:pic>
         <p:nvPicPr>
-          <p:cNvPr id="15" name="Логотип из предоставленного образца" descr="logo_navy.png"/>
+          <p:cNvPr id="6" name="Логотип из предоставленного образца" descr="logo_navy.png"/>
           <p:cNvPicPr>
             <a:picLocks noChangeAspect="1"/>
           </p:cNvPicPr>
           <p:nvPr/>
         </p:nvPicPr>
         <p:blipFill>
-          <a:blip r:embed="rId2"/>
+          <a:blip r:embed="rId5"/>
           <a:stretch>
             <a:fillRect/>
           </a:stretch>
@@ -5580,7 +4550,7 @@
       </p:pic>
       <p:sp>
         <p:nvSpPr>
-          <p:cNvPr id="16" name="TextBox 15"/>
+          <p:cNvPr id="7" name="TextBox 6"/>
           <p:cNvSpPr txBox="1"/>
           <p:nvPr/>
         </p:nvSpPr>
@@ -5670,7 +4640,7 @@
       </p:sp>
       <p:sp>
         <p:nvSpPr>
-          <p:cNvPr id="17" name="Oval 16"/>
+          <p:cNvPr id="8" name="Oval 7"/>
           <p:cNvSpPr/>
           <p:nvPr/>
         </p:nvSpPr>
@@ -5697,24 +4667,24 @@
           <a:fillRef idx="3">
             <a:schemeClr val="accent1"/>
           </a:fillRef>
-          <a:effectRef idx="2">
-            <a:schemeClr val="accent1"/>
-          </a:effectRef>
-          <a:fontRef idx="minor">
-            <a:schemeClr val="lt1"/>
-          </a:fontRef>
-        </p:style>
-        <p:txBody>
-          <a:bodyPr rtlCol="0" anchor="ctr"/>
-          <a:lstStyle/>
-          <a:p>
-            <a:pPr algn="ctr"/>
-          </a:p>
-        </p:txBody>
-      </p:sp>
-      <p:sp>
-        <p:nvSpPr>
-          <p:cNvPr id="18" name="Rectangle 17"/>
+          <a:effectRef idx="0">
+            <a:schemeClr val="accent1"/>
+          </a:effectRef>
+          <a:fontRef idx="minor">
+            <a:schemeClr val="lt1"/>
+          </a:fontRef>
+        </p:style>
+        <p:txBody>
+          <a:bodyPr rtlCol="0" anchor="ctr"/>
+          <a:lstStyle/>
+          <a:p>
+            <a:pPr algn="ctr"/>
+          </a:p>
+        </p:txBody>
+      </p:sp>
+      <p:sp>
+        <p:nvSpPr>
+          <p:cNvPr id="9" name="Rectangle 8"/>
           <p:cNvSpPr/>
           <p:nvPr/>
         </p:nvSpPr>
@@ -5741,24 +4711,24 @@
           <a:fillRef idx="3">
             <a:schemeClr val="accent1"/>
           </a:fillRef>
-          <a:effectRef idx="2">
-            <a:schemeClr val="accent1"/>
-          </a:effectRef>
-          <a:fontRef idx="minor">
-            <a:schemeClr val="lt1"/>
-          </a:fontRef>
-        </p:style>
-        <p:txBody>
-          <a:bodyPr rtlCol="0" anchor="ctr"/>
-          <a:lstStyle/>
-          <a:p>
-            <a:pPr algn="ctr"/>
-          </a:p>
-        </p:txBody>
-      </p:sp>
-      <p:sp>
-        <p:nvSpPr>
-          <p:cNvPr id="19" name="Rectangle 18"/>
+          <a:effectRef idx="0">
+            <a:schemeClr val="accent1"/>
+          </a:effectRef>
+          <a:fontRef idx="minor">
+            <a:schemeClr val="lt1"/>
+          </a:fontRef>
+        </p:style>
+        <p:txBody>
+          <a:bodyPr rtlCol="0" anchor="ctr"/>
+          <a:lstStyle/>
+          <a:p>
+            <a:pPr algn="ctr"/>
+          </a:p>
+        </p:txBody>
+      </p:sp>
+      <p:sp>
+        <p:nvSpPr>
+          <p:cNvPr id="10" name="Rectangle 9"/>
           <p:cNvSpPr/>
           <p:nvPr/>
         </p:nvSpPr>
@@ -5785,24 +4755,24 @@
           <a:fillRef idx="3">
             <a:schemeClr val="accent1"/>
           </a:fillRef>
-          <a:effectRef idx="2">
-            <a:schemeClr val="accent1"/>
-          </a:effectRef>
-          <a:fontRef idx="minor">
-            <a:schemeClr val="lt1"/>
-          </a:fontRef>
-        </p:style>
-        <p:txBody>
-          <a:bodyPr rtlCol="0" anchor="ctr"/>
-          <a:lstStyle/>
-          <a:p>
-            <a:pPr algn="ctr"/>
-          </a:p>
-        </p:txBody>
-      </p:sp>
-      <p:sp>
-        <p:nvSpPr>
-          <p:cNvPr id="20" name="Rectangle 19"/>
+          <a:effectRef idx="0">
+            <a:schemeClr val="accent1"/>
+          </a:effectRef>
+          <a:fontRef idx="minor">
+            <a:schemeClr val="lt1"/>
+          </a:fontRef>
+        </p:style>
+        <p:txBody>
+          <a:bodyPr rtlCol="0" anchor="ctr"/>
+          <a:lstStyle/>
+          <a:p>
+            <a:pPr algn="ctr"/>
+          </a:p>
+        </p:txBody>
+      </p:sp>
+      <p:sp>
+        <p:nvSpPr>
+          <p:cNvPr id="11" name="Rectangle 10"/>
           <p:cNvSpPr/>
           <p:nvPr/>
         </p:nvSpPr>
@@ -5829,24 +4799,24 @@
           <a:fillRef idx="3">
             <a:schemeClr val="accent1"/>
           </a:fillRef>
-          <a:effectRef idx="2">
-            <a:schemeClr val="accent1"/>
-          </a:effectRef>
-          <a:fontRef idx="minor">
-            <a:schemeClr val="lt1"/>
-          </a:fontRef>
-        </p:style>
-        <p:txBody>
-          <a:bodyPr rtlCol="0" anchor="ctr"/>
-          <a:lstStyle/>
-          <a:p>
-            <a:pPr algn="ctr"/>
-          </a:p>
-        </p:txBody>
-      </p:sp>
-      <p:sp>
-        <p:nvSpPr>
-          <p:cNvPr id="21" name="Rectangle 20"/>
+          <a:effectRef idx="0">
+            <a:schemeClr val="accent1"/>
+          </a:effectRef>
+          <a:fontRef idx="minor">
+            <a:schemeClr val="lt1"/>
+          </a:fontRef>
+        </p:style>
+        <p:txBody>
+          <a:bodyPr rtlCol="0" anchor="ctr"/>
+          <a:lstStyle/>
+          <a:p>
+            <a:pPr algn="ctr"/>
+          </a:p>
+        </p:txBody>
+      </p:sp>
+      <p:sp>
+        <p:nvSpPr>
+          <p:cNvPr id="12" name="Rectangle 11"/>
           <p:cNvSpPr/>
           <p:nvPr/>
         </p:nvSpPr>
@@ -5873,24 +4843,24 @@
           <a:fillRef idx="3">
             <a:schemeClr val="accent1"/>
           </a:fillRef>
-          <a:effectRef idx="2">
-            <a:schemeClr val="accent1"/>
-          </a:effectRef>
-          <a:fontRef idx="minor">
-            <a:schemeClr val="lt1"/>
-          </a:fontRef>
-        </p:style>
-        <p:txBody>
-          <a:bodyPr rtlCol="0" anchor="ctr"/>
-          <a:lstStyle/>
-          <a:p>
-            <a:pPr algn="ctr"/>
-          </a:p>
-        </p:txBody>
-      </p:sp>
-      <p:sp>
-        <p:nvSpPr>
-          <p:cNvPr id="22" name="Rectangle 21"/>
+          <a:effectRef idx="0">
+            <a:schemeClr val="accent1"/>
+          </a:effectRef>
+          <a:fontRef idx="minor">
+            <a:schemeClr val="lt1"/>
+          </a:fontRef>
+        </p:style>
+        <p:txBody>
+          <a:bodyPr rtlCol="0" anchor="ctr"/>
+          <a:lstStyle/>
+          <a:p>
+            <a:pPr algn="ctr"/>
+          </a:p>
+        </p:txBody>
+      </p:sp>
+      <p:sp>
+        <p:nvSpPr>
+          <p:cNvPr id="13" name="Rectangle 12"/>
           <p:cNvSpPr/>
           <p:nvPr/>
         </p:nvSpPr>
@@ -5917,24 +4887,24 @@
           <a:fillRef idx="3">
             <a:schemeClr val="accent1"/>
           </a:fillRef>
-          <a:effectRef idx="2">
-            <a:schemeClr val="accent1"/>
-          </a:effectRef>
-          <a:fontRef idx="minor">
-            <a:schemeClr val="lt1"/>
-          </a:fontRef>
-        </p:style>
-        <p:txBody>
-          <a:bodyPr rtlCol="0" anchor="ctr"/>
-          <a:lstStyle/>
-          <a:p>
-            <a:pPr algn="ctr"/>
-          </a:p>
-        </p:txBody>
-      </p:sp>
-      <p:sp>
-        <p:nvSpPr>
-          <p:cNvPr id="23" name="Rectangle 22"/>
+          <a:effectRef idx="0">
+            <a:schemeClr val="accent1"/>
+          </a:effectRef>
+          <a:fontRef idx="minor">
+            <a:schemeClr val="lt1"/>
+          </a:fontRef>
+        </p:style>
+        <p:txBody>
+          <a:bodyPr rtlCol="0" anchor="ctr"/>
+          <a:lstStyle/>
+          <a:p>
+            <a:pPr algn="ctr"/>
+          </a:p>
+        </p:txBody>
+      </p:sp>
+      <p:sp>
+        <p:nvSpPr>
+          <p:cNvPr id="14" name="Rectangle 13"/>
           <p:cNvSpPr/>
           <p:nvPr/>
         </p:nvSpPr>
@@ -5961,24 +4931,24 @@
           <a:fillRef idx="3">
             <a:schemeClr val="accent1"/>
           </a:fillRef>
-          <a:effectRef idx="2">
-            <a:schemeClr val="accent1"/>
-          </a:effectRef>
-          <a:fontRef idx="minor">
-            <a:schemeClr val="lt1"/>
-          </a:fontRef>
-        </p:style>
-        <p:txBody>
-          <a:bodyPr rtlCol="0" anchor="ctr"/>
-          <a:lstStyle/>
-          <a:p>
-            <a:pPr algn="ctr"/>
-          </a:p>
-        </p:txBody>
-      </p:sp>
-      <p:sp>
-        <p:nvSpPr>
-          <p:cNvPr id="24" name="Rectangle 23"/>
+          <a:effectRef idx="0">
+            <a:schemeClr val="accent1"/>
+          </a:effectRef>
+          <a:fontRef idx="minor">
+            <a:schemeClr val="lt1"/>
+          </a:fontRef>
+        </p:style>
+        <p:txBody>
+          <a:bodyPr rtlCol="0" anchor="ctr"/>
+          <a:lstStyle/>
+          <a:p>
+            <a:pPr algn="ctr"/>
+          </a:p>
+        </p:txBody>
+      </p:sp>
+      <p:sp>
+        <p:nvSpPr>
+          <p:cNvPr id="15" name="Rectangle 14"/>
           <p:cNvSpPr/>
           <p:nvPr/>
         </p:nvSpPr>
@@ -6005,24 +4975,24 @@
           <a:fillRef idx="3">
             <a:schemeClr val="accent1"/>
           </a:fillRef>
-          <a:effectRef idx="2">
-            <a:schemeClr val="accent1"/>
-          </a:effectRef>
-          <a:fontRef idx="minor">
-            <a:schemeClr val="lt1"/>
-          </a:fontRef>
-        </p:style>
-        <p:txBody>
-          <a:bodyPr rtlCol="0" anchor="ctr"/>
-          <a:lstStyle/>
-          <a:p>
-            <a:pPr algn="ctr"/>
-          </a:p>
-        </p:txBody>
-      </p:sp>
-      <p:sp>
-        <p:nvSpPr>
-          <p:cNvPr id="25" name="Rectangle 24"/>
+          <a:effectRef idx="0">
+            <a:schemeClr val="accent1"/>
+          </a:effectRef>
+          <a:fontRef idx="minor">
+            <a:schemeClr val="lt1"/>
+          </a:fontRef>
+        </p:style>
+        <p:txBody>
+          <a:bodyPr rtlCol="0" anchor="ctr"/>
+          <a:lstStyle/>
+          <a:p>
+            <a:pPr algn="ctr"/>
+          </a:p>
+        </p:txBody>
+      </p:sp>
+      <p:sp>
+        <p:nvSpPr>
+          <p:cNvPr id="16" name="Rectangle 15"/>
           <p:cNvSpPr/>
           <p:nvPr/>
         </p:nvSpPr>
@@ -6049,24 +5019,24 @@
           <a:fillRef idx="3">
             <a:schemeClr val="accent1"/>
           </a:fillRef>
-          <a:effectRef idx="2">
-            <a:schemeClr val="accent1"/>
-          </a:effectRef>
-          <a:fontRef idx="minor">
-            <a:schemeClr val="lt1"/>
-          </a:fontRef>
-        </p:style>
-        <p:txBody>
-          <a:bodyPr rtlCol="0" anchor="ctr"/>
-          <a:lstStyle/>
-          <a:p>
-            <a:pPr algn="ctr"/>
-          </a:p>
-        </p:txBody>
-      </p:sp>
-      <p:sp>
-        <p:nvSpPr>
-          <p:cNvPr id="26" name="Oval 25"/>
+          <a:effectRef idx="0">
+            <a:schemeClr val="accent1"/>
+          </a:effectRef>
+          <a:fontRef idx="minor">
+            <a:schemeClr val="lt1"/>
+          </a:fontRef>
+        </p:style>
+        <p:txBody>
+          <a:bodyPr rtlCol="0" anchor="ctr"/>
+          <a:lstStyle/>
+          <a:p>
+            <a:pPr algn="ctr"/>
+          </a:p>
+        </p:txBody>
+      </p:sp>
+      <p:sp>
+        <p:nvSpPr>
+          <p:cNvPr id="17" name="Oval 16"/>
           <p:cNvSpPr/>
           <p:nvPr/>
         </p:nvSpPr>
@@ -6093,24 +5063,24 @@
           <a:fillRef idx="3">
             <a:schemeClr val="accent1"/>
           </a:fillRef>
-          <a:effectRef idx="2">
-            <a:schemeClr val="accent1"/>
-          </a:effectRef>
-          <a:fontRef idx="minor">
-            <a:schemeClr val="lt1"/>
-          </a:fontRef>
-        </p:style>
-        <p:txBody>
-          <a:bodyPr rtlCol="0" anchor="ctr"/>
-          <a:lstStyle/>
-          <a:p>
-            <a:pPr algn="ctr"/>
-          </a:p>
-        </p:txBody>
-      </p:sp>
-      <p:sp>
-        <p:nvSpPr>
-          <p:cNvPr id="27" name="TextBox 26"/>
+          <a:effectRef idx="0">
+            <a:schemeClr val="accent1"/>
+          </a:effectRef>
+          <a:fontRef idx="minor">
+            <a:schemeClr val="lt1"/>
+          </a:fontRef>
+        </p:style>
+        <p:txBody>
+          <a:bodyPr rtlCol="0" anchor="ctr"/>
+          <a:lstStyle/>
+          <a:p>
+            <a:pPr algn="ctr"/>
+          </a:p>
+        </p:txBody>
+      </p:sp>
+      <p:sp>
+        <p:nvSpPr>
+          <p:cNvPr id="18" name="TextBox 17"/>
           <p:cNvSpPr txBox="1"/>
           <p:nvPr/>
         </p:nvSpPr>
@@ -6156,7 +5126,7 @@
       </p:sp>
       <p:sp>
         <p:nvSpPr>
-          <p:cNvPr id="28" name="TextBox 27"/>
+          <p:cNvPr id="19" name="TextBox 18"/>
           <p:cNvSpPr txBox="1"/>
           <p:nvPr/>
         </p:nvSpPr>
@@ -6202,7 +5172,7 @@
       </p:sp>
       <p:sp>
         <p:nvSpPr>
-          <p:cNvPr id="29" name="Oval 28"/>
+          <p:cNvPr id="20" name="Oval 19"/>
           <p:cNvSpPr/>
           <p:nvPr/>
         </p:nvSpPr>
@@ -6229,24 +5199,24 @@
           <a:fillRef idx="3">
             <a:schemeClr val="accent1"/>
           </a:fillRef>
-          <a:effectRef idx="2">
-            <a:schemeClr val="accent1"/>
-          </a:effectRef>
-          <a:fontRef idx="minor">
-            <a:schemeClr val="lt1"/>
-          </a:fontRef>
-        </p:style>
-        <p:txBody>
-          <a:bodyPr rtlCol="0" anchor="ctr"/>
-          <a:lstStyle/>
-          <a:p>
-            <a:pPr algn="ctr"/>
-          </a:p>
-        </p:txBody>
-      </p:sp>
-      <p:sp>
-        <p:nvSpPr>
-          <p:cNvPr id="30" name="Rectangle 29"/>
+          <a:effectRef idx="0">
+            <a:schemeClr val="accent1"/>
+          </a:effectRef>
+          <a:fontRef idx="minor">
+            <a:schemeClr val="lt1"/>
+          </a:fontRef>
+        </p:style>
+        <p:txBody>
+          <a:bodyPr rtlCol="0" anchor="ctr"/>
+          <a:lstStyle/>
+          <a:p>
+            <a:pPr algn="ctr"/>
+          </a:p>
+        </p:txBody>
+      </p:sp>
+      <p:sp>
+        <p:nvSpPr>
+          <p:cNvPr id="21" name="Rectangle 20"/>
           <p:cNvSpPr/>
           <p:nvPr/>
         </p:nvSpPr>
@@ -6273,24 +5243,24 @@
           <a:fillRef idx="3">
             <a:schemeClr val="accent1"/>
           </a:fillRef>
-          <a:effectRef idx="2">
-            <a:schemeClr val="accent1"/>
-          </a:effectRef>
-          <a:fontRef idx="minor">
-            <a:schemeClr val="lt1"/>
-          </a:fontRef>
-        </p:style>
-        <p:txBody>
-          <a:bodyPr rtlCol="0" anchor="ctr"/>
-          <a:lstStyle/>
-          <a:p>
-            <a:pPr algn="ctr"/>
-          </a:p>
-        </p:txBody>
-      </p:sp>
-      <p:sp>
-        <p:nvSpPr>
-          <p:cNvPr id="31" name="Rectangle 30"/>
+          <a:effectRef idx="0">
+            <a:schemeClr val="accent1"/>
+          </a:effectRef>
+          <a:fontRef idx="minor">
+            <a:schemeClr val="lt1"/>
+          </a:fontRef>
+        </p:style>
+        <p:txBody>
+          <a:bodyPr rtlCol="0" anchor="ctr"/>
+          <a:lstStyle/>
+          <a:p>
+            <a:pPr algn="ctr"/>
+          </a:p>
+        </p:txBody>
+      </p:sp>
+      <p:sp>
+        <p:nvSpPr>
+          <p:cNvPr id="22" name="Rectangle 21"/>
           <p:cNvSpPr/>
           <p:nvPr/>
         </p:nvSpPr>
@@ -6317,24 +5287,24 @@
           <a:fillRef idx="3">
             <a:schemeClr val="accent1"/>
           </a:fillRef>
-          <a:effectRef idx="2">
-            <a:schemeClr val="accent1"/>
-          </a:effectRef>
-          <a:fontRef idx="minor">
-            <a:schemeClr val="lt1"/>
-          </a:fontRef>
-        </p:style>
-        <p:txBody>
-          <a:bodyPr rtlCol="0" anchor="ctr"/>
-          <a:lstStyle/>
-          <a:p>
-            <a:pPr algn="ctr"/>
-          </a:p>
-        </p:txBody>
-      </p:sp>
-      <p:sp>
-        <p:nvSpPr>
-          <p:cNvPr id="32" name="Rectangle 31"/>
+          <a:effectRef idx="0">
+            <a:schemeClr val="accent1"/>
+          </a:effectRef>
+          <a:fontRef idx="minor">
+            <a:schemeClr val="lt1"/>
+          </a:fontRef>
+        </p:style>
+        <p:txBody>
+          <a:bodyPr rtlCol="0" anchor="ctr"/>
+          <a:lstStyle/>
+          <a:p>
+            <a:pPr algn="ctr"/>
+          </a:p>
+        </p:txBody>
+      </p:sp>
+      <p:sp>
+        <p:nvSpPr>
+          <p:cNvPr id="23" name="Rectangle 22"/>
           <p:cNvSpPr/>
           <p:nvPr/>
         </p:nvSpPr>
@@ -6361,24 +5331,24 @@
           <a:fillRef idx="3">
             <a:schemeClr val="accent1"/>
           </a:fillRef>
-          <a:effectRef idx="2">
-            <a:schemeClr val="accent1"/>
-          </a:effectRef>
-          <a:fontRef idx="minor">
-            <a:schemeClr val="lt1"/>
-          </a:fontRef>
-        </p:style>
-        <p:txBody>
-          <a:bodyPr rtlCol="0" anchor="ctr"/>
-          <a:lstStyle/>
-          <a:p>
-            <a:pPr algn="ctr"/>
-          </a:p>
-        </p:txBody>
-      </p:sp>
-      <p:sp>
-        <p:nvSpPr>
-          <p:cNvPr id="33" name="Rectangle 32"/>
+          <a:effectRef idx="0">
+            <a:schemeClr val="accent1"/>
+          </a:effectRef>
+          <a:fontRef idx="minor">
+            <a:schemeClr val="lt1"/>
+          </a:fontRef>
+        </p:style>
+        <p:txBody>
+          <a:bodyPr rtlCol="0" anchor="ctr"/>
+          <a:lstStyle/>
+          <a:p>
+            <a:pPr algn="ctr"/>
+          </a:p>
+        </p:txBody>
+      </p:sp>
+      <p:sp>
+        <p:nvSpPr>
+          <p:cNvPr id="24" name="Rectangle 23"/>
           <p:cNvSpPr/>
           <p:nvPr/>
         </p:nvSpPr>
@@ -6405,24 +5375,24 @@
           <a:fillRef idx="3">
             <a:schemeClr val="accent1"/>
           </a:fillRef>
-          <a:effectRef idx="2">
-            <a:schemeClr val="accent1"/>
-          </a:effectRef>
-          <a:fontRef idx="minor">
-            <a:schemeClr val="lt1"/>
-          </a:fontRef>
-        </p:style>
-        <p:txBody>
-          <a:bodyPr rtlCol="0" anchor="ctr"/>
-          <a:lstStyle/>
-          <a:p>
-            <a:pPr algn="ctr"/>
-          </a:p>
-        </p:txBody>
-      </p:sp>
-      <p:sp>
-        <p:nvSpPr>
-          <p:cNvPr id="34" name="Rectangle 33"/>
+          <a:effectRef idx="0">
+            <a:schemeClr val="accent1"/>
+          </a:effectRef>
+          <a:fontRef idx="minor">
+            <a:schemeClr val="lt1"/>
+          </a:fontRef>
+        </p:style>
+        <p:txBody>
+          <a:bodyPr rtlCol="0" anchor="ctr"/>
+          <a:lstStyle/>
+          <a:p>
+            <a:pPr algn="ctr"/>
+          </a:p>
+        </p:txBody>
+      </p:sp>
+      <p:sp>
+        <p:nvSpPr>
+          <p:cNvPr id="25" name="Rectangle 24"/>
           <p:cNvSpPr/>
           <p:nvPr/>
         </p:nvSpPr>
@@ -6449,24 +5419,24 @@
           <a:fillRef idx="3">
             <a:schemeClr val="accent1"/>
           </a:fillRef>
-          <a:effectRef idx="2">
-            <a:schemeClr val="accent1"/>
-          </a:effectRef>
-          <a:fontRef idx="minor">
-            <a:schemeClr val="lt1"/>
-          </a:fontRef>
-        </p:style>
-        <p:txBody>
-          <a:bodyPr rtlCol="0" anchor="ctr"/>
-          <a:lstStyle/>
-          <a:p>
-            <a:pPr algn="ctr"/>
-          </a:p>
-        </p:txBody>
-      </p:sp>
-      <p:sp>
-        <p:nvSpPr>
-          <p:cNvPr id="35" name="Rectangle 34"/>
+          <a:effectRef idx="0">
+            <a:schemeClr val="accent1"/>
+          </a:effectRef>
+          <a:fontRef idx="minor">
+            <a:schemeClr val="lt1"/>
+          </a:fontRef>
+        </p:style>
+        <p:txBody>
+          <a:bodyPr rtlCol="0" anchor="ctr"/>
+          <a:lstStyle/>
+          <a:p>
+            <a:pPr algn="ctr"/>
+          </a:p>
+        </p:txBody>
+      </p:sp>
+      <p:sp>
+        <p:nvSpPr>
+          <p:cNvPr id="26" name="Rectangle 25"/>
           <p:cNvSpPr/>
           <p:nvPr/>
         </p:nvSpPr>
@@ -6493,24 +5463,24 @@
           <a:fillRef idx="3">
             <a:schemeClr val="accent1"/>
           </a:fillRef>
-          <a:effectRef idx="2">
-            <a:schemeClr val="accent1"/>
-          </a:effectRef>
-          <a:fontRef idx="minor">
-            <a:schemeClr val="lt1"/>
-          </a:fontRef>
-        </p:style>
-        <p:txBody>
-          <a:bodyPr rtlCol="0" anchor="ctr"/>
-          <a:lstStyle/>
-          <a:p>
-            <a:pPr algn="ctr"/>
-          </a:p>
-        </p:txBody>
-      </p:sp>
-      <p:sp>
-        <p:nvSpPr>
-          <p:cNvPr id="36" name="Rectangle 35"/>
+          <a:effectRef idx="0">
+            <a:schemeClr val="accent1"/>
+          </a:effectRef>
+          <a:fontRef idx="minor">
+            <a:schemeClr val="lt1"/>
+          </a:fontRef>
+        </p:style>
+        <p:txBody>
+          <a:bodyPr rtlCol="0" anchor="ctr"/>
+          <a:lstStyle/>
+          <a:p>
+            <a:pPr algn="ctr"/>
+          </a:p>
+        </p:txBody>
+      </p:sp>
+      <p:sp>
+        <p:nvSpPr>
+          <p:cNvPr id="27" name="Rectangle 26"/>
           <p:cNvSpPr/>
           <p:nvPr/>
         </p:nvSpPr>
@@ -6537,24 +5507,24 @@
           <a:fillRef idx="3">
             <a:schemeClr val="accent1"/>
           </a:fillRef>
-          <a:effectRef idx="2">
-            <a:schemeClr val="accent1"/>
-          </a:effectRef>
-          <a:fontRef idx="minor">
-            <a:schemeClr val="lt1"/>
-          </a:fontRef>
-        </p:style>
-        <p:txBody>
-          <a:bodyPr rtlCol="0" anchor="ctr"/>
-          <a:lstStyle/>
-          <a:p>
-            <a:pPr algn="ctr"/>
-          </a:p>
-        </p:txBody>
-      </p:sp>
-      <p:sp>
-        <p:nvSpPr>
-          <p:cNvPr id="37" name="Rectangle 36"/>
+          <a:effectRef idx="0">
+            <a:schemeClr val="accent1"/>
+          </a:effectRef>
+          <a:fontRef idx="minor">
+            <a:schemeClr val="lt1"/>
+          </a:fontRef>
+        </p:style>
+        <p:txBody>
+          <a:bodyPr rtlCol="0" anchor="ctr"/>
+          <a:lstStyle/>
+          <a:p>
+            <a:pPr algn="ctr"/>
+          </a:p>
+        </p:txBody>
+      </p:sp>
+      <p:sp>
+        <p:nvSpPr>
+          <p:cNvPr id="28" name="Rectangle 27"/>
           <p:cNvSpPr/>
           <p:nvPr/>
         </p:nvSpPr>
@@ -6581,24 +5551,24 @@
           <a:fillRef idx="3">
             <a:schemeClr val="accent1"/>
           </a:fillRef>
-          <a:effectRef idx="2">
-            <a:schemeClr val="accent1"/>
-          </a:effectRef>
-          <a:fontRef idx="minor">
-            <a:schemeClr val="lt1"/>
-          </a:fontRef>
-        </p:style>
-        <p:txBody>
-          <a:bodyPr rtlCol="0" anchor="ctr"/>
-          <a:lstStyle/>
-          <a:p>
-            <a:pPr algn="ctr"/>
-          </a:p>
-        </p:txBody>
-      </p:sp>
-      <p:sp>
-        <p:nvSpPr>
-          <p:cNvPr id="38" name="Oval 37"/>
+          <a:effectRef idx="0">
+            <a:schemeClr val="accent1"/>
+          </a:effectRef>
+          <a:fontRef idx="minor">
+            <a:schemeClr val="lt1"/>
+          </a:fontRef>
+        </p:style>
+        <p:txBody>
+          <a:bodyPr rtlCol="0" anchor="ctr"/>
+          <a:lstStyle/>
+          <a:p>
+            <a:pPr algn="ctr"/>
+          </a:p>
+        </p:txBody>
+      </p:sp>
+      <p:sp>
+        <p:nvSpPr>
+          <p:cNvPr id="29" name="Oval 28"/>
           <p:cNvSpPr/>
           <p:nvPr/>
         </p:nvSpPr>
@@ -6625,24 +5595,24 @@
           <a:fillRef idx="3">
             <a:schemeClr val="accent1"/>
           </a:fillRef>
-          <a:effectRef idx="2">
-            <a:schemeClr val="accent1"/>
-          </a:effectRef>
-          <a:fontRef idx="minor">
-            <a:schemeClr val="lt1"/>
-          </a:fontRef>
-        </p:style>
-        <p:txBody>
-          <a:bodyPr rtlCol="0" anchor="ctr"/>
-          <a:lstStyle/>
-          <a:p>
-            <a:pPr algn="ctr"/>
-          </a:p>
-        </p:txBody>
-      </p:sp>
-      <p:sp>
-        <p:nvSpPr>
-          <p:cNvPr id="39" name="TextBox 38"/>
+          <a:effectRef idx="0">
+            <a:schemeClr val="accent1"/>
+          </a:effectRef>
+          <a:fontRef idx="minor">
+            <a:schemeClr val="lt1"/>
+          </a:fontRef>
+        </p:style>
+        <p:txBody>
+          <a:bodyPr rtlCol="0" anchor="ctr"/>
+          <a:lstStyle/>
+          <a:p>
+            <a:pPr algn="ctr"/>
+          </a:p>
+        </p:txBody>
+      </p:sp>
+      <p:sp>
+        <p:nvSpPr>
+          <p:cNvPr id="30" name="TextBox 29"/>
           <p:cNvSpPr txBox="1"/>
           <p:nvPr/>
         </p:nvSpPr>
@@ -6688,7 +5658,7 @@
       </p:sp>
       <p:sp>
         <p:nvSpPr>
-          <p:cNvPr id="40" name="TextBox 39"/>
+          <p:cNvPr id="31" name="TextBox 30"/>
           <p:cNvSpPr txBox="1"/>
           <p:nvPr/>
         </p:nvSpPr>
@@ -6756,7 +5726,7 @@
       </p:sp>
       <p:sp>
         <p:nvSpPr>
-          <p:cNvPr id="41" name="Oval 40"/>
+          <p:cNvPr id="32" name="Oval 31"/>
           <p:cNvSpPr/>
           <p:nvPr/>
         </p:nvSpPr>
@@ -6783,24 +5753,24 @@
           <a:fillRef idx="3">
             <a:schemeClr val="accent1"/>
           </a:fillRef>
-          <a:effectRef idx="2">
-            <a:schemeClr val="accent1"/>
-          </a:effectRef>
-          <a:fontRef idx="minor">
-            <a:schemeClr val="lt1"/>
-          </a:fontRef>
-        </p:style>
-        <p:txBody>
-          <a:bodyPr rtlCol="0" anchor="ctr"/>
-          <a:lstStyle/>
-          <a:p>
-            <a:pPr algn="ctr"/>
-          </a:p>
-        </p:txBody>
-      </p:sp>
-      <p:sp>
-        <p:nvSpPr>
-          <p:cNvPr id="42" name="Rectangle 41"/>
+          <a:effectRef idx="0">
+            <a:schemeClr val="accent1"/>
+          </a:effectRef>
+          <a:fontRef idx="minor">
+            <a:schemeClr val="lt1"/>
+          </a:fontRef>
+        </p:style>
+        <p:txBody>
+          <a:bodyPr rtlCol="0" anchor="ctr"/>
+          <a:lstStyle/>
+          <a:p>
+            <a:pPr algn="ctr"/>
+          </a:p>
+        </p:txBody>
+      </p:sp>
+      <p:sp>
+        <p:nvSpPr>
+          <p:cNvPr id="33" name="Rectangle 32"/>
           <p:cNvSpPr/>
           <p:nvPr/>
         </p:nvSpPr>
@@ -6827,24 +5797,24 @@
           <a:fillRef idx="3">
             <a:schemeClr val="accent1"/>
           </a:fillRef>
-          <a:effectRef idx="2">
-            <a:schemeClr val="accent1"/>
-          </a:effectRef>
-          <a:fontRef idx="minor">
-            <a:schemeClr val="lt1"/>
-          </a:fontRef>
-        </p:style>
-        <p:txBody>
-          <a:bodyPr rtlCol="0" anchor="ctr"/>
-          <a:lstStyle/>
-          <a:p>
-            <a:pPr algn="ctr"/>
-          </a:p>
-        </p:txBody>
-      </p:sp>
-      <p:sp>
-        <p:nvSpPr>
-          <p:cNvPr id="43" name="Rectangle 42"/>
+          <a:effectRef idx="0">
+            <a:schemeClr val="accent1"/>
+          </a:effectRef>
+          <a:fontRef idx="minor">
+            <a:schemeClr val="lt1"/>
+          </a:fontRef>
+        </p:style>
+        <p:txBody>
+          <a:bodyPr rtlCol="0" anchor="ctr"/>
+          <a:lstStyle/>
+          <a:p>
+            <a:pPr algn="ctr"/>
+          </a:p>
+        </p:txBody>
+      </p:sp>
+      <p:sp>
+        <p:nvSpPr>
+          <p:cNvPr id="34" name="Rectangle 33"/>
           <p:cNvSpPr/>
           <p:nvPr/>
         </p:nvSpPr>
@@ -6871,24 +5841,24 @@
           <a:fillRef idx="3">
             <a:schemeClr val="accent1"/>
           </a:fillRef>
-          <a:effectRef idx="2">
-            <a:schemeClr val="accent1"/>
-          </a:effectRef>
-          <a:fontRef idx="minor">
-            <a:schemeClr val="lt1"/>
-          </a:fontRef>
-        </p:style>
-        <p:txBody>
-          <a:bodyPr rtlCol="0" anchor="ctr"/>
-          <a:lstStyle/>
-          <a:p>
-            <a:pPr algn="ctr"/>
-          </a:p>
-        </p:txBody>
-      </p:sp>
-      <p:sp>
-        <p:nvSpPr>
-          <p:cNvPr id="44" name="Rectangle 43"/>
+          <a:effectRef idx="0">
+            <a:schemeClr val="accent1"/>
+          </a:effectRef>
+          <a:fontRef idx="minor">
+            <a:schemeClr val="lt1"/>
+          </a:fontRef>
+        </p:style>
+        <p:txBody>
+          <a:bodyPr rtlCol="0" anchor="ctr"/>
+          <a:lstStyle/>
+          <a:p>
+            <a:pPr algn="ctr"/>
+          </a:p>
+        </p:txBody>
+      </p:sp>
+      <p:sp>
+        <p:nvSpPr>
+          <p:cNvPr id="35" name="Rectangle 34"/>
           <p:cNvSpPr/>
           <p:nvPr/>
         </p:nvSpPr>
@@ -6915,24 +5885,24 @@
           <a:fillRef idx="3">
             <a:schemeClr val="accent1"/>
           </a:fillRef>
-          <a:effectRef idx="2">
-            <a:schemeClr val="accent1"/>
-          </a:effectRef>
-          <a:fontRef idx="minor">
-            <a:schemeClr val="lt1"/>
-          </a:fontRef>
-        </p:style>
-        <p:txBody>
-          <a:bodyPr rtlCol="0" anchor="ctr"/>
-          <a:lstStyle/>
-          <a:p>
-            <a:pPr algn="ctr"/>
-          </a:p>
-        </p:txBody>
-      </p:sp>
-      <p:sp>
-        <p:nvSpPr>
-          <p:cNvPr id="45" name="Rectangle 44"/>
+          <a:effectRef idx="0">
+            <a:schemeClr val="accent1"/>
+          </a:effectRef>
+          <a:fontRef idx="minor">
+            <a:schemeClr val="lt1"/>
+          </a:fontRef>
+        </p:style>
+        <p:txBody>
+          <a:bodyPr rtlCol="0" anchor="ctr"/>
+          <a:lstStyle/>
+          <a:p>
+            <a:pPr algn="ctr"/>
+          </a:p>
+        </p:txBody>
+      </p:sp>
+      <p:sp>
+        <p:nvSpPr>
+          <p:cNvPr id="36" name="Rectangle 35"/>
           <p:cNvSpPr/>
           <p:nvPr/>
         </p:nvSpPr>
@@ -6959,24 +5929,24 @@
           <a:fillRef idx="3">
             <a:schemeClr val="accent1"/>
           </a:fillRef>
-          <a:effectRef idx="2">
-            <a:schemeClr val="accent1"/>
-          </a:effectRef>
-          <a:fontRef idx="minor">
-            <a:schemeClr val="lt1"/>
-          </a:fontRef>
-        </p:style>
-        <p:txBody>
-          <a:bodyPr rtlCol="0" anchor="ctr"/>
-          <a:lstStyle/>
-          <a:p>
-            <a:pPr algn="ctr"/>
-          </a:p>
-        </p:txBody>
-      </p:sp>
-      <p:sp>
-        <p:nvSpPr>
-          <p:cNvPr id="46" name="Rectangle 45"/>
+          <a:effectRef idx="0">
+            <a:schemeClr val="accent1"/>
+          </a:effectRef>
+          <a:fontRef idx="minor">
+            <a:schemeClr val="lt1"/>
+          </a:fontRef>
+        </p:style>
+        <p:txBody>
+          <a:bodyPr rtlCol="0" anchor="ctr"/>
+          <a:lstStyle/>
+          <a:p>
+            <a:pPr algn="ctr"/>
+          </a:p>
+        </p:txBody>
+      </p:sp>
+      <p:sp>
+        <p:nvSpPr>
+          <p:cNvPr id="37" name="Rectangle 36"/>
           <p:cNvSpPr/>
           <p:nvPr/>
         </p:nvSpPr>
@@ -7003,24 +5973,24 @@
           <a:fillRef idx="3">
             <a:schemeClr val="accent1"/>
           </a:fillRef>
-          <a:effectRef idx="2">
-            <a:schemeClr val="accent1"/>
-          </a:effectRef>
-          <a:fontRef idx="minor">
-            <a:schemeClr val="lt1"/>
-          </a:fontRef>
-        </p:style>
-        <p:txBody>
-          <a:bodyPr rtlCol="0" anchor="ctr"/>
-          <a:lstStyle/>
-          <a:p>
-            <a:pPr algn="ctr"/>
-          </a:p>
-        </p:txBody>
-      </p:sp>
-      <p:sp>
-        <p:nvSpPr>
-          <p:cNvPr id="47" name="Rectangle 46"/>
+          <a:effectRef idx="0">
+            <a:schemeClr val="accent1"/>
+          </a:effectRef>
+          <a:fontRef idx="minor">
+            <a:schemeClr val="lt1"/>
+          </a:fontRef>
+        </p:style>
+        <p:txBody>
+          <a:bodyPr rtlCol="0" anchor="ctr"/>
+          <a:lstStyle/>
+          <a:p>
+            <a:pPr algn="ctr"/>
+          </a:p>
+        </p:txBody>
+      </p:sp>
+      <p:sp>
+        <p:nvSpPr>
+          <p:cNvPr id="38" name="Rectangle 37"/>
           <p:cNvSpPr/>
           <p:nvPr/>
         </p:nvSpPr>
@@ -7047,24 +6017,24 @@
           <a:fillRef idx="3">
             <a:schemeClr val="accent1"/>
           </a:fillRef>
-          <a:effectRef idx="2">
-            <a:schemeClr val="accent1"/>
-          </a:effectRef>
-          <a:fontRef idx="minor">
-            <a:schemeClr val="lt1"/>
-          </a:fontRef>
-        </p:style>
-        <p:txBody>
-          <a:bodyPr rtlCol="0" anchor="ctr"/>
-          <a:lstStyle/>
-          <a:p>
-            <a:pPr algn="ctr"/>
-          </a:p>
-        </p:txBody>
-      </p:sp>
-      <p:sp>
-        <p:nvSpPr>
-          <p:cNvPr id="48" name="Rectangle 47"/>
+          <a:effectRef idx="0">
+            <a:schemeClr val="accent1"/>
+          </a:effectRef>
+          <a:fontRef idx="minor">
+            <a:schemeClr val="lt1"/>
+          </a:fontRef>
+        </p:style>
+        <p:txBody>
+          <a:bodyPr rtlCol="0" anchor="ctr"/>
+          <a:lstStyle/>
+          <a:p>
+            <a:pPr algn="ctr"/>
+          </a:p>
+        </p:txBody>
+      </p:sp>
+      <p:sp>
+        <p:nvSpPr>
+          <p:cNvPr id="39" name="Rectangle 38"/>
           <p:cNvSpPr/>
           <p:nvPr/>
         </p:nvSpPr>
@@ -7091,24 +6061,24 @@
           <a:fillRef idx="3">
             <a:schemeClr val="accent1"/>
           </a:fillRef>
-          <a:effectRef idx="2">
-            <a:schemeClr val="accent1"/>
-          </a:effectRef>
-          <a:fontRef idx="minor">
-            <a:schemeClr val="lt1"/>
-          </a:fontRef>
-        </p:style>
-        <p:txBody>
-          <a:bodyPr rtlCol="0" anchor="ctr"/>
-          <a:lstStyle/>
-          <a:p>
-            <a:pPr algn="ctr"/>
-          </a:p>
-        </p:txBody>
-      </p:sp>
-      <p:sp>
-        <p:nvSpPr>
-          <p:cNvPr id="49" name="Rectangle 48"/>
+          <a:effectRef idx="0">
+            <a:schemeClr val="accent1"/>
+          </a:effectRef>
+          <a:fontRef idx="minor">
+            <a:schemeClr val="lt1"/>
+          </a:fontRef>
+        </p:style>
+        <p:txBody>
+          <a:bodyPr rtlCol="0" anchor="ctr"/>
+          <a:lstStyle/>
+          <a:p>
+            <a:pPr algn="ctr"/>
+          </a:p>
+        </p:txBody>
+      </p:sp>
+      <p:sp>
+        <p:nvSpPr>
+          <p:cNvPr id="40" name="Rectangle 39"/>
           <p:cNvSpPr/>
           <p:nvPr/>
         </p:nvSpPr>
@@ -7135,24 +6105,24 @@
           <a:fillRef idx="3">
             <a:schemeClr val="accent1"/>
           </a:fillRef>
-          <a:effectRef idx="2">
-            <a:schemeClr val="accent1"/>
-          </a:effectRef>
-          <a:fontRef idx="minor">
-            <a:schemeClr val="lt1"/>
-          </a:fontRef>
-        </p:style>
-        <p:txBody>
-          <a:bodyPr rtlCol="0" anchor="ctr"/>
-          <a:lstStyle/>
-          <a:p>
-            <a:pPr algn="ctr"/>
-          </a:p>
-        </p:txBody>
-      </p:sp>
-      <p:sp>
-        <p:nvSpPr>
-          <p:cNvPr id="50" name="Oval 49"/>
+          <a:effectRef idx="0">
+            <a:schemeClr val="accent1"/>
+          </a:effectRef>
+          <a:fontRef idx="minor">
+            <a:schemeClr val="lt1"/>
+          </a:fontRef>
+        </p:style>
+        <p:txBody>
+          <a:bodyPr rtlCol="0" anchor="ctr"/>
+          <a:lstStyle/>
+          <a:p>
+            <a:pPr algn="ctr"/>
+          </a:p>
+        </p:txBody>
+      </p:sp>
+      <p:sp>
+        <p:nvSpPr>
+          <p:cNvPr id="41" name="Oval 40"/>
           <p:cNvSpPr/>
           <p:nvPr/>
         </p:nvSpPr>
@@ -7179,24 +6149,24 @@
           <a:fillRef idx="3">
             <a:schemeClr val="accent1"/>
           </a:fillRef>
-          <a:effectRef idx="2">
-            <a:schemeClr val="accent1"/>
-          </a:effectRef>
-          <a:fontRef idx="minor">
-            <a:schemeClr val="lt1"/>
-          </a:fontRef>
-        </p:style>
-        <p:txBody>
-          <a:bodyPr rtlCol="0" anchor="ctr"/>
-          <a:lstStyle/>
-          <a:p>
-            <a:pPr algn="ctr"/>
-          </a:p>
-        </p:txBody>
-      </p:sp>
-      <p:sp>
-        <p:nvSpPr>
-          <p:cNvPr id="51" name="TextBox 50"/>
+          <a:effectRef idx="0">
+            <a:schemeClr val="accent1"/>
+          </a:effectRef>
+          <a:fontRef idx="minor">
+            <a:schemeClr val="lt1"/>
+          </a:fontRef>
+        </p:style>
+        <p:txBody>
+          <a:bodyPr rtlCol="0" anchor="ctr"/>
+          <a:lstStyle/>
+          <a:p>
+            <a:pPr algn="ctr"/>
+          </a:p>
+        </p:txBody>
+      </p:sp>
+      <p:sp>
+        <p:nvSpPr>
+          <p:cNvPr id="42" name="TextBox 41"/>
           <p:cNvSpPr txBox="1"/>
           <p:nvPr/>
         </p:nvSpPr>
@@ -7242,7 +6212,7 @@
       </p:sp>
       <p:sp>
         <p:nvSpPr>
-          <p:cNvPr id="52" name="TextBox 51"/>
+          <p:cNvPr id="43" name="TextBox 42"/>
           <p:cNvSpPr txBox="1"/>
           <p:nvPr/>
         </p:nvSpPr>
@@ -7288,7 +6258,7 @@
       </p:sp>
       <p:sp>
         <p:nvSpPr>
-          <p:cNvPr id="53" name="Oval 52"/>
+          <p:cNvPr id="44" name="Oval 43"/>
           <p:cNvSpPr/>
           <p:nvPr/>
         </p:nvSpPr>
@@ -7315,24 +6285,24 @@
           <a:fillRef idx="3">
             <a:schemeClr val="accent1"/>
           </a:fillRef>
-          <a:effectRef idx="2">
-            <a:schemeClr val="accent1"/>
-          </a:effectRef>
-          <a:fontRef idx="minor">
-            <a:schemeClr val="lt1"/>
-          </a:fontRef>
-        </p:style>
-        <p:txBody>
-          <a:bodyPr rtlCol="0" anchor="ctr"/>
-          <a:lstStyle/>
-          <a:p>
-            <a:pPr algn="ctr"/>
-          </a:p>
-        </p:txBody>
-      </p:sp>
-      <p:sp>
-        <p:nvSpPr>
-          <p:cNvPr id="54" name="Rectangle 53"/>
+          <a:effectRef idx="0">
+            <a:schemeClr val="accent1"/>
+          </a:effectRef>
+          <a:fontRef idx="minor">
+            <a:schemeClr val="lt1"/>
+          </a:fontRef>
+        </p:style>
+        <p:txBody>
+          <a:bodyPr rtlCol="0" anchor="ctr"/>
+          <a:lstStyle/>
+          <a:p>
+            <a:pPr algn="ctr"/>
+          </a:p>
+        </p:txBody>
+      </p:sp>
+      <p:sp>
+        <p:nvSpPr>
+          <p:cNvPr id="45" name="Rectangle 44"/>
           <p:cNvSpPr/>
           <p:nvPr/>
         </p:nvSpPr>
@@ -7359,24 +6329,24 @@
           <a:fillRef idx="3">
             <a:schemeClr val="accent1"/>
           </a:fillRef>
-          <a:effectRef idx="2">
-            <a:schemeClr val="accent1"/>
-          </a:effectRef>
-          <a:fontRef idx="minor">
-            <a:schemeClr val="lt1"/>
-          </a:fontRef>
-        </p:style>
-        <p:txBody>
-          <a:bodyPr rtlCol="0" anchor="ctr"/>
-          <a:lstStyle/>
-          <a:p>
-            <a:pPr algn="ctr"/>
-          </a:p>
-        </p:txBody>
-      </p:sp>
-      <p:sp>
-        <p:nvSpPr>
-          <p:cNvPr id="55" name="Rectangle 54"/>
+          <a:effectRef idx="0">
+            <a:schemeClr val="accent1"/>
+          </a:effectRef>
+          <a:fontRef idx="minor">
+            <a:schemeClr val="lt1"/>
+          </a:fontRef>
+        </p:style>
+        <p:txBody>
+          <a:bodyPr rtlCol="0" anchor="ctr"/>
+          <a:lstStyle/>
+          <a:p>
+            <a:pPr algn="ctr"/>
+          </a:p>
+        </p:txBody>
+      </p:sp>
+      <p:sp>
+        <p:nvSpPr>
+          <p:cNvPr id="46" name="Rectangle 45"/>
           <p:cNvSpPr/>
           <p:nvPr/>
         </p:nvSpPr>
@@ -7403,24 +6373,24 @@
           <a:fillRef idx="3">
             <a:schemeClr val="accent1"/>
           </a:fillRef>
-          <a:effectRef idx="2">
-            <a:schemeClr val="accent1"/>
-          </a:effectRef>
-          <a:fontRef idx="minor">
-            <a:schemeClr val="lt1"/>
-          </a:fontRef>
-        </p:style>
-        <p:txBody>
-          <a:bodyPr rtlCol="0" anchor="ctr"/>
-          <a:lstStyle/>
-          <a:p>
-            <a:pPr algn="ctr"/>
-          </a:p>
-        </p:txBody>
-      </p:sp>
-      <p:sp>
-        <p:nvSpPr>
-          <p:cNvPr id="56" name="Rectangle 55"/>
+          <a:effectRef idx="0">
+            <a:schemeClr val="accent1"/>
+          </a:effectRef>
+          <a:fontRef idx="minor">
+            <a:schemeClr val="lt1"/>
+          </a:fontRef>
+        </p:style>
+        <p:txBody>
+          <a:bodyPr rtlCol="0" anchor="ctr"/>
+          <a:lstStyle/>
+          <a:p>
+            <a:pPr algn="ctr"/>
+          </a:p>
+        </p:txBody>
+      </p:sp>
+      <p:sp>
+        <p:nvSpPr>
+          <p:cNvPr id="47" name="Rectangle 46"/>
           <p:cNvSpPr/>
           <p:nvPr/>
         </p:nvSpPr>
@@ -7447,24 +6417,24 @@
           <a:fillRef idx="3">
             <a:schemeClr val="accent1"/>
           </a:fillRef>
-          <a:effectRef idx="2">
-            <a:schemeClr val="accent1"/>
-          </a:effectRef>
-          <a:fontRef idx="minor">
-            <a:schemeClr val="lt1"/>
-          </a:fontRef>
-        </p:style>
-        <p:txBody>
-          <a:bodyPr rtlCol="0" anchor="ctr"/>
-          <a:lstStyle/>
-          <a:p>
-            <a:pPr algn="ctr"/>
-          </a:p>
-        </p:txBody>
-      </p:sp>
-      <p:sp>
-        <p:nvSpPr>
-          <p:cNvPr id="57" name="Rectangle 56"/>
+          <a:effectRef idx="0">
+            <a:schemeClr val="accent1"/>
+          </a:effectRef>
+          <a:fontRef idx="minor">
+            <a:schemeClr val="lt1"/>
+          </a:fontRef>
+        </p:style>
+        <p:txBody>
+          <a:bodyPr rtlCol="0" anchor="ctr"/>
+          <a:lstStyle/>
+          <a:p>
+            <a:pPr algn="ctr"/>
+          </a:p>
+        </p:txBody>
+      </p:sp>
+      <p:sp>
+        <p:nvSpPr>
+          <p:cNvPr id="48" name="Rectangle 47"/>
           <p:cNvSpPr/>
           <p:nvPr/>
         </p:nvSpPr>
@@ -7491,24 +6461,24 @@
           <a:fillRef idx="3">
             <a:schemeClr val="accent1"/>
           </a:fillRef>
-          <a:effectRef idx="2">
-            <a:schemeClr val="accent1"/>
-          </a:effectRef>
-          <a:fontRef idx="minor">
-            <a:schemeClr val="lt1"/>
-          </a:fontRef>
-        </p:style>
-        <p:txBody>
-          <a:bodyPr rtlCol="0" anchor="ctr"/>
-          <a:lstStyle/>
-          <a:p>
-            <a:pPr algn="ctr"/>
-          </a:p>
-        </p:txBody>
-      </p:sp>
-      <p:sp>
-        <p:nvSpPr>
-          <p:cNvPr id="58" name="Rectangle 57"/>
+          <a:effectRef idx="0">
+            <a:schemeClr val="accent1"/>
+          </a:effectRef>
+          <a:fontRef idx="minor">
+            <a:schemeClr val="lt1"/>
+          </a:fontRef>
+        </p:style>
+        <p:txBody>
+          <a:bodyPr rtlCol="0" anchor="ctr"/>
+          <a:lstStyle/>
+          <a:p>
+            <a:pPr algn="ctr"/>
+          </a:p>
+        </p:txBody>
+      </p:sp>
+      <p:sp>
+        <p:nvSpPr>
+          <p:cNvPr id="49" name="Rectangle 48"/>
           <p:cNvSpPr/>
           <p:nvPr/>
         </p:nvSpPr>
@@ -7535,24 +6505,24 @@
           <a:fillRef idx="3">
             <a:schemeClr val="accent1"/>
           </a:fillRef>
-          <a:effectRef idx="2">
-            <a:schemeClr val="accent1"/>
-          </a:effectRef>
-          <a:fontRef idx="minor">
-            <a:schemeClr val="lt1"/>
-          </a:fontRef>
-        </p:style>
-        <p:txBody>
-          <a:bodyPr rtlCol="0" anchor="ctr"/>
-          <a:lstStyle/>
-          <a:p>
-            <a:pPr algn="ctr"/>
-          </a:p>
-        </p:txBody>
-      </p:sp>
-      <p:sp>
-        <p:nvSpPr>
-          <p:cNvPr id="59" name="Rectangle 58"/>
+          <a:effectRef idx="0">
+            <a:schemeClr val="accent1"/>
+          </a:effectRef>
+          <a:fontRef idx="minor">
+            <a:schemeClr val="lt1"/>
+          </a:fontRef>
+        </p:style>
+        <p:txBody>
+          <a:bodyPr rtlCol="0" anchor="ctr"/>
+          <a:lstStyle/>
+          <a:p>
+            <a:pPr algn="ctr"/>
+          </a:p>
+        </p:txBody>
+      </p:sp>
+      <p:sp>
+        <p:nvSpPr>
+          <p:cNvPr id="50" name="Rectangle 49"/>
           <p:cNvSpPr/>
           <p:nvPr/>
         </p:nvSpPr>
@@ -7579,24 +6549,24 @@
           <a:fillRef idx="3">
             <a:schemeClr val="accent1"/>
           </a:fillRef>
-          <a:effectRef idx="2">
-            <a:schemeClr val="accent1"/>
-          </a:effectRef>
-          <a:fontRef idx="minor">
-            <a:schemeClr val="lt1"/>
-          </a:fontRef>
-        </p:style>
-        <p:txBody>
-          <a:bodyPr rtlCol="0" anchor="ctr"/>
-          <a:lstStyle/>
-          <a:p>
-            <a:pPr algn="ctr"/>
-          </a:p>
-        </p:txBody>
-      </p:sp>
-      <p:sp>
-        <p:nvSpPr>
-          <p:cNvPr id="60" name="Rectangle 59"/>
+          <a:effectRef idx="0">
+            <a:schemeClr val="accent1"/>
+          </a:effectRef>
+          <a:fontRef idx="minor">
+            <a:schemeClr val="lt1"/>
+          </a:fontRef>
+        </p:style>
+        <p:txBody>
+          <a:bodyPr rtlCol="0" anchor="ctr"/>
+          <a:lstStyle/>
+          <a:p>
+            <a:pPr algn="ctr"/>
+          </a:p>
+        </p:txBody>
+      </p:sp>
+      <p:sp>
+        <p:nvSpPr>
+          <p:cNvPr id="51" name="Rectangle 50"/>
           <p:cNvSpPr/>
           <p:nvPr/>
         </p:nvSpPr>
@@ -7623,24 +6593,24 @@
           <a:fillRef idx="3">
             <a:schemeClr val="accent1"/>
           </a:fillRef>
-          <a:effectRef idx="2">
-            <a:schemeClr val="accent1"/>
-          </a:effectRef>
-          <a:fontRef idx="minor">
-            <a:schemeClr val="lt1"/>
-          </a:fontRef>
-        </p:style>
-        <p:txBody>
-          <a:bodyPr rtlCol="0" anchor="ctr"/>
-          <a:lstStyle/>
-          <a:p>
-            <a:pPr algn="ctr"/>
-          </a:p>
-        </p:txBody>
-      </p:sp>
-      <p:sp>
-        <p:nvSpPr>
-          <p:cNvPr id="61" name="Rectangle 60"/>
+          <a:effectRef idx="0">
+            <a:schemeClr val="accent1"/>
+          </a:effectRef>
+          <a:fontRef idx="minor">
+            <a:schemeClr val="lt1"/>
+          </a:fontRef>
+        </p:style>
+        <p:txBody>
+          <a:bodyPr rtlCol="0" anchor="ctr"/>
+          <a:lstStyle/>
+          <a:p>
+            <a:pPr algn="ctr"/>
+          </a:p>
+        </p:txBody>
+      </p:sp>
+      <p:sp>
+        <p:nvSpPr>
+          <p:cNvPr id="52" name="Rectangle 51"/>
           <p:cNvSpPr/>
           <p:nvPr/>
         </p:nvSpPr>
@@ -7667,24 +6637,24 @@
           <a:fillRef idx="3">
             <a:schemeClr val="accent1"/>
           </a:fillRef>
-          <a:effectRef idx="2">
-            <a:schemeClr val="accent1"/>
-          </a:effectRef>
-          <a:fontRef idx="minor">
-            <a:schemeClr val="lt1"/>
-          </a:fontRef>
-        </p:style>
-        <p:txBody>
-          <a:bodyPr rtlCol="0" anchor="ctr"/>
-          <a:lstStyle/>
-          <a:p>
-            <a:pPr algn="ctr"/>
-          </a:p>
-        </p:txBody>
-      </p:sp>
-      <p:sp>
-        <p:nvSpPr>
-          <p:cNvPr id="62" name="Oval 61"/>
+          <a:effectRef idx="0">
+            <a:schemeClr val="accent1"/>
+          </a:effectRef>
+          <a:fontRef idx="minor">
+            <a:schemeClr val="lt1"/>
+          </a:fontRef>
+        </p:style>
+        <p:txBody>
+          <a:bodyPr rtlCol="0" anchor="ctr"/>
+          <a:lstStyle/>
+          <a:p>
+            <a:pPr algn="ctr"/>
+          </a:p>
+        </p:txBody>
+      </p:sp>
+      <p:sp>
+        <p:nvSpPr>
+          <p:cNvPr id="53" name="Oval 52"/>
           <p:cNvSpPr/>
           <p:nvPr/>
         </p:nvSpPr>
@@ -7711,24 +6681,24 @@
           <a:fillRef idx="3">
             <a:schemeClr val="accent1"/>
           </a:fillRef>
-          <a:effectRef idx="2">
-            <a:schemeClr val="accent1"/>
-          </a:effectRef>
-          <a:fontRef idx="minor">
-            <a:schemeClr val="lt1"/>
-          </a:fontRef>
-        </p:style>
-        <p:txBody>
-          <a:bodyPr rtlCol="0" anchor="ctr"/>
-          <a:lstStyle/>
-          <a:p>
-            <a:pPr algn="ctr"/>
-          </a:p>
-        </p:txBody>
-      </p:sp>
-      <p:sp>
-        <p:nvSpPr>
-          <p:cNvPr id="63" name="TextBox 62"/>
+          <a:effectRef idx="0">
+            <a:schemeClr val="accent1"/>
+          </a:effectRef>
+          <a:fontRef idx="minor">
+            <a:schemeClr val="lt1"/>
+          </a:fontRef>
+        </p:style>
+        <p:txBody>
+          <a:bodyPr rtlCol="0" anchor="ctr"/>
+          <a:lstStyle/>
+          <a:p>
+            <a:pPr algn="ctr"/>
+          </a:p>
+        </p:txBody>
+      </p:sp>
+      <p:sp>
+        <p:nvSpPr>
+          <p:cNvPr id="54" name="TextBox 53"/>
           <p:cNvSpPr txBox="1"/>
           <p:nvPr/>
         </p:nvSpPr>
@@ -7774,7 +6744,7 @@
       </p:sp>
       <p:sp>
         <p:nvSpPr>
-          <p:cNvPr id="64" name="TextBox 63"/>
+          <p:cNvPr id="55" name="TextBox 54"/>
           <p:cNvSpPr txBox="1"/>
           <p:nvPr/>
         </p:nvSpPr>
@@ -7820,7 +6790,7 @@
       </p:sp>
       <p:sp>
         <p:nvSpPr>
-          <p:cNvPr id="65" name="Oval 64"/>
+          <p:cNvPr id="56" name="Oval 55"/>
           <p:cNvSpPr/>
           <p:nvPr/>
         </p:nvSpPr>
@@ -7847,24 +6817,24 @@
           <a:fillRef idx="3">
             <a:schemeClr val="accent1"/>
           </a:fillRef>
-          <a:effectRef idx="2">
-            <a:schemeClr val="accent1"/>
-          </a:effectRef>
-          <a:fontRef idx="minor">
-            <a:schemeClr val="lt1"/>
-          </a:fontRef>
-        </p:style>
-        <p:txBody>
-          <a:bodyPr rtlCol="0" anchor="ctr"/>
-          <a:lstStyle/>
-          <a:p>
-            <a:pPr algn="ctr"/>
-          </a:p>
-        </p:txBody>
-      </p:sp>
-      <p:sp>
-        <p:nvSpPr>
-          <p:cNvPr id="66" name="Rectangle 65"/>
+          <a:effectRef idx="0">
+            <a:schemeClr val="accent1"/>
+          </a:effectRef>
+          <a:fontRef idx="minor">
+            <a:schemeClr val="lt1"/>
+          </a:fontRef>
+        </p:style>
+        <p:txBody>
+          <a:bodyPr rtlCol="0" anchor="ctr"/>
+          <a:lstStyle/>
+          <a:p>
+            <a:pPr algn="ctr"/>
+          </a:p>
+        </p:txBody>
+      </p:sp>
+      <p:sp>
+        <p:nvSpPr>
+          <p:cNvPr id="57" name="Rectangle 56"/>
           <p:cNvSpPr/>
           <p:nvPr/>
         </p:nvSpPr>
@@ -7891,24 +6861,24 @@
           <a:fillRef idx="3">
             <a:schemeClr val="accent1"/>
           </a:fillRef>
-          <a:effectRef idx="2">
-            <a:schemeClr val="accent1"/>
-          </a:effectRef>
-          <a:fontRef idx="minor">
-            <a:schemeClr val="lt1"/>
-          </a:fontRef>
-        </p:style>
-        <p:txBody>
-          <a:bodyPr rtlCol="0" anchor="ctr"/>
-          <a:lstStyle/>
-          <a:p>
-            <a:pPr algn="ctr"/>
-          </a:p>
-        </p:txBody>
-      </p:sp>
-      <p:sp>
-        <p:nvSpPr>
-          <p:cNvPr id="67" name="Rectangle 66"/>
+          <a:effectRef idx="0">
+            <a:schemeClr val="accent1"/>
+          </a:effectRef>
+          <a:fontRef idx="minor">
+            <a:schemeClr val="lt1"/>
+          </a:fontRef>
+        </p:style>
+        <p:txBody>
+          <a:bodyPr rtlCol="0" anchor="ctr"/>
+          <a:lstStyle/>
+          <a:p>
+            <a:pPr algn="ctr"/>
+          </a:p>
+        </p:txBody>
+      </p:sp>
+      <p:sp>
+        <p:nvSpPr>
+          <p:cNvPr id="58" name="Rectangle 57"/>
           <p:cNvSpPr/>
           <p:nvPr/>
         </p:nvSpPr>
@@ -7935,24 +6905,24 @@
           <a:fillRef idx="3">
             <a:schemeClr val="accent1"/>
           </a:fillRef>
-          <a:effectRef idx="2">
-            <a:schemeClr val="accent1"/>
-          </a:effectRef>
-          <a:fontRef idx="minor">
-            <a:schemeClr val="lt1"/>
-          </a:fontRef>
-        </p:style>
-        <p:txBody>
-          <a:bodyPr rtlCol="0" anchor="ctr"/>
-          <a:lstStyle/>
-          <a:p>
-            <a:pPr algn="ctr"/>
-          </a:p>
-        </p:txBody>
-      </p:sp>
-      <p:sp>
-        <p:nvSpPr>
-          <p:cNvPr id="68" name="Rectangle 67"/>
+          <a:effectRef idx="0">
+            <a:schemeClr val="accent1"/>
+          </a:effectRef>
+          <a:fontRef idx="minor">
+            <a:schemeClr val="lt1"/>
+          </a:fontRef>
+        </p:style>
+        <p:txBody>
+          <a:bodyPr rtlCol="0" anchor="ctr"/>
+          <a:lstStyle/>
+          <a:p>
+            <a:pPr algn="ctr"/>
+          </a:p>
+        </p:txBody>
+      </p:sp>
+      <p:sp>
+        <p:nvSpPr>
+          <p:cNvPr id="59" name="Rectangle 58"/>
           <p:cNvSpPr/>
           <p:nvPr/>
         </p:nvSpPr>
@@ -7979,24 +6949,24 @@
           <a:fillRef idx="3">
             <a:schemeClr val="accent1"/>
           </a:fillRef>
-          <a:effectRef idx="2">
-            <a:schemeClr val="accent1"/>
-          </a:effectRef>
-          <a:fontRef idx="minor">
-            <a:schemeClr val="lt1"/>
-          </a:fontRef>
-        </p:style>
-        <p:txBody>
-          <a:bodyPr rtlCol="0" anchor="ctr"/>
-          <a:lstStyle/>
-          <a:p>
-            <a:pPr algn="ctr"/>
-          </a:p>
-        </p:txBody>
-      </p:sp>
-      <p:sp>
-        <p:nvSpPr>
-          <p:cNvPr id="69" name="Rectangle 68"/>
+          <a:effectRef idx="0">
+            <a:schemeClr val="accent1"/>
+          </a:effectRef>
+          <a:fontRef idx="minor">
+            <a:schemeClr val="lt1"/>
+          </a:fontRef>
+        </p:style>
+        <p:txBody>
+          <a:bodyPr rtlCol="0" anchor="ctr"/>
+          <a:lstStyle/>
+          <a:p>
+            <a:pPr algn="ctr"/>
+          </a:p>
+        </p:txBody>
+      </p:sp>
+      <p:sp>
+        <p:nvSpPr>
+          <p:cNvPr id="60" name="Rectangle 59"/>
           <p:cNvSpPr/>
           <p:nvPr/>
         </p:nvSpPr>
@@ -8023,24 +6993,24 @@
           <a:fillRef idx="3">
             <a:schemeClr val="accent1"/>
           </a:fillRef>
-          <a:effectRef idx="2">
-            <a:schemeClr val="accent1"/>
-          </a:effectRef>
-          <a:fontRef idx="minor">
-            <a:schemeClr val="lt1"/>
-          </a:fontRef>
-        </p:style>
-        <p:txBody>
-          <a:bodyPr rtlCol="0" anchor="ctr"/>
-          <a:lstStyle/>
-          <a:p>
-            <a:pPr algn="ctr"/>
-          </a:p>
-        </p:txBody>
-      </p:sp>
-      <p:sp>
-        <p:nvSpPr>
-          <p:cNvPr id="70" name="Rectangle 69"/>
+          <a:effectRef idx="0">
+            <a:schemeClr val="accent1"/>
+          </a:effectRef>
+          <a:fontRef idx="minor">
+            <a:schemeClr val="lt1"/>
+          </a:fontRef>
+        </p:style>
+        <p:txBody>
+          <a:bodyPr rtlCol="0" anchor="ctr"/>
+          <a:lstStyle/>
+          <a:p>
+            <a:pPr algn="ctr"/>
+          </a:p>
+        </p:txBody>
+      </p:sp>
+      <p:sp>
+        <p:nvSpPr>
+          <p:cNvPr id="61" name="Rectangle 60"/>
           <p:cNvSpPr/>
           <p:nvPr/>
         </p:nvSpPr>
@@ -8067,24 +7037,24 @@
           <a:fillRef idx="3">
             <a:schemeClr val="accent1"/>
           </a:fillRef>
-          <a:effectRef idx="2">
-            <a:schemeClr val="accent1"/>
-          </a:effectRef>
-          <a:fontRef idx="minor">
-            <a:schemeClr val="lt1"/>
-          </a:fontRef>
-        </p:style>
-        <p:txBody>
-          <a:bodyPr rtlCol="0" anchor="ctr"/>
-          <a:lstStyle/>
-          <a:p>
-            <a:pPr algn="ctr"/>
-          </a:p>
-        </p:txBody>
-      </p:sp>
-      <p:sp>
-        <p:nvSpPr>
-          <p:cNvPr id="71" name="Rectangle 70"/>
+          <a:effectRef idx="0">
+            <a:schemeClr val="accent1"/>
+          </a:effectRef>
+          <a:fontRef idx="minor">
+            <a:schemeClr val="lt1"/>
+          </a:fontRef>
+        </p:style>
+        <p:txBody>
+          <a:bodyPr rtlCol="0" anchor="ctr"/>
+          <a:lstStyle/>
+          <a:p>
+            <a:pPr algn="ctr"/>
+          </a:p>
+        </p:txBody>
+      </p:sp>
+      <p:sp>
+        <p:nvSpPr>
+          <p:cNvPr id="62" name="Rectangle 61"/>
           <p:cNvSpPr/>
           <p:nvPr/>
         </p:nvSpPr>
@@ -8111,24 +7081,24 @@
           <a:fillRef idx="3">
             <a:schemeClr val="accent1"/>
           </a:fillRef>
-          <a:effectRef idx="2">
-            <a:schemeClr val="accent1"/>
-          </a:effectRef>
-          <a:fontRef idx="minor">
-            <a:schemeClr val="lt1"/>
-          </a:fontRef>
-        </p:style>
-        <p:txBody>
-          <a:bodyPr rtlCol="0" anchor="ctr"/>
-          <a:lstStyle/>
-          <a:p>
-            <a:pPr algn="ctr"/>
-          </a:p>
-        </p:txBody>
-      </p:sp>
-      <p:sp>
-        <p:nvSpPr>
-          <p:cNvPr id="72" name="Rectangle 71"/>
+          <a:effectRef idx="0">
+            <a:schemeClr val="accent1"/>
+          </a:effectRef>
+          <a:fontRef idx="minor">
+            <a:schemeClr val="lt1"/>
+          </a:fontRef>
+        </p:style>
+        <p:txBody>
+          <a:bodyPr rtlCol="0" anchor="ctr"/>
+          <a:lstStyle/>
+          <a:p>
+            <a:pPr algn="ctr"/>
+          </a:p>
+        </p:txBody>
+      </p:sp>
+      <p:sp>
+        <p:nvSpPr>
+          <p:cNvPr id="63" name="Rectangle 62"/>
           <p:cNvSpPr/>
           <p:nvPr/>
         </p:nvSpPr>
@@ -8155,24 +7125,24 @@
           <a:fillRef idx="3">
             <a:schemeClr val="accent1"/>
           </a:fillRef>
-          <a:effectRef idx="2">
-            <a:schemeClr val="accent1"/>
-          </a:effectRef>
-          <a:fontRef idx="minor">
-            <a:schemeClr val="lt1"/>
-          </a:fontRef>
-        </p:style>
-        <p:txBody>
-          <a:bodyPr rtlCol="0" anchor="ctr"/>
-          <a:lstStyle/>
-          <a:p>
-            <a:pPr algn="ctr"/>
-          </a:p>
-        </p:txBody>
-      </p:sp>
-      <p:sp>
-        <p:nvSpPr>
-          <p:cNvPr id="73" name="Rectangle 72"/>
+          <a:effectRef idx="0">
+            <a:schemeClr val="accent1"/>
+          </a:effectRef>
+          <a:fontRef idx="minor">
+            <a:schemeClr val="lt1"/>
+          </a:fontRef>
+        </p:style>
+        <p:txBody>
+          <a:bodyPr rtlCol="0" anchor="ctr"/>
+          <a:lstStyle/>
+          <a:p>
+            <a:pPr algn="ctr"/>
+          </a:p>
+        </p:txBody>
+      </p:sp>
+      <p:sp>
+        <p:nvSpPr>
+          <p:cNvPr id="64" name="Rectangle 63"/>
           <p:cNvSpPr/>
           <p:nvPr/>
         </p:nvSpPr>
@@ -8199,24 +7169,24 @@
           <a:fillRef idx="3">
             <a:schemeClr val="accent1"/>
           </a:fillRef>
-          <a:effectRef idx="2">
-            <a:schemeClr val="accent1"/>
-          </a:effectRef>
-          <a:fontRef idx="minor">
-            <a:schemeClr val="lt1"/>
-          </a:fontRef>
-        </p:style>
-        <p:txBody>
-          <a:bodyPr rtlCol="0" anchor="ctr"/>
-          <a:lstStyle/>
-          <a:p>
-            <a:pPr algn="ctr"/>
-          </a:p>
-        </p:txBody>
-      </p:sp>
-      <p:sp>
-        <p:nvSpPr>
-          <p:cNvPr id="74" name="Oval 73"/>
+          <a:effectRef idx="0">
+            <a:schemeClr val="accent1"/>
+          </a:effectRef>
+          <a:fontRef idx="minor">
+            <a:schemeClr val="lt1"/>
+          </a:fontRef>
+        </p:style>
+        <p:txBody>
+          <a:bodyPr rtlCol="0" anchor="ctr"/>
+          <a:lstStyle/>
+          <a:p>
+            <a:pPr algn="ctr"/>
+          </a:p>
+        </p:txBody>
+      </p:sp>
+      <p:sp>
+        <p:nvSpPr>
+          <p:cNvPr id="65" name="Oval 64"/>
           <p:cNvSpPr/>
           <p:nvPr/>
         </p:nvSpPr>
@@ -8243,24 +7213,24 @@
           <a:fillRef idx="3">
             <a:schemeClr val="accent1"/>
           </a:fillRef>
-          <a:effectRef idx="2">
-            <a:schemeClr val="accent1"/>
-          </a:effectRef>
-          <a:fontRef idx="minor">
-            <a:schemeClr val="lt1"/>
-          </a:fontRef>
-        </p:style>
-        <p:txBody>
-          <a:bodyPr rtlCol="0" anchor="ctr"/>
-          <a:lstStyle/>
-          <a:p>
-            <a:pPr algn="ctr"/>
-          </a:p>
-        </p:txBody>
-      </p:sp>
-      <p:sp>
-        <p:nvSpPr>
-          <p:cNvPr id="75" name="TextBox 74"/>
+          <a:effectRef idx="0">
+            <a:schemeClr val="accent1"/>
+          </a:effectRef>
+          <a:fontRef idx="minor">
+            <a:schemeClr val="lt1"/>
+          </a:fontRef>
+        </p:style>
+        <p:txBody>
+          <a:bodyPr rtlCol="0" anchor="ctr"/>
+          <a:lstStyle/>
+          <a:p>
+            <a:pPr algn="ctr"/>
+          </a:p>
+        </p:txBody>
+      </p:sp>
+      <p:sp>
+        <p:nvSpPr>
+          <p:cNvPr id="66" name="TextBox 65"/>
           <p:cNvSpPr txBox="1"/>
           <p:nvPr/>
         </p:nvSpPr>
@@ -8306,7 +7276,7 @@
       </p:sp>
       <p:sp>
         <p:nvSpPr>
-          <p:cNvPr id="76" name="TextBox 75"/>
+          <p:cNvPr id="67" name="TextBox 66"/>
           <p:cNvSpPr txBox="1"/>
           <p:nvPr/>
         </p:nvSpPr>
@@ -8352,7 +7322,7 @@
       </p:sp>
       <p:sp>
         <p:nvSpPr>
-          <p:cNvPr id="77" name="Oval 76"/>
+          <p:cNvPr id="68" name="Oval 67"/>
           <p:cNvSpPr/>
           <p:nvPr/>
         </p:nvSpPr>
@@ -8379,24 +7349,24 @@
           <a:fillRef idx="3">
             <a:schemeClr val="accent1"/>
           </a:fillRef>
-          <a:effectRef idx="2">
-            <a:schemeClr val="accent1"/>
-          </a:effectRef>
-          <a:fontRef idx="minor">
-            <a:schemeClr val="lt1"/>
-          </a:fontRef>
-        </p:style>
-        <p:txBody>
-          <a:bodyPr rtlCol="0" anchor="ctr"/>
-          <a:lstStyle/>
-          <a:p>
-            <a:pPr algn="ctr"/>
-          </a:p>
-        </p:txBody>
-      </p:sp>
-      <p:sp>
-        <p:nvSpPr>
-          <p:cNvPr id="78" name="Rectangle 77"/>
+          <a:effectRef idx="0">
+            <a:schemeClr val="accent1"/>
+          </a:effectRef>
+          <a:fontRef idx="minor">
+            <a:schemeClr val="lt1"/>
+          </a:fontRef>
+        </p:style>
+        <p:txBody>
+          <a:bodyPr rtlCol="0" anchor="ctr"/>
+          <a:lstStyle/>
+          <a:p>
+            <a:pPr algn="ctr"/>
+          </a:p>
+        </p:txBody>
+      </p:sp>
+      <p:sp>
+        <p:nvSpPr>
+          <p:cNvPr id="69" name="Rectangle 68"/>
           <p:cNvSpPr/>
           <p:nvPr/>
         </p:nvSpPr>
@@ -8423,24 +7393,24 @@
           <a:fillRef idx="3">
             <a:schemeClr val="accent1"/>
           </a:fillRef>
-          <a:effectRef idx="2">
-            <a:schemeClr val="accent1"/>
-          </a:effectRef>
-          <a:fontRef idx="minor">
-            <a:schemeClr val="lt1"/>
-          </a:fontRef>
-        </p:style>
-        <p:txBody>
-          <a:bodyPr rtlCol="0" anchor="ctr"/>
-          <a:lstStyle/>
-          <a:p>
-            <a:pPr algn="ctr"/>
-          </a:p>
-        </p:txBody>
-      </p:sp>
-      <p:sp>
-        <p:nvSpPr>
-          <p:cNvPr id="79" name="Rectangle 78"/>
+          <a:effectRef idx="0">
+            <a:schemeClr val="accent1"/>
+          </a:effectRef>
+          <a:fontRef idx="minor">
+            <a:schemeClr val="lt1"/>
+          </a:fontRef>
+        </p:style>
+        <p:txBody>
+          <a:bodyPr rtlCol="0" anchor="ctr"/>
+          <a:lstStyle/>
+          <a:p>
+            <a:pPr algn="ctr"/>
+          </a:p>
+        </p:txBody>
+      </p:sp>
+      <p:sp>
+        <p:nvSpPr>
+          <p:cNvPr id="70" name="Rectangle 69"/>
           <p:cNvSpPr/>
           <p:nvPr/>
         </p:nvSpPr>
@@ -8467,24 +7437,24 @@
           <a:fillRef idx="3">
             <a:schemeClr val="accent1"/>
           </a:fillRef>
-          <a:effectRef idx="2">
-            <a:schemeClr val="accent1"/>
-          </a:effectRef>
-          <a:fontRef idx="minor">
-            <a:schemeClr val="lt1"/>
-          </a:fontRef>
-        </p:style>
-        <p:txBody>
-          <a:bodyPr rtlCol="0" anchor="ctr"/>
-          <a:lstStyle/>
-          <a:p>
-            <a:pPr algn="ctr"/>
-          </a:p>
-        </p:txBody>
-      </p:sp>
-      <p:sp>
-        <p:nvSpPr>
-          <p:cNvPr id="80" name="Rectangle 79"/>
+          <a:effectRef idx="0">
+            <a:schemeClr val="accent1"/>
+          </a:effectRef>
+          <a:fontRef idx="minor">
+            <a:schemeClr val="lt1"/>
+          </a:fontRef>
+        </p:style>
+        <p:txBody>
+          <a:bodyPr rtlCol="0" anchor="ctr"/>
+          <a:lstStyle/>
+          <a:p>
+            <a:pPr algn="ctr"/>
+          </a:p>
+        </p:txBody>
+      </p:sp>
+      <p:sp>
+        <p:nvSpPr>
+          <p:cNvPr id="71" name="Rectangle 70"/>
           <p:cNvSpPr/>
           <p:nvPr/>
         </p:nvSpPr>
@@ -8511,24 +7481,24 @@
           <a:fillRef idx="3">
             <a:schemeClr val="accent1"/>
           </a:fillRef>
-          <a:effectRef idx="2">
-            <a:schemeClr val="accent1"/>
-          </a:effectRef>
-          <a:fontRef idx="minor">
-            <a:schemeClr val="lt1"/>
-          </a:fontRef>
-        </p:style>
-        <p:txBody>
-          <a:bodyPr rtlCol="0" anchor="ctr"/>
-          <a:lstStyle/>
-          <a:p>
-            <a:pPr algn="ctr"/>
-          </a:p>
-        </p:txBody>
-      </p:sp>
-      <p:sp>
-        <p:nvSpPr>
-          <p:cNvPr id="81" name="Rectangle 80"/>
+          <a:effectRef idx="0">
+            <a:schemeClr val="accent1"/>
+          </a:effectRef>
+          <a:fontRef idx="minor">
+            <a:schemeClr val="lt1"/>
+          </a:fontRef>
+        </p:style>
+        <p:txBody>
+          <a:bodyPr rtlCol="0" anchor="ctr"/>
+          <a:lstStyle/>
+          <a:p>
+            <a:pPr algn="ctr"/>
+          </a:p>
+        </p:txBody>
+      </p:sp>
+      <p:sp>
+        <p:nvSpPr>
+          <p:cNvPr id="72" name="Rectangle 71"/>
           <p:cNvSpPr/>
           <p:nvPr/>
         </p:nvSpPr>
@@ -8555,24 +7525,24 @@
           <a:fillRef idx="3">
             <a:schemeClr val="accent1"/>
           </a:fillRef>
-          <a:effectRef idx="2">
-            <a:schemeClr val="accent1"/>
-          </a:effectRef>
-          <a:fontRef idx="minor">
-            <a:schemeClr val="lt1"/>
-          </a:fontRef>
-        </p:style>
-        <p:txBody>
-          <a:bodyPr rtlCol="0" anchor="ctr"/>
-          <a:lstStyle/>
-          <a:p>
-            <a:pPr algn="ctr"/>
-          </a:p>
-        </p:txBody>
-      </p:sp>
-      <p:sp>
-        <p:nvSpPr>
-          <p:cNvPr id="82" name="Rectangle 81"/>
+          <a:effectRef idx="0">
+            <a:schemeClr val="accent1"/>
+          </a:effectRef>
+          <a:fontRef idx="minor">
+            <a:schemeClr val="lt1"/>
+          </a:fontRef>
+        </p:style>
+        <p:txBody>
+          <a:bodyPr rtlCol="0" anchor="ctr"/>
+          <a:lstStyle/>
+          <a:p>
+            <a:pPr algn="ctr"/>
+          </a:p>
+        </p:txBody>
+      </p:sp>
+      <p:sp>
+        <p:nvSpPr>
+          <p:cNvPr id="73" name="Rectangle 72"/>
           <p:cNvSpPr/>
           <p:nvPr/>
         </p:nvSpPr>
@@ -8599,24 +7569,24 @@
           <a:fillRef idx="3">
             <a:schemeClr val="accent1"/>
           </a:fillRef>
-          <a:effectRef idx="2">
-            <a:schemeClr val="accent1"/>
-          </a:effectRef>
-          <a:fontRef idx="minor">
-            <a:schemeClr val="lt1"/>
-          </a:fontRef>
-        </p:style>
-        <p:txBody>
-          <a:bodyPr rtlCol="0" anchor="ctr"/>
-          <a:lstStyle/>
-          <a:p>
-            <a:pPr algn="ctr"/>
-          </a:p>
-        </p:txBody>
-      </p:sp>
-      <p:sp>
-        <p:nvSpPr>
-          <p:cNvPr id="83" name="Rectangle 82"/>
+          <a:effectRef idx="0">
+            <a:schemeClr val="accent1"/>
+          </a:effectRef>
+          <a:fontRef idx="minor">
+            <a:schemeClr val="lt1"/>
+          </a:fontRef>
+        </p:style>
+        <p:txBody>
+          <a:bodyPr rtlCol="0" anchor="ctr"/>
+          <a:lstStyle/>
+          <a:p>
+            <a:pPr algn="ctr"/>
+          </a:p>
+        </p:txBody>
+      </p:sp>
+      <p:sp>
+        <p:nvSpPr>
+          <p:cNvPr id="74" name="Rectangle 73"/>
           <p:cNvSpPr/>
           <p:nvPr/>
         </p:nvSpPr>
@@ -8643,24 +7613,24 @@
           <a:fillRef idx="3">
             <a:schemeClr val="accent1"/>
           </a:fillRef>
-          <a:effectRef idx="2">
-            <a:schemeClr val="accent1"/>
-          </a:effectRef>
-          <a:fontRef idx="minor">
-            <a:schemeClr val="lt1"/>
-          </a:fontRef>
-        </p:style>
-        <p:txBody>
-          <a:bodyPr rtlCol="0" anchor="ctr"/>
-          <a:lstStyle/>
-          <a:p>
-            <a:pPr algn="ctr"/>
-          </a:p>
-        </p:txBody>
-      </p:sp>
-      <p:sp>
-        <p:nvSpPr>
-          <p:cNvPr id="84" name="Rectangle 83"/>
+          <a:effectRef idx="0">
+            <a:schemeClr val="accent1"/>
+          </a:effectRef>
+          <a:fontRef idx="minor">
+            <a:schemeClr val="lt1"/>
+          </a:fontRef>
+        </p:style>
+        <p:txBody>
+          <a:bodyPr rtlCol="0" anchor="ctr"/>
+          <a:lstStyle/>
+          <a:p>
+            <a:pPr algn="ctr"/>
+          </a:p>
+        </p:txBody>
+      </p:sp>
+      <p:sp>
+        <p:nvSpPr>
+          <p:cNvPr id="75" name="Rectangle 74"/>
           <p:cNvSpPr/>
           <p:nvPr/>
         </p:nvSpPr>
@@ -8687,24 +7657,24 @@
           <a:fillRef idx="3">
             <a:schemeClr val="accent1"/>
           </a:fillRef>
-          <a:effectRef idx="2">
-            <a:schemeClr val="accent1"/>
-          </a:effectRef>
-          <a:fontRef idx="minor">
-            <a:schemeClr val="lt1"/>
-          </a:fontRef>
-        </p:style>
-        <p:txBody>
-          <a:bodyPr rtlCol="0" anchor="ctr"/>
-          <a:lstStyle/>
-          <a:p>
-            <a:pPr algn="ctr"/>
-          </a:p>
-        </p:txBody>
-      </p:sp>
-      <p:sp>
-        <p:nvSpPr>
-          <p:cNvPr id="85" name="Rectangle 84"/>
+          <a:effectRef idx="0">
+            <a:schemeClr val="accent1"/>
+          </a:effectRef>
+          <a:fontRef idx="minor">
+            <a:schemeClr val="lt1"/>
+          </a:fontRef>
+        </p:style>
+        <p:txBody>
+          <a:bodyPr rtlCol="0" anchor="ctr"/>
+          <a:lstStyle/>
+          <a:p>
+            <a:pPr algn="ctr"/>
+          </a:p>
+        </p:txBody>
+      </p:sp>
+      <p:sp>
+        <p:nvSpPr>
+          <p:cNvPr id="76" name="Rectangle 75"/>
           <p:cNvSpPr/>
           <p:nvPr/>
         </p:nvSpPr>
@@ -8731,24 +7701,24 @@
           <a:fillRef idx="3">
             <a:schemeClr val="accent1"/>
           </a:fillRef>
-          <a:effectRef idx="2">
-            <a:schemeClr val="accent1"/>
-          </a:effectRef>
-          <a:fontRef idx="minor">
-            <a:schemeClr val="lt1"/>
-          </a:fontRef>
-        </p:style>
-        <p:txBody>
-          <a:bodyPr rtlCol="0" anchor="ctr"/>
-          <a:lstStyle/>
-          <a:p>
-            <a:pPr algn="ctr"/>
-          </a:p>
-        </p:txBody>
-      </p:sp>
-      <p:sp>
-        <p:nvSpPr>
-          <p:cNvPr id="86" name="Oval 85"/>
+          <a:effectRef idx="0">
+            <a:schemeClr val="accent1"/>
+          </a:effectRef>
+          <a:fontRef idx="minor">
+            <a:schemeClr val="lt1"/>
+          </a:fontRef>
+        </p:style>
+        <p:txBody>
+          <a:bodyPr rtlCol="0" anchor="ctr"/>
+          <a:lstStyle/>
+          <a:p>
+            <a:pPr algn="ctr"/>
+          </a:p>
+        </p:txBody>
+      </p:sp>
+      <p:sp>
+        <p:nvSpPr>
+          <p:cNvPr id="77" name="Oval 76"/>
           <p:cNvSpPr/>
           <p:nvPr/>
         </p:nvSpPr>
@@ -8775,24 +7745,24 @@
           <a:fillRef idx="3">
             <a:schemeClr val="accent1"/>
           </a:fillRef>
-          <a:effectRef idx="2">
-            <a:schemeClr val="accent1"/>
-          </a:effectRef>
-          <a:fontRef idx="minor">
-            <a:schemeClr val="lt1"/>
-          </a:fontRef>
-        </p:style>
-        <p:txBody>
-          <a:bodyPr rtlCol="0" anchor="ctr"/>
-          <a:lstStyle/>
-          <a:p>
-            <a:pPr algn="ctr"/>
-          </a:p>
-        </p:txBody>
-      </p:sp>
-      <p:sp>
-        <p:nvSpPr>
-          <p:cNvPr id="87" name="TextBox 86"/>
+          <a:effectRef idx="0">
+            <a:schemeClr val="accent1"/>
+          </a:effectRef>
+          <a:fontRef idx="minor">
+            <a:schemeClr val="lt1"/>
+          </a:fontRef>
+        </p:style>
+        <p:txBody>
+          <a:bodyPr rtlCol="0" anchor="ctr"/>
+          <a:lstStyle/>
+          <a:p>
+            <a:pPr algn="ctr"/>
+          </a:p>
+        </p:txBody>
+      </p:sp>
+      <p:sp>
+        <p:nvSpPr>
+          <p:cNvPr id="78" name="TextBox 77"/>
           <p:cNvSpPr txBox="1"/>
           <p:nvPr/>
         </p:nvSpPr>
@@ -8838,7 +7808,7 @@
       </p:sp>
       <p:sp>
         <p:nvSpPr>
-          <p:cNvPr id="88" name="TextBox 87"/>
+          <p:cNvPr id="79" name="TextBox 78"/>
           <p:cNvSpPr txBox="1"/>
           <p:nvPr/>
         </p:nvSpPr>
@@ -9009,7 +7979,7 @@
           <a:fillRef idx="3">
             <a:schemeClr val="accent1"/>
           </a:fillRef>
-          <a:effectRef idx="2">
+          <a:effectRef idx="0">
             <a:schemeClr val="accent1"/>
           </a:effectRef>
           <a:fontRef idx="minor">
@@ -9234,7 +8204,7 @@
           <a:fillRef idx="3">
             <a:schemeClr val="accent1"/>
           </a:fillRef>
-          <a:effectRef idx="2">
+          <a:effectRef idx="0">
             <a:schemeClr val="accent1"/>
           </a:effectRef>
           <a:fontRef idx="minor">
@@ -9278,7 +8248,7 @@
           <a:fillRef idx="3">
             <a:schemeClr val="accent1"/>
           </a:fillRef>
-          <a:effectRef idx="2">
+          <a:effectRef idx="0">
             <a:schemeClr val="accent1"/>
           </a:effectRef>
           <a:fontRef idx="minor">
@@ -9322,7 +8292,7 @@
           <a:fillRef idx="3">
             <a:schemeClr val="accent1"/>
           </a:fillRef>
-          <a:effectRef idx="2">
+          <a:effectRef idx="0">
             <a:schemeClr val="accent1"/>
           </a:effectRef>
           <a:fontRef idx="minor">
@@ -9366,7 +8336,7 @@
           <a:fillRef idx="3">
             <a:schemeClr val="accent1"/>
           </a:fillRef>
-          <a:effectRef idx="2">
+          <a:effectRef idx="0">
             <a:schemeClr val="accent1"/>
           </a:effectRef>
           <a:fontRef idx="minor">
@@ -9410,7 +8380,7 @@
           <a:fillRef idx="3">
             <a:schemeClr val="accent1"/>
           </a:fillRef>
-          <a:effectRef idx="2">
+          <a:effectRef idx="0">
             <a:schemeClr val="accent1"/>
           </a:effectRef>
           <a:fontRef idx="minor">
@@ -9454,7 +8424,7 @@
           <a:fillRef idx="3">
             <a:schemeClr val="accent1"/>
           </a:fillRef>
-          <a:effectRef idx="2">
+          <a:effectRef idx="0">
             <a:schemeClr val="accent1"/>
           </a:effectRef>
           <a:fontRef idx="minor">
@@ -9498,7 +8468,7 @@
           <a:fillRef idx="3">
             <a:schemeClr val="accent1"/>
           </a:fillRef>
-          <a:effectRef idx="2">
+          <a:effectRef idx="0">
             <a:schemeClr val="accent1"/>
           </a:effectRef>
           <a:fontRef idx="minor">
@@ -9542,7 +8512,7 @@
           <a:fillRef idx="3">
             <a:schemeClr val="accent1"/>
           </a:fillRef>
-          <a:effectRef idx="2">
+          <a:effectRef idx="0">
             <a:schemeClr val="accent1"/>
           </a:effectRef>
           <a:fontRef idx="minor">
@@ -9586,7 +8556,7 @@
           <a:fillRef idx="3">
             <a:schemeClr val="accent1"/>
           </a:fillRef>
-          <a:effectRef idx="2">
+          <a:effectRef idx="0">
             <a:schemeClr val="accent1"/>
           </a:effectRef>
           <a:fontRef idx="minor">
@@ -9630,7 +8600,7 @@
           <a:fillRef idx="3">
             <a:schemeClr val="accent1"/>
           </a:fillRef>
-          <a:effectRef idx="2">
+          <a:effectRef idx="0">
             <a:schemeClr val="accent1"/>
           </a:effectRef>
           <a:fontRef idx="minor">
@@ -9742,7 +8712,7 @@
           <a:fillRef idx="3">
             <a:schemeClr val="accent1"/>
           </a:fillRef>
-          <a:effectRef idx="2">
+          <a:effectRef idx="0">
             <a:schemeClr val="accent1"/>
           </a:effectRef>
           <a:fontRef idx="minor">
@@ -9786,7 +8756,7 @@
           <a:fillRef idx="3">
             <a:schemeClr val="accent1"/>
           </a:fillRef>
-          <a:effectRef idx="2">
+          <a:effectRef idx="0">
             <a:schemeClr val="accent1"/>
           </a:effectRef>
           <a:fontRef idx="minor">
@@ -9830,7 +8800,7 @@
           <a:fillRef idx="3">
             <a:schemeClr val="accent1"/>
           </a:fillRef>
-          <a:effectRef idx="2">
+          <a:effectRef idx="0">
             <a:schemeClr val="accent1"/>
           </a:effectRef>
           <a:fontRef idx="minor">
@@ -9874,7 +8844,7 @@
           <a:fillRef idx="3">
             <a:schemeClr val="accent1"/>
           </a:fillRef>
-          <a:effectRef idx="2">
+          <a:effectRef idx="0">
             <a:schemeClr val="accent1"/>
           </a:effectRef>
           <a:fontRef idx="minor">
@@ -9918,7 +8888,7 @@
           <a:fillRef idx="3">
             <a:schemeClr val="accent1"/>
           </a:fillRef>
-          <a:effectRef idx="2">
+          <a:effectRef idx="0">
             <a:schemeClr val="accent1"/>
           </a:effectRef>
           <a:fontRef idx="minor">
@@ -9962,7 +8932,7 @@
           <a:fillRef idx="3">
             <a:schemeClr val="accent1"/>
           </a:fillRef>
-          <a:effectRef idx="2">
+          <a:effectRef idx="0">
             <a:schemeClr val="accent1"/>
           </a:effectRef>
           <a:fontRef idx="minor">
@@ -10006,7 +8976,7 @@
           <a:fillRef idx="3">
             <a:schemeClr val="accent1"/>
           </a:fillRef>
-          <a:effectRef idx="2">
+          <a:effectRef idx="0">
             <a:schemeClr val="accent1"/>
           </a:effectRef>
           <a:fontRef idx="minor">
@@ -10050,7 +9020,7 @@
           <a:fillRef idx="3">
             <a:schemeClr val="accent1"/>
           </a:fillRef>
-          <a:effectRef idx="2">
+          <a:effectRef idx="0">
             <a:schemeClr val="accent1"/>
           </a:effectRef>
           <a:fontRef idx="minor">
@@ -10094,7 +9064,7 @@
           <a:fillRef idx="3">
             <a:schemeClr val="accent1"/>
           </a:fillRef>
-          <a:effectRef idx="2">
+          <a:effectRef idx="0">
             <a:schemeClr val="accent1"/>
           </a:effectRef>
           <a:fontRef idx="minor">
@@ -10138,7 +9108,7 @@
           <a:fillRef idx="3">
             <a:schemeClr val="accent1"/>
           </a:fillRef>
-          <a:effectRef idx="2">
+          <a:effectRef idx="0">
             <a:schemeClr val="accent1"/>
           </a:effectRef>
           <a:fontRef idx="minor">
@@ -10250,7 +9220,7 @@
           <a:fillRef idx="3">
             <a:schemeClr val="accent1"/>
           </a:fillRef>
-          <a:effectRef idx="2">
+          <a:effectRef idx="0">
             <a:schemeClr val="accent1"/>
           </a:effectRef>
           <a:fontRef idx="minor">
@@ -10294,7 +9264,7 @@
           <a:fillRef idx="3">
             <a:schemeClr val="accent1"/>
           </a:fillRef>
-          <a:effectRef idx="2">
+          <a:effectRef idx="0">
             <a:schemeClr val="accent1"/>
           </a:effectRef>
           <a:fontRef idx="minor">
@@ -10338,7 +9308,7 @@
           <a:fillRef idx="3">
             <a:schemeClr val="accent1"/>
           </a:fillRef>
-          <a:effectRef idx="2">
+          <a:effectRef idx="0">
             <a:schemeClr val="accent1"/>
           </a:effectRef>
           <a:fontRef idx="minor">
@@ -10382,7 +9352,7 @@
           <a:fillRef idx="3">
             <a:schemeClr val="accent1"/>
           </a:fillRef>
-          <a:effectRef idx="2">
+          <a:effectRef idx="0">
             <a:schemeClr val="accent1"/>
           </a:effectRef>
           <a:fontRef idx="minor">
@@ -10426,7 +9396,7 @@
           <a:fillRef idx="3">
             <a:schemeClr val="accent1"/>
           </a:fillRef>
-          <a:effectRef idx="2">
+          <a:effectRef idx="0">
             <a:schemeClr val="accent1"/>
           </a:effectRef>
           <a:fontRef idx="minor">
@@ -10470,7 +9440,7 @@
           <a:fillRef idx="3">
             <a:schemeClr val="accent1"/>
           </a:fillRef>
-          <a:effectRef idx="2">
+          <a:effectRef idx="0">
             <a:schemeClr val="accent1"/>
           </a:effectRef>
           <a:fontRef idx="minor">
@@ -10514,7 +9484,7 @@
           <a:fillRef idx="3">
             <a:schemeClr val="accent1"/>
           </a:fillRef>
-          <a:effectRef idx="2">
+          <a:effectRef idx="0">
             <a:schemeClr val="accent1"/>
           </a:effectRef>
           <a:fontRef idx="minor">
@@ -10558,7 +9528,7 @@
           <a:fillRef idx="3">
             <a:schemeClr val="accent1"/>
           </a:fillRef>
-          <a:effectRef idx="2">
+          <a:effectRef idx="0">
             <a:schemeClr val="accent1"/>
           </a:effectRef>
           <a:fontRef idx="minor">
@@ -10602,7 +9572,7 @@
           <a:fillRef idx="3">
             <a:schemeClr val="accent1"/>
           </a:fillRef>
-          <a:effectRef idx="2">
+          <a:effectRef idx="0">
             <a:schemeClr val="accent1"/>
           </a:effectRef>
           <a:fontRef idx="minor">
@@ -10646,7 +9616,7 @@
           <a:fillRef idx="3">
             <a:schemeClr val="accent1"/>
           </a:fillRef>
-          <a:effectRef idx="2">
+          <a:effectRef idx="0">
             <a:schemeClr val="accent1"/>
           </a:effectRef>
           <a:fontRef idx="minor">
@@ -10837,7 +9807,7 @@
           <a:fillRef idx="3">
             <a:schemeClr val="accent1"/>
           </a:fillRef>
-          <a:effectRef idx="2">
+          <a:effectRef idx="0">
             <a:schemeClr val="accent1"/>
           </a:effectRef>
           <a:fontRef idx="minor">
@@ -10909,7 +9879,7 @@
           <a:fillRef idx="3">
             <a:schemeClr val="accent1"/>
           </a:fillRef>
-          <a:effectRef idx="2">
+          <a:effectRef idx="0">
             <a:schemeClr val="accent1"/>
           </a:effectRef>
           <a:fontRef idx="minor">
@@ -11231,7 +10201,7 @@
           <a:fillRef idx="3">
             <a:schemeClr val="accent1"/>
           </a:fillRef>
-          <a:effectRef idx="2">
+          <a:effectRef idx="0">
             <a:schemeClr val="accent1"/>
           </a:effectRef>
           <a:fontRef idx="minor">
@@ -11275,7 +10245,7 @@
           <a:fillRef idx="3">
             <a:schemeClr val="accent1"/>
           </a:fillRef>
-          <a:effectRef idx="2">
+          <a:effectRef idx="0">
             <a:schemeClr val="accent1"/>
           </a:effectRef>
           <a:fontRef idx="minor">
@@ -11319,7 +10289,7 @@
           <a:fillRef idx="3">
             <a:schemeClr val="accent1"/>
           </a:fillRef>
-          <a:effectRef idx="2">
+          <a:effectRef idx="0">
             <a:schemeClr val="accent1"/>
           </a:effectRef>
           <a:fontRef idx="minor">
@@ -11363,7 +10333,7 @@
           <a:fillRef idx="3">
             <a:schemeClr val="accent1"/>
           </a:fillRef>
-          <a:effectRef idx="2">
+          <a:effectRef idx="0">
             <a:schemeClr val="accent1"/>
           </a:effectRef>
           <a:fontRef idx="minor">
@@ -11407,7 +10377,7 @@
           <a:fillRef idx="3">
             <a:schemeClr val="accent1"/>
           </a:fillRef>
-          <a:effectRef idx="2">
+          <a:effectRef idx="0">
             <a:schemeClr val="accent1"/>
           </a:effectRef>
           <a:fontRef idx="minor">
@@ -11451,7 +10421,7 @@
           <a:fillRef idx="3">
             <a:schemeClr val="accent1"/>
           </a:fillRef>
-          <a:effectRef idx="2">
+          <a:effectRef idx="0">
             <a:schemeClr val="accent1"/>
           </a:effectRef>
           <a:fontRef idx="minor">
@@ -11495,7 +10465,7 @@
           <a:fillRef idx="3">
             <a:schemeClr val="accent1"/>
           </a:fillRef>
-          <a:effectRef idx="2">
+          <a:effectRef idx="0">
             <a:schemeClr val="accent1"/>
           </a:effectRef>
           <a:fontRef idx="minor">
@@ -11539,7 +10509,7 @@
           <a:fillRef idx="3">
             <a:schemeClr val="accent1"/>
           </a:fillRef>
-          <a:effectRef idx="2">
+          <a:effectRef idx="0">
             <a:schemeClr val="accent1"/>
           </a:effectRef>
           <a:fontRef idx="minor">
@@ -11583,7 +10553,7 @@
           <a:fillRef idx="3">
             <a:schemeClr val="accent1"/>
           </a:fillRef>
-          <a:effectRef idx="2">
+          <a:effectRef idx="0">
             <a:schemeClr val="accent1"/>
           </a:effectRef>
           <a:fontRef idx="minor">
@@ -11627,7 +10597,7 @@
           <a:fillRef idx="3">
             <a:schemeClr val="accent1"/>
           </a:fillRef>
-          <a:effectRef idx="2">
+          <a:effectRef idx="0">
             <a:schemeClr val="accent1"/>
           </a:effectRef>
           <a:fontRef idx="minor">
@@ -11739,7 +10709,7 @@
           <a:fillRef idx="3">
             <a:schemeClr val="accent1"/>
           </a:fillRef>
-          <a:effectRef idx="2">
+          <a:effectRef idx="0">
             <a:schemeClr val="accent1"/>
           </a:effectRef>
           <a:fontRef idx="minor">
@@ -11783,7 +10753,7 @@
           <a:fillRef idx="3">
             <a:schemeClr val="accent1"/>
           </a:fillRef>
-          <a:effectRef idx="2">
+          <a:effectRef idx="0">
             <a:schemeClr val="accent1"/>
           </a:effectRef>
           <a:fontRef idx="minor">
@@ -11827,7 +10797,7 @@
           <a:fillRef idx="3">
             <a:schemeClr val="accent1"/>
           </a:fillRef>
-          <a:effectRef idx="2">
+          <a:effectRef idx="0">
             <a:schemeClr val="accent1"/>
           </a:effectRef>
           <a:fontRef idx="minor">
@@ -11871,7 +10841,7 @@
           <a:fillRef idx="3">
             <a:schemeClr val="accent1"/>
           </a:fillRef>
-          <a:effectRef idx="2">
+          <a:effectRef idx="0">
             <a:schemeClr val="accent1"/>
           </a:effectRef>
           <a:fontRef idx="minor">
@@ -11915,7 +10885,7 @@
           <a:fillRef idx="3">
             <a:schemeClr val="accent1"/>
           </a:fillRef>
-          <a:effectRef idx="2">
+          <a:effectRef idx="0">
             <a:schemeClr val="accent1"/>
           </a:effectRef>
           <a:fontRef idx="minor">
@@ -11959,7 +10929,7 @@
           <a:fillRef idx="3">
             <a:schemeClr val="accent1"/>
           </a:fillRef>
-          <a:effectRef idx="2">
+          <a:effectRef idx="0">
             <a:schemeClr val="accent1"/>
           </a:effectRef>
           <a:fontRef idx="minor">
@@ -12003,7 +10973,7 @@
           <a:fillRef idx="3">
             <a:schemeClr val="accent1"/>
           </a:fillRef>
-          <a:effectRef idx="2">
+          <a:effectRef idx="0">
             <a:schemeClr val="accent1"/>
           </a:effectRef>
           <a:fontRef idx="minor">
@@ -12047,7 +11017,7 @@
           <a:fillRef idx="3">
             <a:schemeClr val="accent1"/>
           </a:fillRef>
-          <a:effectRef idx="2">
+          <a:effectRef idx="0">
             <a:schemeClr val="accent1"/>
           </a:effectRef>
           <a:fontRef idx="minor">
@@ -12091,7 +11061,7 @@
           <a:fillRef idx="3">
             <a:schemeClr val="accent1"/>
           </a:fillRef>
-          <a:effectRef idx="2">
+          <a:effectRef idx="0">
             <a:schemeClr val="accent1"/>
           </a:effectRef>
           <a:fontRef idx="minor">
@@ -12135,7 +11105,7 @@
           <a:fillRef idx="3">
             <a:schemeClr val="accent1"/>
           </a:fillRef>
-          <a:effectRef idx="2">
+          <a:effectRef idx="0">
             <a:schemeClr val="accent1"/>
           </a:effectRef>
           <a:fontRef idx="minor">
@@ -12247,7 +11217,7 @@
           <a:fillRef idx="3">
             <a:schemeClr val="accent1"/>
           </a:fillRef>
-          <a:effectRef idx="2">
+          <a:effectRef idx="0">
             <a:schemeClr val="accent1"/>
           </a:effectRef>
           <a:fontRef idx="minor">
@@ -12291,7 +11261,7 @@
           <a:fillRef idx="3">
             <a:schemeClr val="accent1"/>
           </a:fillRef>
-          <a:effectRef idx="2">
+          <a:effectRef idx="0">
             <a:schemeClr val="accent1"/>
           </a:effectRef>
           <a:fontRef idx="minor">
@@ -12335,7 +11305,7 @@
           <a:fillRef idx="3">
             <a:schemeClr val="accent1"/>
           </a:fillRef>
-          <a:effectRef idx="2">
+          <a:effectRef idx="0">
             <a:schemeClr val="accent1"/>
           </a:effectRef>
           <a:fontRef idx="minor">
@@ -12379,7 +11349,7 @@
           <a:fillRef idx="3">
             <a:schemeClr val="accent1"/>
           </a:fillRef>
-          <a:effectRef idx="2">
+          <a:effectRef idx="0">
             <a:schemeClr val="accent1"/>
           </a:effectRef>
           <a:fontRef idx="minor">
@@ -12423,7 +11393,7 @@
           <a:fillRef idx="3">
             <a:schemeClr val="accent1"/>
           </a:fillRef>
-          <a:effectRef idx="2">
+          <a:effectRef idx="0">
             <a:schemeClr val="accent1"/>
           </a:effectRef>
           <a:fontRef idx="minor">
@@ -12467,7 +11437,7 @@
           <a:fillRef idx="3">
             <a:schemeClr val="accent1"/>
           </a:fillRef>
-          <a:effectRef idx="2">
+          <a:effectRef idx="0">
             <a:schemeClr val="accent1"/>
           </a:effectRef>
           <a:fontRef idx="minor">
@@ -12511,7 +11481,7 @@
           <a:fillRef idx="3">
             <a:schemeClr val="accent1"/>
           </a:fillRef>
-          <a:effectRef idx="2">
+          <a:effectRef idx="0">
             <a:schemeClr val="accent1"/>
           </a:effectRef>
           <a:fontRef idx="minor">
@@ -12555,7 +11525,7 @@
           <a:fillRef idx="3">
             <a:schemeClr val="accent1"/>
           </a:fillRef>
-          <a:effectRef idx="2">
+          <a:effectRef idx="0">
             <a:schemeClr val="accent1"/>
           </a:effectRef>
           <a:fontRef idx="minor">
@@ -12599,7 +11569,7 @@
           <a:fillRef idx="3">
             <a:schemeClr val="accent1"/>
           </a:fillRef>
-          <a:effectRef idx="2">
+          <a:effectRef idx="0">
             <a:schemeClr val="accent1"/>
           </a:effectRef>
           <a:fontRef idx="minor">
@@ -12643,7 +11613,7 @@
           <a:fillRef idx="3">
             <a:schemeClr val="accent1"/>
           </a:fillRef>
-          <a:effectRef idx="2">
+          <a:effectRef idx="0">
             <a:schemeClr val="accent1"/>
           </a:effectRef>
           <a:fontRef idx="minor">
@@ -12755,7 +11725,7 @@
           <a:fillRef idx="3">
             <a:schemeClr val="accent1"/>
           </a:fillRef>
-          <a:effectRef idx="2">
+          <a:effectRef idx="0">
             <a:schemeClr val="accent1"/>
           </a:effectRef>
           <a:fontRef idx="minor">
@@ -12799,7 +11769,7 @@
           <a:fillRef idx="3">
             <a:schemeClr val="accent1"/>
           </a:fillRef>
-          <a:effectRef idx="2">
+          <a:effectRef idx="0">
             <a:schemeClr val="accent1"/>
           </a:effectRef>
           <a:fontRef idx="minor">
@@ -12843,7 +11813,7 @@
           <a:fillRef idx="3">
             <a:schemeClr val="accent1"/>
           </a:fillRef>
-          <a:effectRef idx="2">
+          <a:effectRef idx="0">
             <a:schemeClr val="accent1"/>
           </a:effectRef>
           <a:fontRef idx="minor">
@@ -12887,7 +11857,7 @@
           <a:fillRef idx="3">
             <a:schemeClr val="accent1"/>
           </a:fillRef>
-          <a:effectRef idx="2">
+          <a:effectRef idx="0">
             <a:schemeClr val="accent1"/>
           </a:effectRef>
           <a:fontRef idx="minor">
@@ -12931,7 +11901,7 @@
           <a:fillRef idx="3">
             <a:schemeClr val="accent1"/>
           </a:fillRef>
-          <a:effectRef idx="2">
+          <a:effectRef idx="0">
             <a:schemeClr val="accent1"/>
           </a:effectRef>
           <a:fontRef idx="minor">
@@ -12975,7 +11945,7 @@
           <a:fillRef idx="3">
             <a:schemeClr val="accent1"/>
           </a:fillRef>
-          <a:effectRef idx="2">
+          <a:effectRef idx="0">
             <a:schemeClr val="accent1"/>
           </a:effectRef>
           <a:fontRef idx="minor">
@@ -13019,7 +11989,7 @@
           <a:fillRef idx="3">
             <a:schemeClr val="accent1"/>
           </a:fillRef>
-          <a:effectRef idx="2">
+          <a:effectRef idx="0">
             <a:schemeClr val="accent1"/>
           </a:effectRef>
           <a:fontRef idx="minor">
@@ -13063,7 +12033,7 @@
           <a:fillRef idx="3">
             <a:schemeClr val="accent1"/>
           </a:fillRef>
-          <a:effectRef idx="2">
+          <a:effectRef idx="0">
             <a:schemeClr val="accent1"/>
           </a:effectRef>
           <a:fontRef idx="minor">
@@ -13107,7 +12077,7 @@
           <a:fillRef idx="3">
             <a:schemeClr val="accent1"/>
           </a:fillRef>
-          <a:effectRef idx="2">
+          <a:effectRef idx="0">
             <a:schemeClr val="accent1"/>
           </a:effectRef>
           <a:fontRef idx="minor">
@@ -13151,7 +12121,7 @@
           <a:fillRef idx="3">
             <a:schemeClr val="accent1"/>
           </a:fillRef>
-          <a:effectRef idx="2">
+          <a:effectRef idx="0">
             <a:schemeClr val="accent1"/>
           </a:effectRef>
           <a:fontRef idx="minor">
@@ -13263,7 +12233,7 @@
           <a:fillRef idx="3">
             <a:schemeClr val="accent1"/>
           </a:fillRef>
-          <a:effectRef idx="2">
+          <a:effectRef idx="0">
             <a:schemeClr val="accent1"/>
           </a:effectRef>
           <a:fontRef idx="minor">
@@ -13307,7 +12277,7 @@
           <a:fillRef idx="3">
             <a:schemeClr val="accent1"/>
           </a:fillRef>
-          <a:effectRef idx="2">
+          <a:effectRef idx="0">
             <a:schemeClr val="accent1"/>
           </a:effectRef>
           <a:fontRef idx="minor">
@@ -13351,7 +12321,7 @@
           <a:fillRef idx="3">
             <a:schemeClr val="accent1"/>
           </a:fillRef>
-          <a:effectRef idx="2">
+          <a:effectRef idx="0">
             <a:schemeClr val="accent1"/>
           </a:effectRef>
           <a:fontRef idx="minor">
@@ -13395,7 +12365,7 @@
           <a:fillRef idx="3">
             <a:schemeClr val="accent1"/>
           </a:fillRef>
-          <a:effectRef idx="2">
+          <a:effectRef idx="0">
             <a:schemeClr val="accent1"/>
           </a:effectRef>
           <a:fontRef idx="minor">
@@ -13439,7 +12409,7 @@
           <a:fillRef idx="3">
             <a:schemeClr val="accent1"/>
           </a:fillRef>
-          <a:effectRef idx="2">
+          <a:effectRef idx="0">
             <a:schemeClr val="accent1"/>
           </a:effectRef>
           <a:fontRef idx="minor">
@@ -13483,7 +12453,7 @@
           <a:fillRef idx="3">
             <a:schemeClr val="accent1"/>
           </a:fillRef>
-          <a:effectRef idx="2">
+          <a:effectRef idx="0">
             <a:schemeClr val="accent1"/>
           </a:effectRef>
           <a:fontRef idx="minor">
@@ -13527,7 +12497,7 @@
           <a:fillRef idx="3">
             <a:schemeClr val="accent1"/>
           </a:fillRef>
-          <a:effectRef idx="2">
+          <a:effectRef idx="0">
             <a:schemeClr val="accent1"/>
           </a:effectRef>
           <a:fontRef idx="minor">
@@ -13571,7 +12541,7 @@
           <a:fillRef idx="3">
             <a:schemeClr val="accent1"/>
           </a:fillRef>
-          <a:effectRef idx="2">
+          <a:effectRef idx="0">
             <a:schemeClr val="accent1"/>
           </a:effectRef>
           <a:fontRef idx="minor">
@@ -13615,7 +12585,7 @@
           <a:fillRef idx="3">
             <a:schemeClr val="accent1"/>
           </a:fillRef>
-          <a:effectRef idx="2">
+          <a:effectRef idx="0">
             <a:schemeClr val="accent1"/>
           </a:effectRef>
           <a:fontRef idx="minor">
@@ -13659,7 +12629,7 @@
           <a:fillRef idx="3">
             <a:schemeClr val="accent1"/>
           </a:fillRef>
-          <a:effectRef idx="2">
+          <a:effectRef idx="0">
             <a:schemeClr val="accent1"/>
           </a:effectRef>
           <a:fontRef idx="minor">
@@ -13771,7 +12741,7 @@
           <a:fillRef idx="3">
             <a:schemeClr val="accent1"/>
           </a:fillRef>
-          <a:effectRef idx="2">
+          <a:effectRef idx="0">
             <a:schemeClr val="accent1"/>
           </a:effectRef>
           <a:fontRef idx="minor">
@@ -13815,7 +12785,7 @@
           <a:fillRef idx="3">
             <a:schemeClr val="accent1"/>
           </a:fillRef>
-          <a:effectRef idx="2">
+          <a:effectRef idx="0">
             <a:schemeClr val="accent1"/>
           </a:effectRef>
           <a:fontRef idx="minor">
@@ -13859,7 +12829,7 @@
           <a:fillRef idx="3">
             <a:schemeClr val="accent1"/>
           </a:fillRef>
-          <a:effectRef idx="2">
+          <a:effectRef idx="0">
             <a:schemeClr val="accent1"/>
           </a:effectRef>
           <a:fontRef idx="minor">
@@ -13903,7 +12873,7 @@
           <a:fillRef idx="3">
             <a:schemeClr val="accent1"/>
           </a:fillRef>
-          <a:effectRef idx="2">
+          <a:effectRef idx="0">
             <a:schemeClr val="accent1"/>
           </a:effectRef>
           <a:fontRef idx="minor">
@@ -13947,7 +12917,7 @@
           <a:fillRef idx="3">
             <a:schemeClr val="accent1"/>
           </a:fillRef>
-          <a:effectRef idx="2">
+          <a:effectRef idx="0">
             <a:schemeClr val="accent1"/>
           </a:effectRef>
           <a:fontRef idx="minor">
@@ -13991,7 +12961,7 @@
           <a:fillRef idx="3">
             <a:schemeClr val="accent1"/>
           </a:fillRef>
-          <a:effectRef idx="2">
+          <a:effectRef idx="0">
             <a:schemeClr val="accent1"/>
           </a:effectRef>
           <a:fontRef idx="minor">
@@ -14035,7 +13005,7 @@
           <a:fillRef idx="3">
             <a:schemeClr val="accent1"/>
           </a:fillRef>
-          <a:effectRef idx="2">
+          <a:effectRef idx="0">
             <a:schemeClr val="accent1"/>
           </a:effectRef>
           <a:fontRef idx="minor">
@@ -14079,7 +13049,7 @@
           <a:fillRef idx="3">
             <a:schemeClr val="accent1"/>
           </a:fillRef>
-          <a:effectRef idx="2">
+          <a:effectRef idx="0">
             <a:schemeClr val="accent1"/>
           </a:effectRef>
           <a:fontRef idx="minor">
@@ -14123,7 +13093,7 @@
           <a:fillRef idx="3">
             <a:schemeClr val="accent1"/>
           </a:fillRef>
-          <a:effectRef idx="2">
+          <a:effectRef idx="0">
             <a:schemeClr val="accent1"/>
           </a:effectRef>
           <a:fontRef idx="minor">
@@ -14167,7 +13137,7 @@
           <a:fillRef idx="3">
             <a:schemeClr val="accent1"/>
           </a:fillRef>
-          <a:effectRef idx="2">
+          <a:effectRef idx="0">
             <a:schemeClr val="accent1"/>
           </a:effectRef>
           <a:fontRef idx="minor">
@@ -14279,7 +13249,7 @@
           <a:fillRef idx="3">
             <a:schemeClr val="accent1"/>
           </a:fillRef>
-          <a:effectRef idx="2">
+          <a:effectRef idx="0">
             <a:schemeClr val="accent1"/>
           </a:effectRef>
           <a:fontRef idx="minor">
@@ -14323,7 +13293,7 @@
           <a:fillRef idx="3">
             <a:schemeClr val="accent1"/>
           </a:fillRef>
-          <a:effectRef idx="2">
+          <a:effectRef idx="0">
             <a:schemeClr val="accent1"/>
           </a:effectRef>
           <a:fontRef idx="minor">
@@ -14367,7 +13337,7 @@
           <a:fillRef idx="3">
             <a:schemeClr val="accent1"/>
           </a:fillRef>
-          <a:effectRef idx="2">
+          <a:effectRef idx="0">
             <a:schemeClr val="accent1"/>
           </a:effectRef>
           <a:fontRef idx="minor">
@@ -14411,7 +13381,7 @@
           <a:fillRef idx="3">
             <a:schemeClr val="accent1"/>
           </a:fillRef>
-          <a:effectRef idx="2">
+          <a:effectRef idx="0">
             <a:schemeClr val="accent1"/>
           </a:effectRef>
           <a:fontRef idx="minor">
@@ -14455,7 +13425,7 @@
           <a:fillRef idx="3">
             <a:schemeClr val="accent1"/>
           </a:fillRef>
-          <a:effectRef idx="2">
+          <a:effectRef idx="0">
             <a:schemeClr val="accent1"/>
           </a:effectRef>
           <a:fontRef idx="minor">
@@ -14499,7 +13469,7 @@
           <a:fillRef idx="3">
             <a:schemeClr val="accent1"/>
           </a:fillRef>
-          <a:effectRef idx="2">
+          <a:effectRef idx="0">
             <a:schemeClr val="accent1"/>
           </a:effectRef>
           <a:fontRef idx="minor">
@@ -14543,7 +13513,7 @@
           <a:fillRef idx="3">
             <a:schemeClr val="accent1"/>
           </a:fillRef>
-          <a:effectRef idx="2">
+          <a:effectRef idx="0">
             <a:schemeClr val="accent1"/>
           </a:effectRef>
           <a:fontRef idx="minor">
@@ -14587,7 +13557,7 @@
           <a:fillRef idx="3">
             <a:schemeClr val="accent1"/>
           </a:fillRef>
-          <a:effectRef idx="2">
+          <a:effectRef idx="0">
             <a:schemeClr val="accent1"/>
           </a:effectRef>
           <a:fontRef idx="minor">
@@ -14631,7 +13601,7 @@
           <a:fillRef idx="3">
             <a:schemeClr val="accent1"/>
           </a:fillRef>
-          <a:effectRef idx="2">
+          <a:effectRef idx="0">
             <a:schemeClr val="accent1"/>
           </a:effectRef>
           <a:fontRef idx="minor">
@@ -14675,7 +13645,7 @@
           <a:fillRef idx="3">
             <a:schemeClr val="accent1"/>
           </a:fillRef>
-          <a:effectRef idx="2">
+          <a:effectRef idx="0">
             <a:schemeClr val="accent1"/>
           </a:effectRef>
           <a:fontRef idx="minor">
@@ -14787,7 +13757,7 @@
           <a:fillRef idx="3">
             <a:schemeClr val="accent1"/>
           </a:fillRef>
-          <a:effectRef idx="2">
+          <a:effectRef idx="0">
             <a:schemeClr val="accent1"/>
           </a:effectRef>
           <a:fontRef idx="minor">
@@ -14831,7 +13801,7 @@
           <a:fillRef idx="3">
             <a:schemeClr val="accent1"/>
           </a:fillRef>
-          <a:effectRef idx="2">
+          <a:effectRef idx="0">
             <a:schemeClr val="accent1"/>
           </a:effectRef>
           <a:fontRef idx="minor">
@@ -14875,7 +13845,7 @@
           <a:fillRef idx="3">
             <a:schemeClr val="accent1"/>
           </a:fillRef>
-          <a:effectRef idx="2">
+          <a:effectRef idx="0">
             <a:schemeClr val="accent1"/>
           </a:effectRef>
           <a:fontRef idx="minor">
@@ -14919,7 +13889,7 @@
           <a:fillRef idx="3">
             <a:schemeClr val="accent1"/>
           </a:fillRef>
-          <a:effectRef idx="2">
+          <a:effectRef idx="0">
             <a:schemeClr val="accent1"/>
           </a:effectRef>
           <a:fontRef idx="minor">
@@ -14963,7 +13933,7 @@
           <a:fillRef idx="3">
             <a:schemeClr val="accent1"/>
           </a:fillRef>
-          <a:effectRef idx="2">
+          <a:effectRef idx="0">
             <a:schemeClr val="accent1"/>
           </a:effectRef>
           <a:fontRef idx="minor">
@@ -15007,7 +13977,7 @@
           <a:fillRef idx="3">
             <a:schemeClr val="accent1"/>
           </a:fillRef>
-          <a:effectRef idx="2">
+          <a:effectRef idx="0">
             <a:schemeClr val="accent1"/>
           </a:effectRef>
           <a:fontRef idx="minor">
@@ -15051,7 +14021,7 @@
           <a:fillRef idx="3">
             <a:schemeClr val="accent1"/>
           </a:fillRef>
-          <a:effectRef idx="2">
+          <a:effectRef idx="0">
             <a:schemeClr val="accent1"/>
           </a:effectRef>
           <a:fontRef idx="minor">
@@ -15095,7 +14065,7 @@
           <a:fillRef idx="3">
             <a:schemeClr val="accent1"/>
           </a:fillRef>
-          <a:effectRef idx="2">
+          <a:effectRef idx="0">
             <a:schemeClr val="accent1"/>
           </a:effectRef>
           <a:fontRef idx="minor">
@@ -15139,7 +14109,7 @@
           <a:fillRef idx="3">
             <a:schemeClr val="accent1"/>
           </a:fillRef>
-          <a:effectRef idx="2">
+          <a:effectRef idx="0">
             <a:schemeClr val="accent1"/>
           </a:effectRef>
           <a:fontRef idx="minor">
@@ -15183,7 +14153,7 @@
           <a:fillRef idx="3">
             <a:schemeClr val="accent1"/>
           </a:fillRef>
-          <a:effectRef idx="2">
+          <a:effectRef idx="0">
             <a:schemeClr val="accent1"/>
           </a:effectRef>
           <a:fontRef idx="minor">

--- a/presentations/2026-Q3/ЦКБА_III_квартал_2026_Гонка_героев.pptx
+++ b/presentations/2026-Q3/ЦКБА_III_квартал_2026_Гонка_героев.pptx
@@ -520,7 +520,7 @@
           </a:p>
           <a:p>
             <a:r>
-              <a:t>В титульный слайд вставлены фотографии прохождения дистанции и команды после финиша. Исходные JPEG получены из presentations/2026-Q3/ в репозитории juliashar3-debug/newrepository. Для презентации использованы уменьшенные копии, исходные файлы в репозитории сохранены.</a:t>
+              <a:t>Фотографии с титульного слайда удалены по просьбе пользователя. Правая часть оставлена свободной для будущих фотографий; исходные JPEG сохранены в репозитории.</a:t>
             </a:r>
           </a:p>
         </p:txBody>
@@ -605,7 +605,7 @@
           </a:p>
           <a:p>
             <a:r>
-              <a:t>В правой части размещены три фотографии пользователя: команда после финиша, команда с флагом ЦКБА и команда на препятствии. Сохранена синяя изогнутая граница из предоставленного образца. Все четыре загруженных фотографии использованы в титульном слайде и слайде мероприятия.</a:t>
+              <a:t>В правой части размещены три фотографии пользователя: команда после финиша, команда с флагом ЦКБА и команда на препятствии. Сохранена синяя изогнутая граница из предоставленного образца. Фотографии размещены только на слайде мероприятия; титульный слайд оставлен без фотографий.</a:t>
             </a:r>
           </a:p>
         </p:txBody>
@@ -3764,61 +3764,53 @@
         <p:nvPr/>
       </p:nvGrpSpPr>
       <p:grpSpPr/>
-      <p:pic>
-        <p:nvPicPr>
-          <p:cNvPr id="2" name="Гонка героев — прохождение дистанции" descr="image-14-10-26-03-39-1.jpeg"/>
-          <p:cNvPicPr>
-            <a:picLocks noChangeAspect="1"/>
-          </p:cNvPicPr>
-          <p:nvPr/>
-        </p:nvPicPr>
-        <p:blipFill>
-          <a:blip r:embed="rId2"/>
-          <a:srcRect t="30339" b="4339"/>
-          <a:stretch>
-            <a:fillRect/>
-          </a:stretch>
-        </p:blipFill>
+      <p:sp>
+        <p:nvSpPr>
+          <p:cNvPr id="2" name="Место для будущих фотографий"/>
+          <p:cNvSpPr/>
+          <p:nvPr/>
+        </p:nvSpPr>
         <p:spPr>
           <a:xfrm>
             <a:off x="8255000" y="0"/>
-            <a:ext cx="3937000" cy="3429000"/>
-          </a:xfrm>
-          <a:prstGeom prst="rect">
-            <a:avLst/>
-          </a:prstGeom>
-          <a:effectLst/>
-        </p:spPr>
-      </p:pic>
-      <p:pic>
-        <p:nvPicPr>
-          <p:cNvPr id="3" name="Гонка героев — команда после финиша" descr="image-14-10-26-03-39-2.jpeg"/>
-          <p:cNvPicPr>
-            <a:picLocks noChangeAspect="1"/>
-          </p:cNvPicPr>
-          <p:nvPr/>
-        </p:nvPicPr>
-        <p:blipFill>
-          <a:blip r:embed="rId3"/>
-          <a:srcRect l="9944" r="3944"/>
-          <a:stretch>
-            <a:fillRect/>
-          </a:stretch>
-        </p:blipFill>
-        <p:spPr>
-          <a:xfrm>
-            <a:off x="8255000" y="3429000"/>
-            <a:ext cx="3937000" cy="3429000"/>
-          </a:xfrm>
-          <a:prstGeom prst="rect">
-            <a:avLst/>
-          </a:prstGeom>
-          <a:effectLst/>
-        </p:spPr>
-      </p:pic>
-      <p:sp>
-        <p:nvSpPr>
-          <p:cNvPr id="4" name="Rectangle 3"/>
+            <a:ext cx="3937000" cy="6858000"/>
+          </a:xfrm>
+          <a:prstGeom prst="rect">
+            <a:avLst/>
+          </a:prstGeom>
+          <a:solidFill>
+            <a:srgbClr val="E8EDF3"/>
+          </a:solidFill>
+          <a:ln>
+            <a:noFill/>
+          </a:ln>
+          <a:effectLst/>
+        </p:spPr>
+        <p:style>
+          <a:lnRef idx="1">
+            <a:schemeClr val="accent1"/>
+          </a:lnRef>
+          <a:fillRef idx="3">
+            <a:schemeClr val="accent1"/>
+          </a:fillRef>
+          <a:effectRef idx="0">
+            <a:schemeClr val="accent1"/>
+          </a:effectRef>
+          <a:fontRef idx="minor">
+            <a:schemeClr val="lt1"/>
+          </a:fontRef>
+        </p:style>
+        <p:txBody>
+          <a:bodyPr rtlCol="0" anchor="ctr"/>
+          <a:lstStyle/>
+          <a:p>
+            <a:pPr algn="ctr"/>
+          </a:p>
+        </p:txBody>
+      </p:sp>
+      <p:sp>
+        <p:nvSpPr>
+          <p:cNvPr id="3" name="Rectangle 2"/>
           <p:cNvSpPr/>
           <p:nvPr/>
         </p:nvSpPr>
@@ -3890,14 +3882,14 @@
       </p:sp>
       <p:pic>
         <p:nvPicPr>
-          <p:cNvPr id="5" name="Логотип из предоставленного образца" descr="logo_navy.png"/>
+          <p:cNvPr id="4" name="Логотип из предоставленного образца" descr="logo_navy.png"/>
           <p:cNvPicPr>
             <a:picLocks noChangeAspect="1"/>
           </p:cNvPicPr>
           <p:nvPr/>
         </p:nvPicPr>
         <p:blipFill>
-          <a:blip r:embed="rId4"/>
+          <a:blip r:embed="rId2"/>
           <a:stretch>
             <a:fillRect/>
           </a:stretch>
@@ -3915,7 +3907,7 @@
       </p:pic>
       <p:sp>
         <p:nvSpPr>
-          <p:cNvPr id="6" name="TextBox 5"/>
+          <p:cNvPr id="5" name="TextBox 4"/>
           <p:cNvSpPr txBox="1"/>
           <p:nvPr/>
         </p:nvSpPr>
@@ -3961,7 +3953,7 @@
       </p:sp>
       <p:sp>
         <p:nvSpPr>
-          <p:cNvPr id="7" name="TextBox 6"/>
+          <p:cNvPr id="6" name="TextBox 5"/>
           <p:cNvSpPr txBox="1"/>
           <p:nvPr/>
         </p:nvSpPr>
@@ -4051,7 +4043,7 @@
       </p:sp>
       <p:sp>
         <p:nvSpPr>
-          <p:cNvPr id="8" name="TextBox 7"/>
+          <p:cNvPr id="7" name="TextBox 6"/>
           <p:cNvSpPr txBox="1"/>
           <p:nvPr/>
         </p:nvSpPr>
@@ -4097,7 +4089,7 @@
       </p:sp>
       <p:sp>
         <p:nvSpPr>
-          <p:cNvPr id="9" name="TextBox 8"/>
+          <p:cNvPr id="8" name="TextBox 7"/>
           <p:cNvSpPr txBox="1"/>
           <p:nvPr/>
         </p:nvSpPr>
@@ -4165,7 +4157,7 @@
       </p:sp>
       <p:sp>
         <p:nvSpPr>
-          <p:cNvPr id="10" name="TextBox 9"/>
+          <p:cNvPr id="9" name="TextBox 8"/>
           <p:cNvSpPr txBox="1"/>
           <p:nvPr/>
         </p:nvSpPr>
@@ -4211,7 +4203,7 @@
       </p:sp>
       <p:sp>
         <p:nvSpPr>
-          <p:cNvPr id="11" name="TextBox 10"/>
+          <p:cNvPr id="10" name="TextBox 9"/>
           <p:cNvSpPr txBox="1"/>
           <p:nvPr/>
         </p:nvSpPr>
@@ -4257,7 +4249,7 @@
       </p:sp>
       <p:sp>
         <p:nvSpPr>
-          <p:cNvPr id="12" name="TextBox 11"/>
+          <p:cNvPr id="11" name="TextBox 10"/>
           <p:cNvSpPr txBox="1"/>
           <p:nvPr/>
         </p:nvSpPr>
@@ -4303,7 +4295,7 @@
       </p:sp>
       <p:sp>
         <p:nvSpPr>
-          <p:cNvPr id="13" name="TextBox 12"/>
+          <p:cNvPr id="12" name="TextBox 11"/>
           <p:cNvSpPr txBox="1"/>
           <p:nvPr/>
         </p:nvSpPr>

--- a/presentations/2026-Q3/ЦКБА_III_квартал_2026_Гонка_героев.pptx
+++ b/presentations/2026-Q3/ЦКБА_III_квартал_2026_Гонка_героев.pptx
@@ -595,7 +595,7 @@
           </a:p>
           <a:p>
             <a:r>
-              <a:t>Организатор и численность участников не предоставлены, поэтому указаны прочерки. Показатели из отчета за II квартал не перенесены.</a:t>
+              <a:t>На общем фото с флагом ЦКБА (image-14-10-26-03-39-3.jpeg) визуально насчитано 22 человека: 16 стоящих и 6 в переднем плане. На общем фото после финиша также 22 человека. В поле общего количества указано число людей на фото, а не охват всей гонки. Организатор и число участников из СМС не подтверждены, поэтому указаны прочерки. Показатели из отчета за II квартал не перенесены.</a:t>
             </a:r>
           </a:p>
           <a:p>
@@ -750,7 +750,7 @@
           </a:p>
           <a:p>
             <a:r>
-              <a:t>Цели и задачи — предложенный проект, а не подтвержденный утвержденный план. Содержание можно редактировать в PowerPoint.</a:t>
+              <a:t>Цели и задачи обновлены с учетом командного участия в «Гонке героев», зимнего сезона и подготовки плана на 2027 год. Это предложенный проект, а не утвержденный план. Содержание можно редактировать в PowerPoint.</a:t>
             </a:r>
           </a:p>
         </p:txBody>
@@ -7307,7 +7307,7 @@
                 </a:solidFill>
                 <a:latin typeface="Verdana"/>
               </a:rPr>
-              <a:t>— человек</a:t>
+              <a:t>22 человека (по фото)</a:t>
             </a:r>
           </a:p>
         </p:txBody>
@@ -10645,7 +10645,7 @@
                 </a:solidFill>
                 <a:latin typeface="Verdana"/>
               </a:rPr>
-              <a:t>1 Повышение вовлеченности молодых</a:t>
+              <a:t>1 Развитие взаимопомощи на основе</a:t>
             </a:r>
           </a:p>
           <a:p>
@@ -10667,7 +10667,7 @@
                 </a:solidFill>
                 <a:latin typeface="Verdana"/>
               </a:rPr>
-              <a:t>специалистов в жизнь предприятия</a:t>
+              <a:t>опыта командных соревнований</a:t>
             </a:r>
           </a:p>
         </p:txBody>
@@ -11153,7 +11153,7 @@
                 </a:solidFill>
                 <a:latin typeface="Verdana"/>
               </a:rPr>
-              <a:t>2 Развитие командного взаимодействия</a:t>
+              <a:t>2 Вовлечение новичков в мероприятия</a:t>
             </a:r>
           </a:p>
           <a:p>
@@ -11175,7 +11175,7 @@
                 </a:solidFill>
                 <a:latin typeface="Verdana"/>
               </a:rPr>
-              <a:t>и корпоративной культуры</a:t>
+              <a:t>с доступным уровнем нагрузки</a:t>
             </a:r>
           </a:p>
         </p:txBody>
@@ -11661,7 +11661,7 @@
                 </a:solidFill>
                 <a:latin typeface="Verdana"/>
               </a:rPr>
-              <a:t>3 Поддержка профессионального развития</a:t>
+              <a:t>3 Обмен практическим опытом между</a:t>
             </a:r>
           </a:p>
           <a:p>
@@ -11683,7 +11683,7 @@
                 </a:solidFill>
                 <a:latin typeface="Verdana"/>
               </a:rPr>
-              <a:t>и обмена опытом</a:t>
+              <a:t>молодыми специалистами</a:t>
             </a:r>
           </a:p>
         </p:txBody>
@@ -12169,7 +12169,7 @@
                 </a:solidFill>
                 <a:latin typeface="Verdana"/>
               </a:rPr>
-              <a:t>4 Популяризация активного образа жизни</a:t>
+              <a:t>4 Учет интересов молодежи при</a:t>
             </a:r>
           </a:p>
           <a:p>
@@ -12191,7 +12191,7 @@
                 </a:solidFill>
                 <a:latin typeface="Verdana"/>
               </a:rPr>
-              <a:t>среди молодых сотрудников</a:t>
+              <a:t>подготовке плана на 2027 год</a:t>
             </a:r>
           </a:p>
         </p:txBody>
@@ -12677,7 +12677,7 @@
                 </a:solidFill>
                 <a:latin typeface="Verdana"/>
               </a:rPr>
-              <a:t>1 Организация спортивных, культурных</a:t>
+              <a:t>1 Провести встречу участников гонки:</a:t>
             </a:r>
           </a:p>
           <a:p>
@@ -12699,7 +12699,7 @@
                 </a:solidFill>
                 <a:latin typeface="Verdana"/>
               </a:rPr>
-              <a:t>и командных мероприятий</a:t>
+              <a:t>обсудить опыт и пригласить новичков</a:t>
             </a:r>
           </a:p>
         </p:txBody>
@@ -13185,7 +13185,7 @@
                 </a:solidFill>
                 <a:latin typeface="Verdana"/>
               </a:rPr>
-              <a:t>2 Информирование молодежи о мероприятиях</a:t>
+              <a:t>2 Подготовить командный квиз</a:t>
             </a:r>
           </a:p>
           <a:p>
@@ -13207,7 +13207,7 @@
                 </a:solidFill>
                 <a:latin typeface="Verdana"/>
               </a:rPr>
-              <a:t>через чаты и внутренний портал</a:t>
+              <a:t>для зимнего сезона</a:t>
             </a:r>
           </a:p>
         </p:txBody>
@@ -13693,7 +13693,7 @@
                 </a:solidFill>
                 <a:latin typeface="Verdana"/>
               </a:rPr>
-              <a:t>3 Вовлечение сотрудников в конференции,</a:t>
+              <a:t>3 Организовать встречу «Обмен опытом»</a:t>
             </a:r>
           </a:p>
           <a:p>
@@ -13715,7 +13715,7 @@
                 </a:solidFill>
                 <a:latin typeface="Verdana"/>
               </a:rPr>
-              <a:t>конкурсы и обмен опытом</a:t>
+              <a:t>с короткими выступлениями коллег</a:t>
             </a:r>
           </a:p>
         </p:txBody>
@@ -14201,7 +14201,7 @@
                 </a:solidFill>
                 <a:latin typeface="Verdana"/>
               </a:rPr>
-              <a:t>4 Сбор предложений молодых специалистов</a:t>
+              <a:t>4 Собрать идеи через опрос и составить</a:t>
             </a:r>
           </a:p>
           <a:p>
@@ -14223,7 +14223,7 @@
                 </a:solidFill>
                 <a:latin typeface="Verdana"/>
               </a:rPr>
-              <a:t>для плана работы на следующий год</a:t>
+              <a:t>проект плана мероприятий на 2027 год</a:t>
             </a:r>
           </a:p>
         </p:txBody>

--- a/presentations/2026-Q3/ЦКБА_III_квартал_2026_Гонка_героев.pptx
+++ b/presentations/2026-Q3/ЦКБА_III_квартал_2026_Гонка_героев.pptx
@@ -9,6 +9,7 @@
     <p:sldId id="257" r:id="rId9"/>
     <p:sldId id="258" r:id="rId10"/>
     <p:sldId id="259" r:id="rId11"/>
+    <p:sldId id="260" r:id="rId12"/>
   </p:sldIdLst>
   <p:sldSz cx="12192000" cy="6858000" type="screen4x3"/>
   <p:notesSz cx="6858000" cy="9144000"/>
@@ -520,7 +521,7 @@
           </a:p>
           <a:p>
             <a:r>
-              <a:t>Фотографии с титульного слайда удалены по просьбе пользователя. Правая часть оставлена свободной для будущих фотографий; исходные JPEG сохранены в репозитории.</a:t>
+              <a:t>По последнему запросу пользователя на титульном слайде размещены два присланных снимка: команда на препятствии (cover-team.jpg) и портрет на природе (cover-portrait.jpg). Сохранены два фото в правой части и изогнутая граница, как в образцах. Исходные фотографии сохранены в репозитории.</a:t>
             </a:r>
           </a:p>
         </p:txBody>
@@ -605,7 +606,7 @@
           </a:p>
           <a:p>
             <a:r>
-              <a:t>В правой части размещены три фотографии пользователя: команда после финиша, команда с флагом ЦКБА и команда на препятствии. Сохранена синяя изогнутая граница из предоставленного образца. Фотографии размещены только на слайде мероприятия; титульный слайд оставлен без фотографий.</a:t>
+              <a:t>В правой части размещены три фотографии пользователя: команда после финиша, команда с флагом ЦКБА и команда на препятствии. Сохранена синяя изогнутая граница из предоставленного образца. Эти три фотографии слайда мероприятия сохранены без изменений; на титульном слайде размещены два отдельно присланных пользователем снимка.</a:t>
             </a:r>
           </a:p>
         </p:txBody>
@@ -675,7 +676,27 @@
           <a:lstStyle/>
           <a:p>
             <a:r>
-              <a:t>Механизмы информирования и вовлечения сохранены из предоставленных отчетов за I и II кварталы 2026 года. При необходимости актуализировать способы информирования за III квартал.</a:t>
+              <a:t>По сообщению пользователя участвовали сотрудники ЦКБА совместно с сотрудниками «Высокоточных комплексов».</a:t>
+            </a:r>
+          </a:p>
+          <a:p>
+            <a:r>
+              <a:t>На предоставленном общем фото night-tula-team.jpg насчитано 23 человека в позирующей команде; случайные зрители за пределами команды не включены, люди на разных снимках не суммировались. Это численность видимых людей на фото, а не охват всего забега.</a:t>
+            </a:r>
+          </a:p>
+          <a:p>
+            <a:r>
+              <a:t>Пользователь уточнил: участников СМС считать как общее число минус 25%. 23 × 0,75 = 17,25; округлено до 17 человек. Число расчетное, членство по снимку не определялось.</a:t>
+            </a:r>
+          </a:p>
+          <a:p>
+            <a:r>
+              <a:t>Дата забега в отчетном 2026 году — 18 июля 2026 года: https://night.tulamarathon.org/about/schedule ; https://events.run-rus.com/event/nt2026 . Интернет-источник подтверждает дату события в 2026 году, а не дату съемки фото.</a:t>
+            </a:r>
+          </a:p>
+          <a:p>
+            <a:r>
+              <a:t>Эффект — предложенная качественная формулировка, не результат измерения. Все три предоставленных снимка размещены в правой части слайда с обычным кадрированием.</a:t>
             </a:r>
           </a:p>
         </p:txBody>
@@ -745,12 +766,82 @@
           <a:lstStyle/>
           <a:p>
             <a:r>
+              <a:t>Механизмы информирования и вовлечения сохранены из предоставленных отчетов за I и II кварталы 2026 года. При необходимости актуализировать способы информирования за III квартал.</a:t>
+            </a:r>
+          </a:p>
+        </p:txBody>
+      </p:sp>
+      <p:sp>
+        <p:nvSpPr>
+          <p:cNvPr id="4" name="Slide Number Placeholder 3"/>
+          <p:cNvSpPr>
+            <a:spLocks noGrp="1"/>
+          </p:cNvSpPr>
+          <p:nvPr>
+            <p:ph type="sldNum" idx="5" sz="quarter"/>
+          </p:nvPr>
+        </p:nvSpPr>
+        <p:spPr/>
+      </p:sp>
+    </p:spTree>
+  </p:cSld>
+  <p:clrMapOvr>
+    <a:masterClrMapping/>
+  </p:clrMapOvr>
+</p:notes>
+</file>
+
+<file path=ppt/notesSlides/notesSlide5.xml><?xml version="1.0" encoding="utf-8"?>
+<p:notes xmlns:a="http://schemas.openxmlformats.org/drawingml/2006/main" xmlns:p="http://schemas.openxmlformats.org/presentationml/2006/main" xmlns:r="http://schemas.openxmlformats.org/officeDocument/2006/relationships">
+  <p:cSld>
+    <p:spTree>
+      <p:nvGrpSpPr>
+        <p:cNvPr id="1" name=""/>
+        <p:cNvGrpSpPr/>
+        <p:nvPr/>
+      </p:nvGrpSpPr>
+      <p:grpSpPr>
+        <a:xfrm>
+          <a:off x="0" y="0"/>
+          <a:ext cx="0" cy="0"/>
+          <a:chOff x="0" y="0"/>
+          <a:chExt cx="0" cy="0"/>
+        </a:xfrm>
+      </p:grpSpPr>
+      <p:sp>
+        <p:nvSpPr>
+          <p:cNvPr id="2" name="Slide Image Placeholder 1"/>
+          <p:cNvSpPr>
+            <a:spLocks noGrp="1"/>
+          </p:cNvSpPr>
+          <p:nvPr>
+            <p:ph type="sldImg" idx="2"/>
+          </p:nvPr>
+        </p:nvSpPr>
+        <p:spPr/>
+      </p:sp>
+      <p:sp>
+        <p:nvSpPr>
+          <p:cNvPr id="3" name="Notes Placeholder 2"/>
+          <p:cNvSpPr>
+            <a:spLocks noGrp="1"/>
+          </p:cNvSpPr>
+          <p:nvPr>
+            <p:ph type="body" idx="3" sz="quarter"/>
+          </p:nvPr>
+        </p:nvSpPr>
+        <p:spPr/>
+        <p:txBody>
+          <a:bodyPr/>
+          <a:lstStyle/>
+          <a:p>
+            <a:r>
               <a:t>Сохранена структура предыдущих отчетов: заключительный слайд содержит цели и задачи на следующий квартал. Поэтому здесь IV квартал 2026 года, а сам отчет относится к III кварталу.</a:t>
             </a:r>
           </a:p>
           <a:p>
             <a:r>
-              <a:t>Цели и задачи обновлены с учетом командного участия в «Гонке героев», зимнего сезона и подготовки плана на 2027 год. Это предложенный проект, а не утвержденный план. Содержание можно редактировать в PowerPoint.</a:t>
+              <a:t>Цели и задачи обновлены с учетом «Гонки героев» и совместного участия коллективов ЦКБА и «Высокоточных комплексов» в «Ночной Туле», зимнего сезона и подготовки плана на 2027 год. Это предложенный проект, а не утвержденный план. Содержание можно редактировать в PowerPoint.</a:t>
             </a:r>
           </a:p>
         </p:txBody>
@@ -3764,53 +3855,61 @@
         <p:nvPr/>
       </p:nvGrpSpPr>
       <p:grpSpPr/>
-      <p:sp>
-        <p:nvSpPr>
-          <p:cNvPr id="2" name="Место для будущих фотографий"/>
-          <p:cNvSpPr/>
-          <p:nvPr/>
-        </p:nvSpPr>
+      <p:pic>
+        <p:nvPicPr>
+          <p:cNvPr id="2" name="Титульный слайд — команда на препятствии" descr="cover-team.jpg"/>
+          <p:cNvPicPr>
+            <a:picLocks noChangeAspect="1"/>
+          </p:cNvPicPr>
+          <p:nvPr/>
+        </p:nvPicPr>
+        <p:blipFill>
+          <a:blip r:embed="rId2"/>
+          <a:srcRect l="17743" r="5743"/>
+          <a:stretch>
+            <a:fillRect/>
+          </a:stretch>
+        </p:blipFill>
         <p:spPr>
           <a:xfrm>
             <a:off x="8255000" y="0"/>
-            <a:ext cx="3937000" cy="6858000"/>
-          </a:xfrm>
-          <a:prstGeom prst="rect">
-            <a:avLst/>
-          </a:prstGeom>
-          <a:solidFill>
-            <a:srgbClr val="E8EDF3"/>
-          </a:solidFill>
-          <a:ln>
-            <a:noFill/>
-          </a:ln>
-          <a:effectLst/>
-        </p:spPr>
-        <p:style>
-          <a:lnRef idx="1">
-            <a:schemeClr val="accent1"/>
-          </a:lnRef>
-          <a:fillRef idx="3">
-            <a:schemeClr val="accent1"/>
-          </a:fillRef>
-          <a:effectRef idx="0">
-            <a:schemeClr val="accent1"/>
-          </a:effectRef>
-          <a:fontRef idx="minor">
-            <a:schemeClr val="lt1"/>
-          </a:fontRef>
-        </p:style>
-        <p:txBody>
-          <a:bodyPr rtlCol="0" anchor="ctr"/>
-          <a:lstStyle/>
-          <a:p>
-            <a:pPr algn="ctr"/>
-          </a:p>
-        </p:txBody>
-      </p:sp>
-      <p:sp>
-        <p:nvSpPr>
-          <p:cNvPr id="3" name="Rectangle 2"/>
+            <a:ext cx="3937000" cy="3429000"/>
+          </a:xfrm>
+          <a:prstGeom prst="rect">
+            <a:avLst/>
+          </a:prstGeom>
+          <a:effectLst/>
+        </p:spPr>
+      </p:pic>
+      <p:pic>
+        <p:nvPicPr>
+          <p:cNvPr id="3" name="Титульный слайд — портрет на природе" descr="cover-portrait.jpg"/>
+          <p:cNvPicPr>
+            <a:picLocks noChangeAspect="1"/>
+          </p:cNvPicPr>
+          <p:nvPr/>
+        </p:nvPicPr>
+        <p:blipFill>
+          <a:blip r:embed="rId3"/>
+          <a:srcRect t="30339" b="4339"/>
+          <a:stretch>
+            <a:fillRect/>
+          </a:stretch>
+        </p:blipFill>
+        <p:spPr>
+          <a:xfrm>
+            <a:off x="8255000" y="3429000"/>
+            <a:ext cx="3937000" cy="3429000"/>
+          </a:xfrm>
+          <a:prstGeom prst="rect">
+            <a:avLst/>
+          </a:prstGeom>
+          <a:effectLst/>
+        </p:spPr>
+      </p:pic>
+      <p:sp>
+        <p:nvSpPr>
+          <p:cNvPr id="4" name="Rectangle 3"/>
           <p:cNvSpPr/>
           <p:nvPr/>
         </p:nvSpPr>
@@ -3882,14 +3981,14 @@
       </p:sp>
       <p:pic>
         <p:nvPicPr>
-          <p:cNvPr id="4" name="Логотип из предоставленного образца" descr="logo_navy.png"/>
+          <p:cNvPr id="5" name="Логотип из предоставленного образца" descr="logo_navy.png"/>
           <p:cNvPicPr>
             <a:picLocks noChangeAspect="1"/>
           </p:cNvPicPr>
           <p:nvPr/>
         </p:nvPicPr>
         <p:blipFill>
-          <a:blip r:embed="rId2"/>
+          <a:blip r:embed="rId4"/>
           <a:stretch>
             <a:fillRect/>
           </a:stretch>
@@ -3907,7 +4006,7 @@
       </p:pic>
       <p:sp>
         <p:nvSpPr>
-          <p:cNvPr id="5" name="TextBox 4"/>
+          <p:cNvPr id="6" name="TextBox 5"/>
           <p:cNvSpPr txBox="1"/>
           <p:nvPr/>
         </p:nvSpPr>
@@ -3953,7 +4052,7 @@
       </p:sp>
       <p:sp>
         <p:nvSpPr>
-          <p:cNvPr id="6" name="TextBox 5"/>
+          <p:cNvPr id="7" name="TextBox 6"/>
           <p:cNvSpPr txBox="1"/>
           <p:nvPr/>
         </p:nvSpPr>
@@ -4043,7 +4142,7 @@
       </p:sp>
       <p:sp>
         <p:nvSpPr>
-          <p:cNvPr id="7" name="TextBox 6"/>
+          <p:cNvPr id="8" name="TextBox 7"/>
           <p:cNvSpPr txBox="1"/>
           <p:nvPr/>
         </p:nvSpPr>
@@ -4089,7 +4188,7 @@
       </p:sp>
       <p:sp>
         <p:nvSpPr>
-          <p:cNvPr id="8" name="TextBox 7"/>
+          <p:cNvPr id="9" name="TextBox 8"/>
           <p:cNvSpPr txBox="1"/>
           <p:nvPr/>
         </p:nvSpPr>
@@ -4157,7 +4256,7 @@
       </p:sp>
       <p:sp>
         <p:nvSpPr>
-          <p:cNvPr id="9" name="TextBox 8"/>
+          <p:cNvPr id="10" name="TextBox 9"/>
           <p:cNvSpPr txBox="1"/>
           <p:nvPr/>
         </p:nvSpPr>
@@ -4203,7 +4302,7 @@
       </p:sp>
       <p:sp>
         <p:nvSpPr>
-          <p:cNvPr id="10" name="TextBox 9"/>
+          <p:cNvPr id="11" name="TextBox 10"/>
           <p:cNvSpPr txBox="1"/>
           <p:nvPr/>
         </p:nvSpPr>
@@ -4249,7 +4348,7 @@
       </p:sp>
       <p:sp>
         <p:nvSpPr>
-          <p:cNvPr id="11" name="TextBox 10"/>
+          <p:cNvPr id="12" name="TextBox 11"/>
           <p:cNvSpPr txBox="1"/>
           <p:nvPr/>
         </p:nvSpPr>
@@ -4295,7 +4394,7 @@
       </p:sp>
       <p:sp>
         <p:nvSpPr>
-          <p:cNvPr id="12" name="TextBox 11"/>
+          <p:cNvPr id="13" name="TextBox 12"/>
           <p:cNvSpPr txBox="1"/>
           <p:nvPr/>
         </p:nvSpPr>
@@ -7902,6 +8001,3573 @@
     <p:bg>
       <p:bgPr>
         <a:solidFill>
+          <a:srgbClr val="E8EDF3"/>
+        </a:solidFill>
+        <a:effectLst/>
+      </p:bgPr>
+    </p:bg>
+    <p:spTree>
+      <p:nvGrpSpPr>
+        <p:cNvPr id="1" name=""/>
+        <p:cNvGrpSpPr/>
+        <p:nvPr/>
+      </p:nvGrpSpPr>
+      <p:grpSpPr/>
+      <p:pic>
+        <p:nvPicPr>
+          <p:cNvPr id="2" name="Ночная Тула — совместная команда" descr="night-tula-team.jpg"/>
+          <p:cNvPicPr>
+            <a:picLocks noChangeAspect="1"/>
+          </p:cNvPicPr>
+          <p:nvPr/>
+        </p:nvPicPr>
+        <p:blipFill>
+          <a:blip r:embed="rId2"/>
+          <a:srcRect t="12290" b="10290"/>
+          <a:stretch>
+            <a:fillRect/>
+          </a:stretch>
+        </p:blipFill>
+        <p:spPr>
+          <a:xfrm>
+            <a:off x="8255000" y="0"/>
+            <a:ext cx="3937000" cy="2286000"/>
+          </a:xfrm>
+          <a:prstGeom prst="rect">
+            <a:avLst/>
+          </a:prstGeom>
+          <a:effectLst/>
+        </p:spPr>
+      </p:pic>
+      <p:pic>
+        <p:nvPicPr>
+          <p:cNvPr id="3" name="Ночная Тула — участники на дистанции" descr="night-tula-runners-portrait.jpg"/>
+          <p:cNvPicPr>
+            <a:picLocks noChangeAspect="1"/>
+          </p:cNvPicPr>
+          <p:nvPr/>
+        </p:nvPicPr>
+        <p:blipFill>
+          <a:blip r:embed="rId3"/>
+          <a:srcRect t="22653" b="38653"/>
+          <a:stretch>
+            <a:fillRect/>
+          </a:stretch>
+        </p:blipFill>
+        <p:spPr>
+          <a:xfrm>
+            <a:off x="8255000" y="2286000"/>
+            <a:ext cx="3937000" cy="2286000"/>
+          </a:xfrm>
+          <a:prstGeom prst="rect">
+            <a:avLst/>
+          </a:prstGeom>
+          <a:effectLst/>
+        </p:spPr>
+      </p:pic>
+      <p:pic>
+        <p:nvPicPr>
+          <p:cNvPr id="4" name="Ночная Тула — забег у кремля" descr="night-tula-runners-wide.jpg"/>
+          <p:cNvPicPr>
+            <a:picLocks noChangeAspect="1"/>
+          </p:cNvPicPr>
+          <p:nvPr/>
+        </p:nvPicPr>
+        <p:blipFill>
+          <a:blip r:embed="rId4"/>
+          <a:srcRect t="5435" b="7435"/>
+          <a:stretch>
+            <a:fillRect/>
+          </a:stretch>
+        </p:blipFill>
+        <p:spPr>
+          <a:xfrm>
+            <a:off x="8255000" y="4572000"/>
+            <a:ext cx="3937000" cy="2286000"/>
+          </a:xfrm>
+          <a:prstGeom prst="rect">
+            <a:avLst/>
+          </a:prstGeom>
+          <a:effectLst/>
+        </p:spPr>
+      </p:pic>
+      <p:sp>
+        <p:nvSpPr>
+          <p:cNvPr id="5" name="Rectangle 4"/>
+          <p:cNvSpPr/>
+          <p:nvPr/>
+        </p:nvSpPr>
+        <p:spPr>
+          <a:xfrm>
+            <a:off x="0" y="0"/>
+            <a:ext cx="12192000" cy="6858000"/>
+          </a:xfrm>
+          <a:custGeom>
+            <a:avLst/>
+            <a:gdLst/>
+            <a:ahLst/>
+            <a:cxnLst/>
+            <a:rect l="l" t="t" r="r" b="b"/>
+            <a:pathLst>
+              <a:path w="960000" h="540000" stroke="false">
+                <a:moveTo>
+                  <a:pt x="0" y="0"/>
+                </a:moveTo>
+                <a:lnTo>
+                  <a:pt x="780360" y="0"/>
+                </a:lnTo>
+                <a:cubicBezTo>
+                  <a:pt x="700930" y="78800"/>
+                  <a:pt x="655250" y="171180"/>
+                  <a:pt x="655250" y="270000"/>
+                </a:cubicBezTo>
+                <a:cubicBezTo>
+                  <a:pt x="655250" y="368820"/>
+                  <a:pt x="700930" y="461200"/>
+                  <a:pt x="780360" y="540000"/>
+                </a:cubicBezTo>
+                <a:lnTo>
+                  <a:pt x="0" y="540000"/>
+                </a:lnTo>
+                <a:close/>
+              </a:path>
+            </a:pathLst>
+          </a:custGeom>
+          <a:solidFill>
+            <a:srgbClr val="0F3067"/>
+          </a:solidFill>
+          <a:ln>
+            <a:noFill/>
+          </a:ln>
+          <a:effectLst/>
+        </p:spPr>
+        <p:style>
+          <a:lnRef idx="1">
+            <a:schemeClr val="accent1"/>
+          </a:lnRef>
+          <a:fillRef idx="3">
+            <a:schemeClr val="accent1"/>
+          </a:fillRef>
+          <a:effectRef idx="0">
+            <a:schemeClr val="accent1"/>
+          </a:effectRef>
+          <a:fontRef idx="minor">
+            <a:schemeClr val="lt1"/>
+          </a:fontRef>
+        </p:style>
+        <p:txBody>
+          <a:bodyPr rtlCol="0" anchor="ctr"/>
+          <a:lstStyle/>
+          <a:p>
+            <a:pPr algn="ctr"/>
+          </a:p>
+        </p:txBody>
+      </p:sp>
+      <p:pic>
+        <p:nvPicPr>
+          <p:cNvPr id="6" name="Логотип из предоставленного образца" descr="logo_navy.png"/>
+          <p:cNvPicPr>
+            <a:picLocks noChangeAspect="1"/>
+          </p:cNvPicPr>
+          <p:nvPr/>
+        </p:nvPicPr>
+        <p:blipFill>
+          <a:blip r:embed="rId5"/>
+          <a:stretch>
+            <a:fillRect/>
+          </a:stretch>
+        </p:blipFill>
+        <p:spPr>
+          <a:xfrm>
+            <a:off x="355600" y="279400"/>
+            <a:ext cx="2387600" cy="660400"/>
+          </a:xfrm>
+          <a:prstGeom prst="rect">
+            <a:avLst/>
+          </a:prstGeom>
+          <a:effectLst/>
+        </p:spPr>
+      </p:pic>
+      <p:sp>
+        <p:nvSpPr>
+          <p:cNvPr id="7" name="TextBox 6"/>
+          <p:cNvSpPr txBox="1"/>
+          <p:nvPr/>
+        </p:nvSpPr>
+        <p:spPr>
+          <a:xfrm>
+            <a:off x="469900" y="1041400"/>
+            <a:ext cx="7759700" cy="1003300"/>
+          </a:xfrm>
+          <a:prstGeom prst="rect">
+            <a:avLst/>
+          </a:prstGeom>
+          <a:noFill/>
+          <a:effectLst/>
+        </p:spPr>
+        <p:txBody>
+          <a:bodyPr wrap="square" lIns="0" rIns="0" tIns="0" bIns="0" anchor="t">
+            <a:spAutoFit/>
+          </a:bodyPr>
+          <a:lstStyle/>
+          <a:p>
+            <a:pPr algn="l">
+              <a:lnSpc>
+                <a:spcPts val="2400"/>
+              </a:lnSpc>
+              <a:spcBef>
+                <a:spcPts val="0"/>
+              </a:spcBef>
+              <a:spcAft>
+                <a:spcPts val="0"/>
+              </a:spcAft>
+            </a:pPr>
+            <a:r>
+              <a:rPr sz="2000" b="1" i="0" lang="ru-RU">
+                <a:solidFill>
+                  <a:srgbClr val="FFFFFF"/>
+                </a:solidFill>
+                <a:latin typeface="Verdana"/>
+              </a:rPr>
+              <a:t>МЕРОПРИЯТИЯ СОВЕТА МОЛОДЫХ</a:t>
+            </a:r>
+          </a:p>
+          <a:p>
+            <a:pPr algn="l">
+              <a:lnSpc>
+                <a:spcPts val="2400"/>
+              </a:lnSpc>
+              <a:spcBef>
+                <a:spcPts val="0"/>
+              </a:spcBef>
+              <a:spcAft>
+                <a:spcPts val="0"/>
+              </a:spcAft>
+            </a:pPr>
+            <a:r>
+              <a:rPr sz="2000" b="1" i="0" lang="ru-RU">
+                <a:solidFill>
+                  <a:srgbClr val="FFFFFF"/>
+                </a:solidFill>
+                <a:latin typeface="Verdana"/>
+              </a:rPr>
+              <a:t>СПЕЦИАЛИСТОВ, РЕАЛИЗОВАННЫЕ В III</a:t>
+            </a:r>
+          </a:p>
+          <a:p>
+            <a:pPr algn="l">
+              <a:lnSpc>
+                <a:spcPts val="2400"/>
+              </a:lnSpc>
+              <a:spcBef>
+                <a:spcPts val="0"/>
+              </a:spcBef>
+              <a:spcAft>
+                <a:spcPts val="0"/>
+              </a:spcAft>
+            </a:pPr>
+            <a:r>
+              <a:rPr sz="2000" b="1" i="0" lang="ru-RU">
+                <a:solidFill>
+                  <a:srgbClr val="FFFFFF"/>
+                </a:solidFill>
+                <a:latin typeface="Verdana"/>
+              </a:rPr>
+              <a:t>КВАРТАЛЕ 2026 ГОДА</a:t>
+            </a:r>
+          </a:p>
+        </p:txBody>
+      </p:sp>
+      <p:sp>
+        <p:nvSpPr>
+          <p:cNvPr id="8" name="Oval 7"/>
+          <p:cNvSpPr/>
+          <p:nvPr/>
+        </p:nvSpPr>
+        <p:spPr>
+          <a:xfrm>
+            <a:off x="558800" y="2667000"/>
+            <a:ext cx="431800" cy="431800"/>
+          </a:xfrm>
+          <a:prstGeom prst="ellipse">
+            <a:avLst/>
+          </a:prstGeom>
+          <a:noFill/>
+          <a:ln w="7620">
+            <a:solidFill>
+              <a:srgbClr val="FFFFFF"/>
+            </a:solidFill>
+          </a:ln>
+          <a:effectLst/>
+        </p:spPr>
+        <p:style>
+          <a:lnRef idx="1">
+            <a:schemeClr val="accent1"/>
+          </a:lnRef>
+          <a:fillRef idx="3">
+            <a:schemeClr val="accent1"/>
+          </a:fillRef>
+          <a:effectRef idx="0">
+            <a:schemeClr val="accent1"/>
+          </a:effectRef>
+          <a:fontRef idx="minor">
+            <a:schemeClr val="lt1"/>
+          </a:fontRef>
+        </p:style>
+        <p:txBody>
+          <a:bodyPr rtlCol="0" anchor="ctr"/>
+          <a:lstStyle/>
+          <a:p>
+            <a:pPr algn="ctr"/>
+          </a:p>
+        </p:txBody>
+      </p:sp>
+      <p:sp>
+        <p:nvSpPr>
+          <p:cNvPr id="9" name="Rectangle 8"/>
+          <p:cNvSpPr/>
+          <p:nvPr/>
+        </p:nvSpPr>
+        <p:spPr>
+          <a:xfrm rot="16200000">
+            <a:off x="917702" y="2879090"/>
+            <a:ext cx="7620" cy="64769"/>
+          </a:xfrm>
+          <a:prstGeom prst="rect">
+            <a:avLst/>
+          </a:prstGeom>
+          <a:solidFill>
+            <a:srgbClr val="FFFFFF"/>
+          </a:solidFill>
+          <a:ln>
+            <a:noFill/>
+          </a:ln>
+          <a:effectLst/>
+        </p:spPr>
+        <p:style>
+          <a:lnRef idx="1">
+            <a:schemeClr val="accent1"/>
+          </a:lnRef>
+          <a:fillRef idx="3">
+            <a:schemeClr val="accent1"/>
+          </a:fillRef>
+          <a:effectRef idx="0">
+            <a:schemeClr val="accent1"/>
+          </a:effectRef>
+          <a:fontRef idx="minor">
+            <a:schemeClr val="lt1"/>
+          </a:fontRef>
+        </p:style>
+        <p:txBody>
+          <a:bodyPr rtlCol="0" anchor="ctr"/>
+          <a:lstStyle/>
+          <a:p>
+            <a:pPr algn="ctr"/>
+          </a:p>
+        </p:txBody>
+      </p:sp>
+      <p:sp>
+        <p:nvSpPr>
+          <p:cNvPr id="10" name="Rectangle 9"/>
+          <p:cNvSpPr/>
+          <p:nvPr/>
+        </p:nvSpPr>
+        <p:spPr>
+          <a:xfrm rot="18900000">
+            <a:off x="874701" y="2982901"/>
+            <a:ext cx="7620" cy="64769"/>
+          </a:xfrm>
+          <a:prstGeom prst="rect">
+            <a:avLst/>
+          </a:prstGeom>
+          <a:solidFill>
+            <a:srgbClr val="FFFFFF"/>
+          </a:solidFill>
+          <a:ln>
+            <a:noFill/>
+          </a:ln>
+          <a:effectLst/>
+        </p:spPr>
+        <p:style>
+          <a:lnRef idx="1">
+            <a:schemeClr val="accent1"/>
+          </a:lnRef>
+          <a:fillRef idx="3">
+            <a:schemeClr val="accent1"/>
+          </a:fillRef>
+          <a:effectRef idx="0">
+            <a:schemeClr val="accent1"/>
+          </a:effectRef>
+          <a:fontRef idx="minor">
+            <a:schemeClr val="lt1"/>
+          </a:fontRef>
+        </p:style>
+        <p:txBody>
+          <a:bodyPr rtlCol="0" anchor="ctr"/>
+          <a:lstStyle/>
+          <a:p>
+            <a:pPr algn="ctr"/>
+          </a:p>
+        </p:txBody>
+      </p:sp>
+      <p:sp>
+        <p:nvSpPr>
+          <p:cNvPr id="11" name="Rectangle 10"/>
+          <p:cNvSpPr/>
+          <p:nvPr/>
+        </p:nvSpPr>
+        <p:spPr>
+          <a:xfrm>
+            <a:off x="770890" y="3025902"/>
+            <a:ext cx="7620" cy="64769"/>
+          </a:xfrm>
+          <a:prstGeom prst="rect">
+            <a:avLst/>
+          </a:prstGeom>
+          <a:solidFill>
+            <a:srgbClr val="FFFFFF"/>
+          </a:solidFill>
+          <a:ln>
+            <a:noFill/>
+          </a:ln>
+          <a:effectLst/>
+        </p:spPr>
+        <p:style>
+          <a:lnRef idx="1">
+            <a:schemeClr val="accent1"/>
+          </a:lnRef>
+          <a:fillRef idx="3">
+            <a:schemeClr val="accent1"/>
+          </a:fillRef>
+          <a:effectRef idx="0">
+            <a:schemeClr val="accent1"/>
+          </a:effectRef>
+          <a:fontRef idx="minor">
+            <a:schemeClr val="lt1"/>
+          </a:fontRef>
+        </p:style>
+        <p:txBody>
+          <a:bodyPr rtlCol="0" anchor="ctr"/>
+          <a:lstStyle/>
+          <a:p>
+            <a:pPr algn="ctr"/>
+          </a:p>
+        </p:txBody>
+      </p:sp>
+      <p:sp>
+        <p:nvSpPr>
+          <p:cNvPr id="12" name="Rectangle 11"/>
+          <p:cNvSpPr/>
+          <p:nvPr/>
+        </p:nvSpPr>
+        <p:spPr>
+          <a:xfrm rot="2700000">
+            <a:off x="667078" y="2982901"/>
+            <a:ext cx="7620" cy="64769"/>
+          </a:xfrm>
+          <a:prstGeom prst="rect">
+            <a:avLst/>
+          </a:prstGeom>
+          <a:solidFill>
+            <a:srgbClr val="FFFFFF"/>
+          </a:solidFill>
+          <a:ln>
+            <a:noFill/>
+          </a:ln>
+          <a:effectLst/>
+        </p:spPr>
+        <p:style>
+          <a:lnRef idx="1">
+            <a:schemeClr val="accent1"/>
+          </a:lnRef>
+          <a:fillRef idx="3">
+            <a:schemeClr val="accent1"/>
+          </a:fillRef>
+          <a:effectRef idx="0">
+            <a:schemeClr val="accent1"/>
+          </a:effectRef>
+          <a:fontRef idx="minor">
+            <a:schemeClr val="lt1"/>
+          </a:fontRef>
+        </p:style>
+        <p:txBody>
+          <a:bodyPr rtlCol="0" anchor="ctr"/>
+          <a:lstStyle/>
+          <a:p>
+            <a:pPr algn="ctr"/>
+          </a:p>
+        </p:txBody>
+      </p:sp>
+      <p:sp>
+        <p:nvSpPr>
+          <p:cNvPr id="13" name="Rectangle 12"/>
+          <p:cNvSpPr/>
+          <p:nvPr/>
+        </p:nvSpPr>
+        <p:spPr>
+          <a:xfrm rot="5400000">
+            <a:off x="624078" y="2879090"/>
+            <a:ext cx="7620" cy="64769"/>
+          </a:xfrm>
+          <a:prstGeom prst="rect">
+            <a:avLst/>
+          </a:prstGeom>
+          <a:solidFill>
+            <a:srgbClr val="FFFFFF"/>
+          </a:solidFill>
+          <a:ln>
+            <a:noFill/>
+          </a:ln>
+          <a:effectLst/>
+        </p:spPr>
+        <p:style>
+          <a:lnRef idx="1">
+            <a:schemeClr val="accent1"/>
+          </a:lnRef>
+          <a:fillRef idx="3">
+            <a:schemeClr val="accent1"/>
+          </a:fillRef>
+          <a:effectRef idx="0">
+            <a:schemeClr val="accent1"/>
+          </a:effectRef>
+          <a:fontRef idx="minor">
+            <a:schemeClr val="lt1"/>
+          </a:fontRef>
+        </p:style>
+        <p:txBody>
+          <a:bodyPr rtlCol="0" anchor="ctr"/>
+          <a:lstStyle/>
+          <a:p>
+            <a:pPr algn="ctr"/>
+          </a:p>
+        </p:txBody>
+      </p:sp>
+      <p:sp>
+        <p:nvSpPr>
+          <p:cNvPr id="14" name="Rectangle 13"/>
+          <p:cNvSpPr/>
+          <p:nvPr/>
+        </p:nvSpPr>
+        <p:spPr>
+          <a:xfrm rot="8100000">
+            <a:off x="667078" y="2775278"/>
+            <a:ext cx="7620" cy="64769"/>
+          </a:xfrm>
+          <a:prstGeom prst="rect">
+            <a:avLst/>
+          </a:prstGeom>
+          <a:solidFill>
+            <a:srgbClr val="FFFFFF"/>
+          </a:solidFill>
+          <a:ln>
+            <a:noFill/>
+          </a:ln>
+          <a:effectLst/>
+        </p:spPr>
+        <p:style>
+          <a:lnRef idx="1">
+            <a:schemeClr val="accent1"/>
+          </a:lnRef>
+          <a:fillRef idx="3">
+            <a:schemeClr val="accent1"/>
+          </a:fillRef>
+          <a:effectRef idx="0">
+            <a:schemeClr val="accent1"/>
+          </a:effectRef>
+          <a:fontRef idx="minor">
+            <a:schemeClr val="lt1"/>
+          </a:fontRef>
+        </p:style>
+        <p:txBody>
+          <a:bodyPr rtlCol="0" anchor="ctr"/>
+          <a:lstStyle/>
+          <a:p>
+            <a:pPr algn="ctr"/>
+          </a:p>
+        </p:txBody>
+      </p:sp>
+      <p:sp>
+        <p:nvSpPr>
+          <p:cNvPr id="15" name="Rectangle 14"/>
+          <p:cNvSpPr/>
+          <p:nvPr/>
+        </p:nvSpPr>
+        <p:spPr>
+          <a:xfrm rot="10800000">
+            <a:off x="770890" y="2732278"/>
+            <a:ext cx="7620" cy="64769"/>
+          </a:xfrm>
+          <a:prstGeom prst="rect">
+            <a:avLst/>
+          </a:prstGeom>
+          <a:solidFill>
+            <a:srgbClr val="FFFFFF"/>
+          </a:solidFill>
+          <a:ln>
+            <a:noFill/>
+          </a:ln>
+          <a:effectLst/>
+        </p:spPr>
+        <p:style>
+          <a:lnRef idx="1">
+            <a:schemeClr val="accent1"/>
+          </a:lnRef>
+          <a:fillRef idx="3">
+            <a:schemeClr val="accent1"/>
+          </a:fillRef>
+          <a:effectRef idx="0">
+            <a:schemeClr val="accent1"/>
+          </a:effectRef>
+          <a:fontRef idx="minor">
+            <a:schemeClr val="lt1"/>
+          </a:fontRef>
+        </p:style>
+        <p:txBody>
+          <a:bodyPr rtlCol="0" anchor="ctr"/>
+          <a:lstStyle/>
+          <a:p>
+            <a:pPr algn="ctr"/>
+          </a:p>
+        </p:txBody>
+      </p:sp>
+      <p:sp>
+        <p:nvSpPr>
+          <p:cNvPr id="16" name="Rectangle 15"/>
+          <p:cNvSpPr/>
+          <p:nvPr/>
+        </p:nvSpPr>
+        <p:spPr>
+          <a:xfrm rot="13500000">
+            <a:off x="874701" y="2775278"/>
+            <a:ext cx="7620" cy="64769"/>
+          </a:xfrm>
+          <a:prstGeom prst="rect">
+            <a:avLst/>
+          </a:prstGeom>
+          <a:solidFill>
+            <a:srgbClr val="FFFFFF"/>
+          </a:solidFill>
+          <a:ln>
+            <a:noFill/>
+          </a:ln>
+          <a:effectLst/>
+        </p:spPr>
+        <p:style>
+          <a:lnRef idx="1">
+            <a:schemeClr val="accent1"/>
+          </a:lnRef>
+          <a:fillRef idx="3">
+            <a:schemeClr val="accent1"/>
+          </a:fillRef>
+          <a:effectRef idx="0">
+            <a:schemeClr val="accent1"/>
+          </a:effectRef>
+          <a:fontRef idx="minor">
+            <a:schemeClr val="lt1"/>
+          </a:fontRef>
+        </p:style>
+        <p:txBody>
+          <a:bodyPr rtlCol="0" anchor="ctr"/>
+          <a:lstStyle/>
+          <a:p>
+            <a:pPr algn="ctr"/>
+          </a:p>
+        </p:txBody>
+      </p:sp>
+      <p:sp>
+        <p:nvSpPr>
+          <p:cNvPr id="17" name="Oval 16"/>
+          <p:cNvSpPr/>
+          <p:nvPr/>
+        </p:nvSpPr>
+        <p:spPr>
+          <a:xfrm>
+            <a:off x="762000" y="2870200"/>
+            <a:ext cx="25400" cy="25400"/>
+          </a:xfrm>
+          <a:prstGeom prst="ellipse">
+            <a:avLst/>
+          </a:prstGeom>
+          <a:solidFill>
+            <a:srgbClr val="FFFFFF"/>
+          </a:solidFill>
+          <a:ln>
+            <a:noFill/>
+          </a:ln>
+          <a:effectLst/>
+        </p:spPr>
+        <p:style>
+          <a:lnRef idx="1">
+            <a:schemeClr val="accent1"/>
+          </a:lnRef>
+          <a:fillRef idx="3">
+            <a:schemeClr val="accent1"/>
+          </a:fillRef>
+          <a:effectRef idx="0">
+            <a:schemeClr val="accent1"/>
+          </a:effectRef>
+          <a:fontRef idx="minor">
+            <a:schemeClr val="lt1"/>
+          </a:fontRef>
+        </p:style>
+        <p:txBody>
+          <a:bodyPr rtlCol="0" anchor="ctr"/>
+          <a:lstStyle/>
+          <a:p>
+            <a:pPr algn="ctr"/>
+          </a:p>
+        </p:txBody>
+      </p:sp>
+      <p:sp>
+        <p:nvSpPr>
+          <p:cNvPr id="18" name="TextBox 17"/>
+          <p:cNvSpPr txBox="1"/>
+          <p:nvPr/>
+        </p:nvSpPr>
+        <p:spPr>
+          <a:xfrm>
+            <a:off x="1397000" y="2603500"/>
+            <a:ext cx="6718300" cy="304800"/>
+          </a:xfrm>
+          <a:prstGeom prst="rect">
+            <a:avLst/>
+          </a:prstGeom>
+          <a:noFill/>
+          <a:effectLst/>
+        </p:spPr>
+        <p:txBody>
+          <a:bodyPr wrap="square" lIns="0" rIns="0" tIns="0" bIns="0" anchor="t">
+            <a:spAutoFit/>
+          </a:bodyPr>
+          <a:lstStyle/>
+          <a:p>
+            <a:pPr algn="l">
+              <a:lnSpc>
+                <a:spcPts val="1920"/>
+              </a:lnSpc>
+              <a:spcBef>
+                <a:spcPts val="0"/>
+              </a:spcBef>
+              <a:spcAft>
+                <a:spcPts val="0"/>
+              </a:spcAft>
+            </a:pPr>
+            <a:r>
+              <a:rPr sz="1600" b="1" i="0" lang="ru-RU">
+                <a:solidFill>
+                  <a:srgbClr val="FF0000"/>
+                </a:solidFill>
+                <a:latin typeface="Verdana"/>
+              </a:rPr>
+              <a:t>Название мероприятия:</a:t>
+            </a:r>
+          </a:p>
+        </p:txBody>
+      </p:sp>
+      <p:sp>
+        <p:nvSpPr>
+          <p:cNvPr id="19" name="TextBox 18"/>
+          <p:cNvSpPr txBox="1"/>
+          <p:nvPr/>
+        </p:nvSpPr>
+        <p:spPr>
+          <a:xfrm>
+            <a:off x="1397000" y="2882900"/>
+            <a:ext cx="6718300" cy="203200"/>
+          </a:xfrm>
+          <a:prstGeom prst="rect">
+            <a:avLst/>
+          </a:prstGeom>
+          <a:noFill/>
+          <a:effectLst/>
+        </p:spPr>
+        <p:txBody>
+          <a:bodyPr wrap="square" lIns="0" rIns="0" tIns="0" bIns="0" anchor="t">
+            <a:spAutoFit/>
+          </a:bodyPr>
+          <a:lstStyle/>
+          <a:p>
+            <a:pPr algn="l">
+              <a:lnSpc>
+                <a:spcPts val="1440"/>
+              </a:lnSpc>
+              <a:spcBef>
+                <a:spcPts val="0"/>
+              </a:spcBef>
+              <a:spcAft>
+                <a:spcPts val="0"/>
+              </a:spcAft>
+            </a:pPr>
+            <a:r>
+              <a:rPr sz="1200" b="0" i="1" lang="ru-RU">
+                <a:solidFill>
+                  <a:srgbClr val="FFFFFF"/>
+                </a:solidFill>
+                <a:latin typeface="Verdana"/>
+              </a:rPr>
+              <a:t>Забег «Ночная Тула»</a:t>
+            </a:r>
+          </a:p>
+        </p:txBody>
+      </p:sp>
+      <p:sp>
+        <p:nvSpPr>
+          <p:cNvPr id="20" name="Oval 19"/>
+          <p:cNvSpPr/>
+          <p:nvPr/>
+        </p:nvSpPr>
+        <p:spPr>
+          <a:xfrm>
+            <a:off x="558800" y="3276600"/>
+            <a:ext cx="431800" cy="431800"/>
+          </a:xfrm>
+          <a:prstGeom prst="ellipse">
+            <a:avLst/>
+          </a:prstGeom>
+          <a:noFill/>
+          <a:ln w="7620">
+            <a:solidFill>
+              <a:srgbClr val="FFFFFF"/>
+            </a:solidFill>
+          </a:ln>
+          <a:effectLst/>
+        </p:spPr>
+        <p:style>
+          <a:lnRef idx="1">
+            <a:schemeClr val="accent1"/>
+          </a:lnRef>
+          <a:fillRef idx="3">
+            <a:schemeClr val="accent1"/>
+          </a:fillRef>
+          <a:effectRef idx="0">
+            <a:schemeClr val="accent1"/>
+          </a:effectRef>
+          <a:fontRef idx="minor">
+            <a:schemeClr val="lt1"/>
+          </a:fontRef>
+        </p:style>
+        <p:txBody>
+          <a:bodyPr rtlCol="0" anchor="ctr"/>
+          <a:lstStyle/>
+          <a:p>
+            <a:pPr algn="ctr"/>
+          </a:p>
+        </p:txBody>
+      </p:sp>
+      <p:sp>
+        <p:nvSpPr>
+          <p:cNvPr id="21" name="Rectangle 20"/>
+          <p:cNvSpPr/>
+          <p:nvPr/>
+        </p:nvSpPr>
+        <p:spPr>
+          <a:xfrm rot="16200000">
+            <a:off x="917702" y="3488690"/>
+            <a:ext cx="7620" cy="64769"/>
+          </a:xfrm>
+          <a:prstGeom prst="rect">
+            <a:avLst/>
+          </a:prstGeom>
+          <a:solidFill>
+            <a:srgbClr val="FFFFFF"/>
+          </a:solidFill>
+          <a:ln>
+            <a:noFill/>
+          </a:ln>
+          <a:effectLst/>
+        </p:spPr>
+        <p:style>
+          <a:lnRef idx="1">
+            <a:schemeClr val="accent1"/>
+          </a:lnRef>
+          <a:fillRef idx="3">
+            <a:schemeClr val="accent1"/>
+          </a:fillRef>
+          <a:effectRef idx="0">
+            <a:schemeClr val="accent1"/>
+          </a:effectRef>
+          <a:fontRef idx="minor">
+            <a:schemeClr val="lt1"/>
+          </a:fontRef>
+        </p:style>
+        <p:txBody>
+          <a:bodyPr rtlCol="0" anchor="ctr"/>
+          <a:lstStyle/>
+          <a:p>
+            <a:pPr algn="ctr"/>
+          </a:p>
+        </p:txBody>
+      </p:sp>
+      <p:sp>
+        <p:nvSpPr>
+          <p:cNvPr id="22" name="Rectangle 21"/>
+          <p:cNvSpPr/>
+          <p:nvPr/>
+        </p:nvSpPr>
+        <p:spPr>
+          <a:xfrm rot="18900000">
+            <a:off x="874701" y="3592501"/>
+            <a:ext cx="7620" cy="64769"/>
+          </a:xfrm>
+          <a:prstGeom prst="rect">
+            <a:avLst/>
+          </a:prstGeom>
+          <a:solidFill>
+            <a:srgbClr val="FFFFFF"/>
+          </a:solidFill>
+          <a:ln>
+            <a:noFill/>
+          </a:ln>
+          <a:effectLst/>
+        </p:spPr>
+        <p:style>
+          <a:lnRef idx="1">
+            <a:schemeClr val="accent1"/>
+          </a:lnRef>
+          <a:fillRef idx="3">
+            <a:schemeClr val="accent1"/>
+          </a:fillRef>
+          <a:effectRef idx="0">
+            <a:schemeClr val="accent1"/>
+          </a:effectRef>
+          <a:fontRef idx="minor">
+            <a:schemeClr val="lt1"/>
+          </a:fontRef>
+        </p:style>
+        <p:txBody>
+          <a:bodyPr rtlCol="0" anchor="ctr"/>
+          <a:lstStyle/>
+          <a:p>
+            <a:pPr algn="ctr"/>
+          </a:p>
+        </p:txBody>
+      </p:sp>
+      <p:sp>
+        <p:nvSpPr>
+          <p:cNvPr id="23" name="Rectangle 22"/>
+          <p:cNvSpPr/>
+          <p:nvPr/>
+        </p:nvSpPr>
+        <p:spPr>
+          <a:xfrm>
+            <a:off x="770890" y="3635502"/>
+            <a:ext cx="7620" cy="64769"/>
+          </a:xfrm>
+          <a:prstGeom prst="rect">
+            <a:avLst/>
+          </a:prstGeom>
+          <a:solidFill>
+            <a:srgbClr val="FFFFFF"/>
+          </a:solidFill>
+          <a:ln>
+            <a:noFill/>
+          </a:ln>
+          <a:effectLst/>
+        </p:spPr>
+        <p:style>
+          <a:lnRef idx="1">
+            <a:schemeClr val="accent1"/>
+          </a:lnRef>
+          <a:fillRef idx="3">
+            <a:schemeClr val="accent1"/>
+          </a:fillRef>
+          <a:effectRef idx="0">
+            <a:schemeClr val="accent1"/>
+          </a:effectRef>
+          <a:fontRef idx="minor">
+            <a:schemeClr val="lt1"/>
+          </a:fontRef>
+        </p:style>
+        <p:txBody>
+          <a:bodyPr rtlCol="0" anchor="ctr"/>
+          <a:lstStyle/>
+          <a:p>
+            <a:pPr algn="ctr"/>
+          </a:p>
+        </p:txBody>
+      </p:sp>
+      <p:sp>
+        <p:nvSpPr>
+          <p:cNvPr id="24" name="Rectangle 23"/>
+          <p:cNvSpPr/>
+          <p:nvPr/>
+        </p:nvSpPr>
+        <p:spPr>
+          <a:xfrm rot="2700000">
+            <a:off x="667078" y="3592501"/>
+            <a:ext cx="7620" cy="64769"/>
+          </a:xfrm>
+          <a:prstGeom prst="rect">
+            <a:avLst/>
+          </a:prstGeom>
+          <a:solidFill>
+            <a:srgbClr val="FFFFFF"/>
+          </a:solidFill>
+          <a:ln>
+            <a:noFill/>
+          </a:ln>
+          <a:effectLst/>
+        </p:spPr>
+        <p:style>
+          <a:lnRef idx="1">
+            <a:schemeClr val="accent1"/>
+          </a:lnRef>
+          <a:fillRef idx="3">
+            <a:schemeClr val="accent1"/>
+          </a:fillRef>
+          <a:effectRef idx="0">
+            <a:schemeClr val="accent1"/>
+          </a:effectRef>
+          <a:fontRef idx="minor">
+            <a:schemeClr val="lt1"/>
+          </a:fontRef>
+        </p:style>
+        <p:txBody>
+          <a:bodyPr rtlCol="0" anchor="ctr"/>
+          <a:lstStyle/>
+          <a:p>
+            <a:pPr algn="ctr"/>
+          </a:p>
+        </p:txBody>
+      </p:sp>
+      <p:sp>
+        <p:nvSpPr>
+          <p:cNvPr id="25" name="Rectangle 24"/>
+          <p:cNvSpPr/>
+          <p:nvPr/>
+        </p:nvSpPr>
+        <p:spPr>
+          <a:xfrm rot="5400000">
+            <a:off x="624078" y="3488690"/>
+            <a:ext cx="7620" cy="64769"/>
+          </a:xfrm>
+          <a:prstGeom prst="rect">
+            <a:avLst/>
+          </a:prstGeom>
+          <a:solidFill>
+            <a:srgbClr val="FFFFFF"/>
+          </a:solidFill>
+          <a:ln>
+            <a:noFill/>
+          </a:ln>
+          <a:effectLst/>
+        </p:spPr>
+        <p:style>
+          <a:lnRef idx="1">
+            <a:schemeClr val="accent1"/>
+          </a:lnRef>
+          <a:fillRef idx="3">
+            <a:schemeClr val="accent1"/>
+          </a:fillRef>
+          <a:effectRef idx="0">
+            <a:schemeClr val="accent1"/>
+          </a:effectRef>
+          <a:fontRef idx="minor">
+            <a:schemeClr val="lt1"/>
+          </a:fontRef>
+        </p:style>
+        <p:txBody>
+          <a:bodyPr rtlCol="0" anchor="ctr"/>
+          <a:lstStyle/>
+          <a:p>
+            <a:pPr algn="ctr"/>
+          </a:p>
+        </p:txBody>
+      </p:sp>
+      <p:sp>
+        <p:nvSpPr>
+          <p:cNvPr id="26" name="Rectangle 25"/>
+          <p:cNvSpPr/>
+          <p:nvPr/>
+        </p:nvSpPr>
+        <p:spPr>
+          <a:xfrm rot="8100000">
+            <a:off x="667078" y="3384878"/>
+            <a:ext cx="7620" cy="64769"/>
+          </a:xfrm>
+          <a:prstGeom prst="rect">
+            <a:avLst/>
+          </a:prstGeom>
+          <a:solidFill>
+            <a:srgbClr val="FFFFFF"/>
+          </a:solidFill>
+          <a:ln>
+            <a:noFill/>
+          </a:ln>
+          <a:effectLst/>
+        </p:spPr>
+        <p:style>
+          <a:lnRef idx="1">
+            <a:schemeClr val="accent1"/>
+          </a:lnRef>
+          <a:fillRef idx="3">
+            <a:schemeClr val="accent1"/>
+          </a:fillRef>
+          <a:effectRef idx="0">
+            <a:schemeClr val="accent1"/>
+          </a:effectRef>
+          <a:fontRef idx="minor">
+            <a:schemeClr val="lt1"/>
+          </a:fontRef>
+        </p:style>
+        <p:txBody>
+          <a:bodyPr rtlCol="0" anchor="ctr"/>
+          <a:lstStyle/>
+          <a:p>
+            <a:pPr algn="ctr"/>
+          </a:p>
+        </p:txBody>
+      </p:sp>
+      <p:sp>
+        <p:nvSpPr>
+          <p:cNvPr id="27" name="Rectangle 26"/>
+          <p:cNvSpPr/>
+          <p:nvPr/>
+        </p:nvSpPr>
+        <p:spPr>
+          <a:xfrm rot="10800000">
+            <a:off x="770890" y="3341878"/>
+            <a:ext cx="7620" cy="64769"/>
+          </a:xfrm>
+          <a:prstGeom prst="rect">
+            <a:avLst/>
+          </a:prstGeom>
+          <a:solidFill>
+            <a:srgbClr val="FFFFFF"/>
+          </a:solidFill>
+          <a:ln>
+            <a:noFill/>
+          </a:ln>
+          <a:effectLst/>
+        </p:spPr>
+        <p:style>
+          <a:lnRef idx="1">
+            <a:schemeClr val="accent1"/>
+          </a:lnRef>
+          <a:fillRef idx="3">
+            <a:schemeClr val="accent1"/>
+          </a:fillRef>
+          <a:effectRef idx="0">
+            <a:schemeClr val="accent1"/>
+          </a:effectRef>
+          <a:fontRef idx="minor">
+            <a:schemeClr val="lt1"/>
+          </a:fontRef>
+        </p:style>
+        <p:txBody>
+          <a:bodyPr rtlCol="0" anchor="ctr"/>
+          <a:lstStyle/>
+          <a:p>
+            <a:pPr algn="ctr"/>
+          </a:p>
+        </p:txBody>
+      </p:sp>
+      <p:sp>
+        <p:nvSpPr>
+          <p:cNvPr id="28" name="Rectangle 27"/>
+          <p:cNvSpPr/>
+          <p:nvPr/>
+        </p:nvSpPr>
+        <p:spPr>
+          <a:xfrm rot="13500000">
+            <a:off x="874701" y="3384878"/>
+            <a:ext cx="7620" cy="64769"/>
+          </a:xfrm>
+          <a:prstGeom prst="rect">
+            <a:avLst/>
+          </a:prstGeom>
+          <a:solidFill>
+            <a:srgbClr val="FFFFFF"/>
+          </a:solidFill>
+          <a:ln>
+            <a:noFill/>
+          </a:ln>
+          <a:effectLst/>
+        </p:spPr>
+        <p:style>
+          <a:lnRef idx="1">
+            <a:schemeClr val="accent1"/>
+          </a:lnRef>
+          <a:fillRef idx="3">
+            <a:schemeClr val="accent1"/>
+          </a:fillRef>
+          <a:effectRef idx="0">
+            <a:schemeClr val="accent1"/>
+          </a:effectRef>
+          <a:fontRef idx="minor">
+            <a:schemeClr val="lt1"/>
+          </a:fontRef>
+        </p:style>
+        <p:txBody>
+          <a:bodyPr rtlCol="0" anchor="ctr"/>
+          <a:lstStyle/>
+          <a:p>
+            <a:pPr algn="ctr"/>
+          </a:p>
+        </p:txBody>
+      </p:sp>
+      <p:sp>
+        <p:nvSpPr>
+          <p:cNvPr id="29" name="Oval 28"/>
+          <p:cNvSpPr/>
+          <p:nvPr/>
+        </p:nvSpPr>
+        <p:spPr>
+          <a:xfrm>
+            <a:off x="762000" y="3479800"/>
+            <a:ext cx="25400" cy="25400"/>
+          </a:xfrm>
+          <a:prstGeom prst="ellipse">
+            <a:avLst/>
+          </a:prstGeom>
+          <a:solidFill>
+            <a:srgbClr val="FFFFFF"/>
+          </a:solidFill>
+          <a:ln>
+            <a:noFill/>
+          </a:ln>
+          <a:effectLst/>
+        </p:spPr>
+        <p:style>
+          <a:lnRef idx="1">
+            <a:schemeClr val="accent1"/>
+          </a:lnRef>
+          <a:fillRef idx="3">
+            <a:schemeClr val="accent1"/>
+          </a:fillRef>
+          <a:effectRef idx="0">
+            <a:schemeClr val="accent1"/>
+          </a:effectRef>
+          <a:fontRef idx="minor">
+            <a:schemeClr val="lt1"/>
+          </a:fontRef>
+        </p:style>
+        <p:txBody>
+          <a:bodyPr rtlCol="0" anchor="ctr"/>
+          <a:lstStyle/>
+          <a:p>
+            <a:pPr algn="ctr"/>
+          </a:p>
+        </p:txBody>
+      </p:sp>
+      <p:sp>
+        <p:nvSpPr>
+          <p:cNvPr id="30" name="TextBox 29"/>
+          <p:cNvSpPr txBox="1"/>
+          <p:nvPr/>
+        </p:nvSpPr>
+        <p:spPr>
+          <a:xfrm>
+            <a:off x="1397000" y="3213100"/>
+            <a:ext cx="6718300" cy="304800"/>
+          </a:xfrm>
+          <a:prstGeom prst="rect">
+            <a:avLst/>
+          </a:prstGeom>
+          <a:noFill/>
+          <a:effectLst/>
+        </p:spPr>
+        <p:txBody>
+          <a:bodyPr wrap="square" lIns="0" rIns="0" tIns="0" bIns="0" anchor="t">
+            <a:spAutoFit/>
+          </a:bodyPr>
+          <a:lstStyle/>
+          <a:p>
+            <a:pPr algn="l">
+              <a:lnSpc>
+                <a:spcPts val="1920"/>
+              </a:lnSpc>
+              <a:spcBef>
+                <a:spcPts val="0"/>
+              </a:spcBef>
+              <a:spcAft>
+                <a:spcPts val="0"/>
+              </a:spcAft>
+            </a:pPr>
+            <a:r>
+              <a:rPr sz="1600" b="1" i="0" lang="ru-RU">
+                <a:solidFill>
+                  <a:srgbClr val="FF0000"/>
+                </a:solidFill>
+                <a:latin typeface="Verdana"/>
+              </a:rPr>
+              <a:t>Краткое описание:</a:t>
+            </a:r>
+          </a:p>
+        </p:txBody>
+      </p:sp>
+      <p:sp>
+        <p:nvSpPr>
+          <p:cNvPr id="31" name="TextBox 30"/>
+          <p:cNvSpPr txBox="1"/>
+          <p:nvPr/>
+        </p:nvSpPr>
+        <p:spPr>
+          <a:xfrm>
+            <a:off x="1397000" y="3492500"/>
+            <a:ext cx="6718300" cy="393700"/>
+          </a:xfrm>
+          <a:prstGeom prst="rect">
+            <a:avLst/>
+          </a:prstGeom>
+          <a:noFill/>
+          <a:effectLst/>
+        </p:spPr>
+        <p:txBody>
+          <a:bodyPr wrap="square" lIns="0" rIns="0" tIns="0" bIns="0" anchor="t">
+            <a:spAutoFit/>
+          </a:bodyPr>
+          <a:lstStyle/>
+          <a:p>
+            <a:pPr algn="l">
+              <a:lnSpc>
+                <a:spcPts val="1440"/>
+              </a:lnSpc>
+              <a:spcBef>
+                <a:spcPts val="0"/>
+              </a:spcBef>
+              <a:spcAft>
+                <a:spcPts val="0"/>
+              </a:spcAft>
+            </a:pPr>
+            <a:r>
+              <a:rPr sz="1200" b="0" i="1" lang="ru-RU">
+                <a:solidFill>
+                  <a:srgbClr val="FFFFFF"/>
+                </a:solidFill>
+                <a:latin typeface="Verdana"/>
+              </a:rPr>
+              <a:t>Участие сотрудников ЦКБА и «Высокоточных комплексов»</a:t>
+            </a:r>
+          </a:p>
+          <a:p>
+            <a:pPr algn="l">
+              <a:lnSpc>
+                <a:spcPts val="1440"/>
+              </a:lnSpc>
+              <a:spcBef>
+                <a:spcPts val="0"/>
+              </a:spcBef>
+              <a:spcAft>
+                <a:spcPts val="0"/>
+              </a:spcAft>
+            </a:pPr>
+            <a:r>
+              <a:rPr sz="1200" b="0" i="1" lang="ru-RU">
+                <a:solidFill>
+                  <a:srgbClr val="FFFFFF"/>
+                </a:solidFill>
+                <a:latin typeface="Verdana"/>
+              </a:rPr>
+              <a:t>в городском забеге «Ночная Тула» </a:t>
+            </a:r>
+            <a:r>
+              <a:rPr sz="1200" b="0" i="0" lang="ru-RU">
+                <a:solidFill>
+                  <a:srgbClr val="FFFFFF"/>
+                </a:solidFill>
+                <a:latin typeface="Verdana"/>
+              </a:rPr>
+              <a:t>18</a:t>
+            </a:r>
+            <a:r>
+              <a:rPr sz="1200" b="0" i="1" lang="ru-RU">
+                <a:solidFill>
+                  <a:srgbClr val="FFFFFF"/>
+                </a:solidFill>
+                <a:latin typeface="Verdana"/>
+              </a:rPr>
+              <a:t> июля 2026 года.</a:t>
+            </a:r>
+          </a:p>
+        </p:txBody>
+      </p:sp>
+      <p:sp>
+        <p:nvSpPr>
+          <p:cNvPr id="32" name="Oval 31"/>
+          <p:cNvSpPr/>
+          <p:nvPr/>
+        </p:nvSpPr>
+        <p:spPr>
+          <a:xfrm>
+            <a:off x="558800" y="4025900"/>
+            <a:ext cx="431800" cy="431800"/>
+          </a:xfrm>
+          <a:prstGeom prst="ellipse">
+            <a:avLst/>
+          </a:prstGeom>
+          <a:noFill/>
+          <a:ln w="7620">
+            <a:solidFill>
+              <a:srgbClr val="FFFFFF"/>
+            </a:solidFill>
+          </a:ln>
+          <a:effectLst/>
+        </p:spPr>
+        <p:style>
+          <a:lnRef idx="1">
+            <a:schemeClr val="accent1"/>
+          </a:lnRef>
+          <a:fillRef idx="3">
+            <a:schemeClr val="accent1"/>
+          </a:fillRef>
+          <a:effectRef idx="0">
+            <a:schemeClr val="accent1"/>
+          </a:effectRef>
+          <a:fontRef idx="minor">
+            <a:schemeClr val="lt1"/>
+          </a:fontRef>
+        </p:style>
+        <p:txBody>
+          <a:bodyPr rtlCol="0" anchor="ctr"/>
+          <a:lstStyle/>
+          <a:p>
+            <a:pPr algn="ctr"/>
+          </a:p>
+        </p:txBody>
+      </p:sp>
+      <p:sp>
+        <p:nvSpPr>
+          <p:cNvPr id="33" name="Rectangle 32"/>
+          <p:cNvSpPr/>
+          <p:nvPr/>
+        </p:nvSpPr>
+        <p:spPr>
+          <a:xfrm rot="16200000">
+            <a:off x="917702" y="4237990"/>
+            <a:ext cx="7620" cy="64769"/>
+          </a:xfrm>
+          <a:prstGeom prst="rect">
+            <a:avLst/>
+          </a:prstGeom>
+          <a:solidFill>
+            <a:srgbClr val="FFFFFF"/>
+          </a:solidFill>
+          <a:ln>
+            <a:noFill/>
+          </a:ln>
+          <a:effectLst/>
+        </p:spPr>
+        <p:style>
+          <a:lnRef idx="1">
+            <a:schemeClr val="accent1"/>
+          </a:lnRef>
+          <a:fillRef idx="3">
+            <a:schemeClr val="accent1"/>
+          </a:fillRef>
+          <a:effectRef idx="0">
+            <a:schemeClr val="accent1"/>
+          </a:effectRef>
+          <a:fontRef idx="minor">
+            <a:schemeClr val="lt1"/>
+          </a:fontRef>
+        </p:style>
+        <p:txBody>
+          <a:bodyPr rtlCol="0" anchor="ctr"/>
+          <a:lstStyle/>
+          <a:p>
+            <a:pPr algn="ctr"/>
+          </a:p>
+        </p:txBody>
+      </p:sp>
+      <p:sp>
+        <p:nvSpPr>
+          <p:cNvPr id="34" name="Rectangle 33"/>
+          <p:cNvSpPr/>
+          <p:nvPr/>
+        </p:nvSpPr>
+        <p:spPr>
+          <a:xfrm rot="18900000">
+            <a:off x="874701" y="4341801"/>
+            <a:ext cx="7620" cy="64769"/>
+          </a:xfrm>
+          <a:prstGeom prst="rect">
+            <a:avLst/>
+          </a:prstGeom>
+          <a:solidFill>
+            <a:srgbClr val="FFFFFF"/>
+          </a:solidFill>
+          <a:ln>
+            <a:noFill/>
+          </a:ln>
+          <a:effectLst/>
+        </p:spPr>
+        <p:style>
+          <a:lnRef idx="1">
+            <a:schemeClr val="accent1"/>
+          </a:lnRef>
+          <a:fillRef idx="3">
+            <a:schemeClr val="accent1"/>
+          </a:fillRef>
+          <a:effectRef idx="0">
+            <a:schemeClr val="accent1"/>
+          </a:effectRef>
+          <a:fontRef idx="minor">
+            <a:schemeClr val="lt1"/>
+          </a:fontRef>
+        </p:style>
+        <p:txBody>
+          <a:bodyPr rtlCol="0" anchor="ctr"/>
+          <a:lstStyle/>
+          <a:p>
+            <a:pPr algn="ctr"/>
+          </a:p>
+        </p:txBody>
+      </p:sp>
+      <p:sp>
+        <p:nvSpPr>
+          <p:cNvPr id="35" name="Rectangle 34"/>
+          <p:cNvSpPr/>
+          <p:nvPr/>
+        </p:nvSpPr>
+        <p:spPr>
+          <a:xfrm>
+            <a:off x="770890" y="4384802"/>
+            <a:ext cx="7620" cy="64769"/>
+          </a:xfrm>
+          <a:prstGeom prst="rect">
+            <a:avLst/>
+          </a:prstGeom>
+          <a:solidFill>
+            <a:srgbClr val="FFFFFF"/>
+          </a:solidFill>
+          <a:ln>
+            <a:noFill/>
+          </a:ln>
+          <a:effectLst/>
+        </p:spPr>
+        <p:style>
+          <a:lnRef idx="1">
+            <a:schemeClr val="accent1"/>
+          </a:lnRef>
+          <a:fillRef idx="3">
+            <a:schemeClr val="accent1"/>
+          </a:fillRef>
+          <a:effectRef idx="0">
+            <a:schemeClr val="accent1"/>
+          </a:effectRef>
+          <a:fontRef idx="minor">
+            <a:schemeClr val="lt1"/>
+          </a:fontRef>
+        </p:style>
+        <p:txBody>
+          <a:bodyPr rtlCol="0" anchor="ctr"/>
+          <a:lstStyle/>
+          <a:p>
+            <a:pPr algn="ctr"/>
+          </a:p>
+        </p:txBody>
+      </p:sp>
+      <p:sp>
+        <p:nvSpPr>
+          <p:cNvPr id="36" name="Rectangle 35"/>
+          <p:cNvSpPr/>
+          <p:nvPr/>
+        </p:nvSpPr>
+        <p:spPr>
+          <a:xfrm rot="2700000">
+            <a:off x="667078" y="4341801"/>
+            <a:ext cx="7620" cy="64769"/>
+          </a:xfrm>
+          <a:prstGeom prst="rect">
+            <a:avLst/>
+          </a:prstGeom>
+          <a:solidFill>
+            <a:srgbClr val="FFFFFF"/>
+          </a:solidFill>
+          <a:ln>
+            <a:noFill/>
+          </a:ln>
+          <a:effectLst/>
+        </p:spPr>
+        <p:style>
+          <a:lnRef idx="1">
+            <a:schemeClr val="accent1"/>
+          </a:lnRef>
+          <a:fillRef idx="3">
+            <a:schemeClr val="accent1"/>
+          </a:fillRef>
+          <a:effectRef idx="0">
+            <a:schemeClr val="accent1"/>
+          </a:effectRef>
+          <a:fontRef idx="minor">
+            <a:schemeClr val="lt1"/>
+          </a:fontRef>
+        </p:style>
+        <p:txBody>
+          <a:bodyPr rtlCol="0" anchor="ctr"/>
+          <a:lstStyle/>
+          <a:p>
+            <a:pPr algn="ctr"/>
+          </a:p>
+        </p:txBody>
+      </p:sp>
+      <p:sp>
+        <p:nvSpPr>
+          <p:cNvPr id="37" name="Rectangle 36"/>
+          <p:cNvSpPr/>
+          <p:nvPr/>
+        </p:nvSpPr>
+        <p:spPr>
+          <a:xfrm rot="5400000">
+            <a:off x="624078" y="4237990"/>
+            <a:ext cx="7620" cy="64769"/>
+          </a:xfrm>
+          <a:prstGeom prst="rect">
+            <a:avLst/>
+          </a:prstGeom>
+          <a:solidFill>
+            <a:srgbClr val="FFFFFF"/>
+          </a:solidFill>
+          <a:ln>
+            <a:noFill/>
+          </a:ln>
+          <a:effectLst/>
+        </p:spPr>
+        <p:style>
+          <a:lnRef idx="1">
+            <a:schemeClr val="accent1"/>
+          </a:lnRef>
+          <a:fillRef idx="3">
+            <a:schemeClr val="accent1"/>
+          </a:fillRef>
+          <a:effectRef idx="0">
+            <a:schemeClr val="accent1"/>
+          </a:effectRef>
+          <a:fontRef idx="minor">
+            <a:schemeClr val="lt1"/>
+          </a:fontRef>
+        </p:style>
+        <p:txBody>
+          <a:bodyPr rtlCol="0" anchor="ctr"/>
+          <a:lstStyle/>
+          <a:p>
+            <a:pPr algn="ctr"/>
+          </a:p>
+        </p:txBody>
+      </p:sp>
+      <p:sp>
+        <p:nvSpPr>
+          <p:cNvPr id="38" name="Rectangle 37"/>
+          <p:cNvSpPr/>
+          <p:nvPr/>
+        </p:nvSpPr>
+        <p:spPr>
+          <a:xfrm rot="8100000">
+            <a:off x="667078" y="4134178"/>
+            <a:ext cx="7620" cy="64769"/>
+          </a:xfrm>
+          <a:prstGeom prst="rect">
+            <a:avLst/>
+          </a:prstGeom>
+          <a:solidFill>
+            <a:srgbClr val="FFFFFF"/>
+          </a:solidFill>
+          <a:ln>
+            <a:noFill/>
+          </a:ln>
+          <a:effectLst/>
+        </p:spPr>
+        <p:style>
+          <a:lnRef idx="1">
+            <a:schemeClr val="accent1"/>
+          </a:lnRef>
+          <a:fillRef idx="3">
+            <a:schemeClr val="accent1"/>
+          </a:fillRef>
+          <a:effectRef idx="0">
+            <a:schemeClr val="accent1"/>
+          </a:effectRef>
+          <a:fontRef idx="minor">
+            <a:schemeClr val="lt1"/>
+          </a:fontRef>
+        </p:style>
+        <p:txBody>
+          <a:bodyPr rtlCol="0" anchor="ctr"/>
+          <a:lstStyle/>
+          <a:p>
+            <a:pPr algn="ctr"/>
+          </a:p>
+        </p:txBody>
+      </p:sp>
+      <p:sp>
+        <p:nvSpPr>
+          <p:cNvPr id="39" name="Rectangle 38"/>
+          <p:cNvSpPr/>
+          <p:nvPr/>
+        </p:nvSpPr>
+        <p:spPr>
+          <a:xfrm rot="10800000">
+            <a:off x="770890" y="4091178"/>
+            <a:ext cx="7620" cy="64769"/>
+          </a:xfrm>
+          <a:prstGeom prst="rect">
+            <a:avLst/>
+          </a:prstGeom>
+          <a:solidFill>
+            <a:srgbClr val="FFFFFF"/>
+          </a:solidFill>
+          <a:ln>
+            <a:noFill/>
+          </a:ln>
+          <a:effectLst/>
+        </p:spPr>
+        <p:style>
+          <a:lnRef idx="1">
+            <a:schemeClr val="accent1"/>
+          </a:lnRef>
+          <a:fillRef idx="3">
+            <a:schemeClr val="accent1"/>
+          </a:fillRef>
+          <a:effectRef idx="0">
+            <a:schemeClr val="accent1"/>
+          </a:effectRef>
+          <a:fontRef idx="minor">
+            <a:schemeClr val="lt1"/>
+          </a:fontRef>
+        </p:style>
+        <p:txBody>
+          <a:bodyPr rtlCol="0" anchor="ctr"/>
+          <a:lstStyle/>
+          <a:p>
+            <a:pPr algn="ctr"/>
+          </a:p>
+        </p:txBody>
+      </p:sp>
+      <p:sp>
+        <p:nvSpPr>
+          <p:cNvPr id="40" name="Rectangle 39"/>
+          <p:cNvSpPr/>
+          <p:nvPr/>
+        </p:nvSpPr>
+        <p:spPr>
+          <a:xfrm rot="13500000">
+            <a:off x="874701" y="4134178"/>
+            <a:ext cx="7620" cy="64769"/>
+          </a:xfrm>
+          <a:prstGeom prst="rect">
+            <a:avLst/>
+          </a:prstGeom>
+          <a:solidFill>
+            <a:srgbClr val="FFFFFF"/>
+          </a:solidFill>
+          <a:ln>
+            <a:noFill/>
+          </a:ln>
+          <a:effectLst/>
+        </p:spPr>
+        <p:style>
+          <a:lnRef idx="1">
+            <a:schemeClr val="accent1"/>
+          </a:lnRef>
+          <a:fillRef idx="3">
+            <a:schemeClr val="accent1"/>
+          </a:fillRef>
+          <a:effectRef idx="0">
+            <a:schemeClr val="accent1"/>
+          </a:effectRef>
+          <a:fontRef idx="minor">
+            <a:schemeClr val="lt1"/>
+          </a:fontRef>
+        </p:style>
+        <p:txBody>
+          <a:bodyPr rtlCol="0" anchor="ctr"/>
+          <a:lstStyle/>
+          <a:p>
+            <a:pPr algn="ctr"/>
+          </a:p>
+        </p:txBody>
+      </p:sp>
+      <p:sp>
+        <p:nvSpPr>
+          <p:cNvPr id="41" name="Oval 40"/>
+          <p:cNvSpPr/>
+          <p:nvPr/>
+        </p:nvSpPr>
+        <p:spPr>
+          <a:xfrm>
+            <a:off x="762000" y="4229100"/>
+            <a:ext cx="25400" cy="25400"/>
+          </a:xfrm>
+          <a:prstGeom prst="ellipse">
+            <a:avLst/>
+          </a:prstGeom>
+          <a:solidFill>
+            <a:srgbClr val="FFFFFF"/>
+          </a:solidFill>
+          <a:ln>
+            <a:noFill/>
+          </a:ln>
+          <a:effectLst/>
+        </p:spPr>
+        <p:style>
+          <a:lnRef idx="1">
+            <a:schemeClr val="accent1"/>
+          </a:lnRef>
+          <a:fillRef idx="3">
+            <a:schemeClr val="accent1"/>
+          </a:fillRef>
+          <a:effectRef idx="0">
+            <a:schemeClr val="accent1"/>
+          </a:effectRef>
+          <a:fontRef idx="minor">
+            <a:schemeClr val="lt1"/>
+          </a:fontRef>
+        </p:style>
+        <p:txBody>
+          <a:bodyPr rtlCol="0" anchor="ctr"/>
+          <a:lstStyle/>
+          <a:p>
+            <a:pPr algn="ctr"/>
+          </a:p>
+        </p:txBody>
+      </p:sp>
+      <p:sp>
+        <p:nvSpPr>
+          <p:cNvPr id="42" name="TextBox 41"/>
+          <p:cNvSpPr txBox="1"/>
+          <p:nvPr/>
+        </p:nvSpPr>
+        <p:spPr>
+          <a:xfrm>
+            <a:off x="1397000" y="3962400"/>
+            <a:ext cx="6718300" cy="304800"/>
+          </a:xfrm>
+          <a:prstGeom prst="rect">
+            <a:avLst/>
+          </a:prstGeom>
+          <a:noFill/>
+          <a:effectLst/>
+        </p:spPr>
+        <p:txBody>
+          <a:bodyPr wrap="square" lIns="0" rIns="0" tIns="0" bIns="0" anchor="t">
+            <a:spAutoFit/>
+          </a:bodyPr>
+          <a:lstStyle/>
+          <a:p>
+            <a:pPr algn="l">
+              <a:lnSpc>
+                <a:spcPts val="1920"/>
+              </a:lnSpc>
+              <a:spcBef>
+                <a:spcPts val="0"/>
+              </a:spcBef>
+              <a:spcAft>
+                <a:spcPts val="0"/>
+              </a:spcAft>
+            </a:pPr>
+            <a:r>
+              <a:rPr sz="1600" b="1" i="0" lang="ru-RU">
+                <a:solidFill>
+                  <a:srgbClr val="FF0000"/>
+                </a:solidFill>
+                <a:latin typeface="Verdana"/>
+              </a:rPr>
+              <a:t>Организатор мероприятия:</a:t>
+            </a:r>
+          </a:p>
+        </p:txBody>
+      </p:sp>
+      <p:sp>
+        <p:nvSpPr>
+          <p:cNvPr id="43" name="TextBox 42"/>
+          <p:cNvSpPr txBox="1"/>
+          <p:nvPr/>
+        </p:nvSpPr>
+        <p:spPr>
+          <a:xfrm>
+            <a:off x="1397000" y="4241800"/>
+            <a:ext cx="6718300" cy="203200"/>
+          </a:xfrm>
+          <a:prstGeom prst="rect">
+            <a:avLst/>
+          </a:prstGeom>
+          <a:noFill/>
+          <a:effectLst/>
+        </p:spPr>
+        <p:txBody>
+          <a:bodyPr wrap="square" lIns="0" rIns="0" tIns="0" bIns="0" anchor="t">
+            <a:spAutoFit/>
+          </a:bodyPr>
+          <a:lstStyle/>
+          <a:p>
+            <a:pPr algn="l">
+              <a:lnSpc>
+                <a:spcPts val="1440"/>
+              </a:lnSpc>
+              <a:spcBef>
+                <a:spcPts val="0"/>
+              </a:spcBef>
+              <a:spcAft>
+                <a:spcPts val="0"/>
+              </a:spcAft>
+            </a:pPr>
+            <a:r>
+              <a:rPr sz="1200" b="0" i="1" lang="ru-RU">
+                <a:solidFill>
+                  <a:srgbClr val="FFFFFF"/>
+                </a:solidFill>
+                <a:latin typeface="Verdana"/>
+              </a:rPr>
+              <a:t>Серия событий «Тульский марафон»</a:t>
+            </a:r>
+          </a:p>
+        </p:txBody>
+      </p:sp>
+      <p:sp>
+        <p:nvSpPr>
+          <p:cNvPr id="44" name="Oval 43"/>
+          <p:cNvSpPr/>
+          <p:nvPr/>
+        </p:nvSpPr>
+        <p:spPr>
+          <a:xfrm>
+            <a:off x="558800" y="4597400"/>
+            <a:ext cx="431800" cy="431800"/>
+          </a:xfrm>
+          <a:prstGeom prst="ellipse">
+            <a:avLst/>
+          </a:prstGeom>
+          <a:noFill/>
+          <a:ln w="7620">
+            <a:solidFill>
+              <a:srgbClr val="FFFFFF"/>
+            </a:solidFill>
+          </a:ln>
+          <a:effectLst/>
+        </p:spPr>
+        <p:style>
+          <a:lnRef idx="1">
+            <a:schemeClr val="accent1"/>
+          </a:lnRef>
+          <a:fillRef idx="3">
+            <a:schemeClr val="accent1"/>
+          </a:fillRef>
+          <a:effectRef idx="0">
+            <a:schemeClr val="accent1"/>
+          </a:effectRef>
+          <a:fontRef idx="minor">
+            <a:schemeClr val="lt1"/>
+          </a:fontRef>
+        </p:style>
+        <p:txBody>
+          <a:bodyPr rtlCol="0" anchor="ctr"/>
+          <a:lstStyle/>
+          <a:p>
+            <a:pPr algn="ctr"/>
+          </a:p>
+        </p:txBody>
+      </p:sp>
+      <p:sp>
+        <p:nvSpPr>
+          <p:cNvPr id="45" name="Rectangle 44"/>
+          <p:cNvSpPr/>
+          <p:nvPr/>
+        </p:nvSpPr>
+        <p:spPr>
+          <a:xfrm rot="16200000">
+            <a:off x="917702" y="4809490"/>
+            <a:ext cx="7620" cy="64769"/>
+          </a:xfrm>
+          <a:prstGeom prst="rect">
+            <a:avLst/>
+          </a:prstGeom>
+          <a:solidFill>
+            <a:srgbClr val="FFFFFF"/>
+          </a:solidFill>
+          <a:ln>
+            <a:noFill/>
+          </a:ln>
+          <a:effectLst/>
+        </p:spPr>
+        <p:style>
+          <a:lnRef idx="1">
+            <a:schemeClr val="accent1"/>
+          </a:lnRef>
+          <a:fillRef idx="3">
+            <a:schemeClr val="accent1"/>
+          </a:fillRef>
+          <a:effectRef idx="0">
+            <a:schemeClr val="accent1"/>
+          </a:effectRef>
+          <a:fontRef idx="minor">
+            <a:schemeClr val="lt1"/>
+          </a:fontRef>
+        </p:style>
+        <p:txBody>
+          <a:bodyPr rtlCol="0" anchor="ctr"/>
+          <a:lstStyle/>
+          <a:p>
+            <a:pPr algn="ctr"/>
+          </a:p>
+        </p:txBody>
+      </p:sp>
+      <p:sp>
+        <p:nvSpPr>
+          <p:cNvPr id="46" name="Rectangle 45"/>
+          <p:cNvSpPr/>
+          <p:nvPr/>
+        </p:nvSpPr>
+        <p:spPr>
+          <a:xfrm rot="18900000">
+            <a:off x="874701" y="4913301"/>
+            <a:ext cx="7620" cy="64769"/>
+          </a:xfrm>
+          <a:prstGeom prst="rect">
+            <a:avLst/>
+          </a:prstGeom>
+          <a:solidFill>
+            <a:srgbClr val="FFFFFF"/>
+          </a:solidFill>
+          <a:ln>
+            <a:noFill/>
+          </a:ln>
+          <a:effectLst/>
+        </p:spPr>
+        <p:style>
+          <a:lnRef idx="1">
+            <a:schemeClr val="accent1"/>
+          </a:lnRef>
+          <a:fillRef idx="3">
+            <a:schemeClr val="accent1"/>
+          </a:fillRef>
+          <a:effectRef idx="0">
+            <a:schemeClr val="accent1"/>
+          </a:effectRef>
+          <a:fontRef idx="minor">
+            <a:schemeClr val="lt1"/>
+          </a:fontRef>
+        </p:style>
+        <p:txBody>
+          <a:bodyPr rtlCol="0" anchor="ctr"/>
+          <a:lstStyle/>
+          <a:p>
+            <a:pPr algn="ctr"/>
+          </a:p>
+        </p:txBody>
+      </p:sp>
+      <p:sp>
+        <p:nvSpPr>
+          <p:cNvPr id="47" name="Rectangle 46"/>
+          <p:cNvSpPr/>
+          <p:nvPr/>
+        </p:nvSpPr>
+        <p:spPr>
+          <a:xfrm>
+            <a:off x="770890" y="4956302"/>
+            <a:ext cx="7620" cy="64769"/>
+          </a:xfrm>
+          <a:prstGeom prst="rect">
+            <a:avLst/>
+          </a:prstGeom>
+          <a:solidFill>
+            <a:srgbClr val="FFFFFF"/>
+          </a:solidFill>
+          <a:ln>
+            <a:noFill/>
+          </a:ln>
+          <a:effectLst/>
+        </p:spPr>
+        <p:style>
+          <a:lnRef idx="1">
+            <a:schemeClr val="accent1"/>
+          </a:lnRef>
+          <a:fillRef idx="3">
+            <a:schemeClr val="accent1"/>
+          </a:fillRef>
+          <a:effectRef idx="0">
+            <a:schemeClr val="accent1"/>
+          </a:effectRef>
+          <a:fontRef idx="minor">
+            <a:schemeClr val="lt1"/>
+          </a:fontRef>
+        </p:style>
+        <p:txBody>
+          <a:bodyPr rtlCol="0" anchor="ctr"/>
+          <a:lstStyle/>
+          <a:p>
+            <a:pPr algn="ctr"/>
+          </a:p>
+        </p:txBody>
+      </p:sp>
+      <p:sp>
+        <p:nvSpPr>
+          <p:cNvPr id="48" name="Rectangle 47"/>
+          <p:cNvSpPr/>
+          <p:nvPr/>
+        </p:nvSpPr>
+        <p:spPr>
+          <a:xfrm rot="2700000">
+            <a:off x="667078" y="4913301"/>
+            <a:ext cx="7620" cy="64769"/>
+          </a:xfrm>
+          <a:prstGeom prst="rect">
+            <a:avLst/>
+          </a:prstGeom>
+          <a:solidFill>
+            <a:srgbClr val="FFFFFF"/>
+          </a:solidFill>
+          <a:ln>
+            <a:noFill/>
+          </a:ln>
+          <a:effectLst/>
+        </p:spPr>
+        <p:style>
+          <a:lnRef idx="1">
+            <a:schemeClr val="accent1"/>
+          </a:lnRef>
+          <a:fillRef idx="3">
+            <a:schemeClr val="accent1"/>
+          </a:fillRef>
+          <a:effectRef idx="0">
+            <a:schemeClr val="accent1"/>
+          </a:effectRef>
+          <a:fontRef idx="minor">
+            <a:schemeClr val="lt1"/>
+          </a:fontRef>
+        </p:style>
+        <p:txBody>
+          <a:bodyPr rtlCol="0" anchor="ctr"/>
+          <a:lstStyle/>
+          <a:p>
+            <a:pPr algn="ctr"/>
+          </a:p>
+        </p:txBody>
+      </p:sp>
+      <p:sp>
+        <p:nvSpPr>
+          <p:cNvPr id="49" name="Rectangle 48"/>
+          <p:cNvSpPr/>
+          <p:nvPr/>
+        </p:nvSpPr>
+        <p:spPr>
+          <a:xfrm rot="5400000">
+            <a:off x="624078" y="4809490"/>
+            <a:ext cx="7620" cy="64769"/>
+          </a:xfrm>
+          <a:prstGeom prst="rect">
+            <a:avLst/>
+          </a:prstGeom>
+          <a:solidFill>
+            <a:srgbClr val="FFFFFF"/>
+          </a:solidFill>
+          <a:ln>
+            <a:noFill/>
+          </a:ln>
+          <a:effectLst/>
+        </p:spPr>
+        <p:style>
+          <a:lnRef idx="1">
+            <a:schemeClr val="accent1"/>
+          </a:lnRef>
+          <a:fillRef idx="3">
+            <a:schemeClr val="accent1"/>
+          </a:fillRef>
+          <a:effectRef idx="0">
+            <a:schemeClr val="accent1"/>
+          </a:effectRef>
+          <a:fontRef idx="minor">
+            <a:schemeClr val="lt1"/>
+          </a:fontRef>
+        </p:style>
+        <p:txBody>
+          <a:bodyPr rtlCol="0" anchor="ctr"/>
+          <a:lstStyle/>
+          <a:p>
+            <a:pPr algn="ctr"/>
+          </a:p>
+        </p:txBody>
+      </p:sp>
+      <p:sp>
+        <p:nvSpPr>
+          <p:cNvPr id="50" name="Rectangle 49"/>
+          <p:cNvSpPr/>
+          <p:nvPr/>
+        </p:nvSpPr>
+        <p:spPr>
+          <a:xfrm rot="8100000">
+            <a:off x="667078" y="4705678"/>
+            <a:ext cx="7620" cy="64769"/>
+          </a:xfrm>
+          <a:prstGeom prst="rect">
+            <a:avLst/>
+          </a:prstGeom>
+          <a:solidFill>
+            <a:srgbClr val="FFFFFF"/>
+          </a:solidFill>
+          <a:ln>
+            <a:noFill/>
+          </a:ln>
+          <a:effectLst/>
+        </p:spPr>
+        <p:style>
+          <a:lnRef idx="1">
+            <a:schemeClr val="accent1"/>
+          </a:lnRef>
+          <a:fillRef idx="3">
+            <a:schemeClr val="accent1"/>
+          </a:fillRef>
+          <a:effectRef idx="0">
+            <a:schemeClr val="accent1"/>
+          </a:effectRef>
+          <a:fontRef idx="minor">
+            <a:schemeClr val="lt1"/>
+          </a:fontRef>
+        </p:style>
+        <p:txBody>
+          <a:bodyPr rtlCol="0" anchor="ctr"/>
+          <a:lstStyle/>
+          <a:p>
+            <a:pPr algn="ctr"/>
+          </a:p>
+        </p:txBody>
+      </p:sp>
+      <p:sp>
+        <p:nvSpPr>
+          <p:cNvPr id="51" name="Rectangle 50"/>
+          <p:cNvSpPr/>
+          <p:nvPr/>
+        </p:nvSpPr>
+        <p:spPr>
+          <a:xfrm rot="10800000">
+            <a:off x="770890" y="4662678"/>
+            <a:ext cx="7620" cy="64769"/>
+          </a:xfrm>
+          <a:prstGeom prst="rect">
+            <a:avLst/>
+          </a:prstGeom>
+          <a:solidFill>
+            <a:srgbClr val="FFFFFF"/>
+          </a:solidFill>
+          <a:ln>
+            <a:noFill/>
+          </a:ln>
+          <a:effectLst/>
+        </p:spPr>
+        <p:style>
+          <a:lnRef idx="1">
+            <a:schemeClr val="accent1"/>
+          </a:lnRef>
+          <a:fillRef idx="3">
+            <a:schemeClr val="accent1"/>
+          </a:fillRef>
+          <a:effectRef idx="0">
+            <a:schemeClr val="accent1"/>
+          </a:effectRef>
+          <a:fontRef idx="minor">
+            <a:schemeClr val="lt1"/>
+          </a:fontRef>
+        </p:style>
+        <p:txBody>
+          <a:bodyPr rtlCol="0" anchor="ctr"/>
+          <a:lstStyle/>
+          <a:p>
+            <a:pPr algn="ctr"/>
+          </a:p>
+        </p:txBody>
+      </p:sp>
+      <p:sp>
+        <p:nvSpPr>
+          <p:cNvPr id="52" name="Rectangle 51"/>
+          <p:cNvSpPr/>
+          <p:nvPr/>
+        </p:nvSpPr>
+        <p:spPr>
+          <a:xfrm rot="13500000">
+            <a:off x="874701" y="4705678"/>
+            <a:ext cx="7620" cy="64769"/>
+          </a:xfrm>
+          <a:prstGeom prst="rect">
+            <a:avLst/>
+          </a:prstGeom>
+          <a:solidFill>
+            <a:srgbClr val="FFFFFF"/>
+          </a:solidFill>
+          <a:ln>
+            <a:noFill/>
+          </a:ln>
+          <a:effectLst/>
+        </p:spPr>
+        <p:style>
+          <a:lnRef idx="1">
+            <a:schemeClr val="accent1"/>
+          </a:lnRef>
+          <a:fillRef idx="3">
+            <a:schemeClr val="accent1"/>
+          </a:fillRef>
+          <a:effectRef idx="0">
+            <a:schemeClr val="accent1"/>
+          </a:effectRef>
+          <a:fontRef idx="minor">
+            <a:schemeClr val="lt1"/>
+          </a:fontRef>
+        </p:style>
+        <p:txBody>
+          <a:bodyPr rtlCol="0" anchor="ctr"/>
+          <a:lstStyle/>
+          <a:p>
+            <a:pPr algn="ctr"/>
+          </a:p>
+        </p:txBody>
+      </p:sp>
+      <p:sp>
+        <p:nvSpPr>
+          <p:cNvPr id="53" name="Oval 52"/>
+          <p:cNvSpPr/>
+          <p:nvPr/>
+        </p:nvSpPr>
+        <p:spPr>
+          <a:xfrm>
+            <a:off x="762000" y="4800600"/>
+            <a:ext cx="25400" cy="25400"/>
+          </a:xfrm>
+          <a:prstGeom prst="ellipse">
+            <a:avLst/>
+          </a:prstGeom>
+          <a:solidFill>
+            <a:srgbClr val="FFFFFF"/>
+          </a:solidFill>
+          <a:ln>
+            <a:noFill/>
+          </a:ln>
+          <a:effectLst/>
+        </p:spPr>
+        <p:style>
+          <a:lnRef idx="1">
+            <a:schemeClr val="accent1"/>
+          </a:lnRef>
+          <a:fillRef idx="3">
+            <a:schemeClr val="accent1"/>
+          </a:fillRef>
+          <a:effectRef idx="0">
+            <a:schemeClr val="accent1"/>
+          </a:effectRef>
+          <a:fontRef idx="minor">
+            <a:schemeClr val="lt1"/>
+          </a:fontRef>
+        </p:style>
+        <p:txBody>
+          <a:bodyPr rtlCol="0" anchor="ctr"/>
+          <a:lstStyle/>
+          <a:p>
+            <a:pPr algn="ctr"/>
+          </a:p>
+        </p:txBody>
+      </p:sp>
+      <p:sp>
+        <p:nvSpPr>
+          <p:cNvPr id="54" name="TextBox 53"/>
+          <p:cNvSpPr txBox="1"/>
+          <p:nvPr/>
+        </p:nvSpPr>
+        <p:spPr>
+          <a:xfrm>
+            <a:off x="1397000" y="4533900"/>
+            <a:ext cx="6718300" cy="304800"/>
+          </a:xfrm>
+          <a:prstGeom prst="rect">
+            <a:avLst/>
+          </a:prstGeom>
+          <a:noFill/>
+          <a:effectLst/>
+        </p:spPr>
+        <p:txBody>
+          <a:bodyPr wrap="square" lIns="0" rIns="0" tIns="0" bIns="0" anchor="t">
+            <a:spAutoFit/>
+          </a:bodyPr>
+          <a:lstStyle/>
+          <a:p>
+            <a:pPr algn="l">
+              <a:lnSpc>
+                <a:spcPts val="1920"/>
+              </a:lnSpc>
+              <a:spcBef>
+                <a:spcPts val="0"/>
+              </a:spcBef>
+              <a:spcAft>
+                <a:spcPts val="0"/>
+              </a:spcAft>
+            </a:pPr>
+            <a:r>
+              <a:rPr sz="1600" b="1" i="0" lang="ru-RU">
+                <a:solidFill>
+                  <a:srgbClr val="FF0000"/>
+                </a:solidFill>
+                <a:latin typeface="Verdana"/>
+              </a:rPr>
+              <a:t>Количество участников из СМС:</a:t>
+            </a:r>
+          </a:p>
+        </p:txBody>
+      </p:sp>
+      <p:sp>
+        <p:nvSpPr>
+          <p:cNvPr id="55" name="TextBox 54"/>
+          <p:cNvSpPr txBox="1"/>
+          <p:nvPr/>
+        </p:nvSpPr>
+        <p:spPr>
+          <a:xfrm>
+            <a:off x="1397000" y="4813300"/>
+            <a:ext cx="6718300" cy="203200"/>
+          </a:xfrm>
+          <a:prstGeom prst="rect">
+            <a:avLst/>
+          </a:prstGeom>
+          <a:noFill/>
+          <a:effectLst/>
+        </p:spPr>
+        <p:txBody>
+          <a:bodyPr wrap="square" lIns="0" rIns="0" tIns="0" bIns="0" anchor="t">
+            <a:spAutoFit/>
+          </a:bodyPr>
+          <a:lstStyle/>
+          <a:p>
+            <a:pPr algn="l">
+              <a:lnSpc>
+                <a:spcPts val="1440"/>
+              </a:lnSpc>
+              <a:spcBef>
+                <a:spcPts val="0"/>
+              </a:spcBef>
+              <a:spcAft>
+                <a:spcPts val="0"/>
+              </a:spcAft>
+            </a:pPr>
+            <a:r>
+              <a:rPr sz="1200" b="0" i="1" lang="ru-RU">
+                <a:solidFill>
+                  <a:srgbClr val="FFFFFF"/>
+                </a:solidFill>
+                <a:latin typeface="Verdana"/>
+              </a:rPr>
+              <a:t>17 человек (расчетно)</a:t>
+            </a:r>
+          </a:p>
+        </p:txBody>
+      </p:sp>
+      <p:sp>
+        <p:nvSpPr>
+          <p:cNvPr id="56" name="Oval 55"/>
+          <p:cNvSpPr/>
+          <p:nvPr/>
+        </p:nvSpPr>
+        <p:spPr>
+          <a:xfrm>
+            <a:off x="558800" y="5283200"/>
+            <a:ext cx="431800" cy="431800"/>
+          </a:xfrm>
+          <a:prstGeom prst="ellipse">
+            <a:avLst/>
+          </a:prstGeom>
+          <a:noFill/>
+          <a:ln w="7620">
+            <a:solidFill>
+              <a:srgbClr val="FFFFFF"/>
+            </a:solidFill>
+          </a:ln>
+          <a:effectLst/>
+        </p:spPr>
+        <p:style>
+          <a:lnRef idx="1">
+            <a:schemeClr val="accent1"/>
+          </a:lnRef>
+          <a:fillRef idx="3">
+            <a:schemeClr val="accent1"/>
+          </a:fillRef>
+          <a:effectRef idx="0">
+            <a:schemeClr val="accent1"/>
+          </a:effectRef>
+          <a:fontRef idx="minor">
+            <a:schemeClr val="lt1"/>
+          </a:fontRef>
+        </p:style>
+        <p:txBody>
+          <a:bodyPr rtlCol="0" anchor="ctr"/>
+          <a:lstStyle/>
+          <a:p>
+            <a:pPr algn="ctr"/>
+          </a:p>
+        </p:txBody>
+      </p:sp>
+      <p:sp>
+        <p:nvSpPr>
+          <p:cNvPr id="57" name="Rectangle 56"/>
+          <p:cNvSpPr/>
+          <p:nvPr/>
+        </p:nvSpPr>
+        <p:spPr>
+          <a:xfrm rot="16200000">
+            <a:off x="917702" y="5495290"/>
+            <a:ext cx="7620" cy="64769"/>
+          </a:xfrm>
+          <a:prstGeom prst="rect">
+            <a:avLst/>
+          </a:prstGeom>
+          <a:solidFill>
+            <a:srgbClr val="FFFFFF"/>
+          </a:solidFill>
+          <a:ln>
+            <a:noFill/>
+          </a:ln>
+          <a:effectLst/>
+        </p:spPr>
+        <p:style>
+          <a:lnRef idx="1">
+            <a:schemeClr val="accent1"/>
+          </a:lnRef>
+          <a:fillRef idx="3">
+            <a:schemeClr val="accent1"/>
+          </a:fillRef>
+          <a:effectRef idx="0">
+            <a:schemeClr val="accent1"/>
+          </a:effectRef>
+          <a:fontRef idx="minor">
+            <a:schemeClr val="lt1"/>
+          </a:fontRef>
+        </p:style>
+        <p:txBody>
+          <a:bodyPr rtlCol="0" anchor="ctr"/>
+          <a:lstStyle/>
+          <a:p>
+            <a:pPr algn="ctr"/>
+          </a:p>
+        </p:txBody>
+      </p:sp>
+      <p:sp>
+        <p:nvSpPr>
+          <p:cNvPr id="58" name="Rectangle 57"/>
+          <p:cNvSpPr/>
+          <p:nvPr/>
+        </p:nvSpPr>
+        <p:spPr>
+          <a:xfrm rot="18900000">
+            <a:off x="874701" y="5599101"/>
+            <a:ext cx="7620" cy="64769"/>
+          </a:xfrm>
+          <a:prstGeom prst="rect">
+            <a:avLst/>
+          </a:prstGeom>
+          <a:solidFill>
+            <a:srgbClr val="FFFFFF"/>
+          </a:solidFill>
+          <a:ln>
+            <a:noFill/>
+          </a:ln>
+          <a:effectLst/>
+        </p:spPr>
+        <p:style>
+          <a:lnRef idx="1">
+            <a:schemeClr val="accent1"/>
+          </a:lnRef>
+          <a:fillRef idx="3">
+            <a:schemeClr val="accent1"/>
+          </a:fillRef>
+          <a:effectRef idx="0">
+            <a:schemeClr val="accent1"/>
+          </a:effectRef>
+          <a:fontRef idx="minor">
+            <a:schemeClr val="lt1"/>
+          </a:fontRef>
+        </p:style>
+        <p:txBody>
+          <a:bodyPr rtlCol="0" anchor="ctr"/>
+          <a:lstStyle/>
+          <a:p>
+            <a:pPr algn="ctr"/>
+          </a:p>
+        </p:txBody>
+      </p:sp>
+      <p:sp>
+        <p:nvSpPr>
+          <p:cNvPr id="59" name="Rectangle 58"/>
+          <p:cNvSpPr/>
+          <p:nvPr/>
+        </p:nvSpPr>
+        <p:spPr>
+          <a:xfrm>
+            <a:off x="770890" y="5642102"/>
+            <a:ext cx="7620" cy="64769"/>
+          </a:xfrm>
+          <a:prstGeom prst="rect">
+            <a:avLst/>
+          </a:prstGeom>
+          <a:solidFill>
+            <a:srgbClr val="FFFFFF"/>
+          </a:solidFill>
+          <a:ln>
+            <a:noFill/>
+          </a:ln>
+          <a:effectLst/>
+        </p:spPr>
+        <p:style>
+          <a:lnRef idx="1">
+            <a:schemeClr val="accent1"/>
+          </a:lnRef>
+          <a:fillRef idx="3">
+            <a:schemeClr val="accent1"/>
+          </a:fillRef>
+          <a:effectRef idx="0">
+            <a:schemeClr val="accent1"/>
+          </a:effectRef>
+          <a:fontRef idx="minor">
+            <a:schemeClr val="lt1"/>
+          </a:fontRef>
+        </p:style>
+        <p:txBody>
+          <a:bodyPr rtlCol="0" anchor="ctr"/>
+          <a:lstStyle/>
+          <a:p>
+            <a:pPr algn="ctr"/>
+          </a:p>
+        </p:txBody>
+      </p:sp>
+      <p:sp>
+        <p:nvSpPr>
+          <p:cNvPr id="60" name="Rectangle 59"/>
+          <p:cNvSpPr/>
+          <p:nvPr/>
+        </p:nvSpPr>
+        <p:spPr>
+          <a:xfrm rot="2700000">
+            <a:off x="667078" y="5599101"/>
+            <a:ext cx="7620" cy="64769"/>
+          </a:xfrm>
+          <a:prstGeom prst="rect">
+            <a:avLst/>
+          </a:prstGeom>
+          <a:solidFill>
+            <a:srgbClr val="FFFFFF"/>
+          </a:solidFill>
+          <a:ln>
+            <a:noFill/>
+          </a:ln>
+          <a:effectLst/>
+        </p:spPr>
+        <p:style>
+          <a:lnRef idx="1">
+            <a:schemeClr val="accent1"/>
+          </a:lnRef>
+          <a:fillRef idx="3">
+            <a:schemeClr val="accent1"/>
+          </a:fillRef>
+          <a:effectRef idx="0">
+            <a:schemeClr val="accent1"/>
+          </a:effectRef>
+          <a:fontRef idx="minor">
+            <a:schemeClr val="lt1"/>
+          </a:fontRef>
+        </p:style>
+        <p:txBody>
+          <a:bodyPr rtlCol="0" anchor="ctr"/>
+          <a:lstStyle/>
+          <a:p>
+            <a:pPr algn="ctr"/>
+          </a:p>
+        </p:txBody>
+      </p:sp>
+      <p:sp>
+        <p:nvSpPr>
+          <p:cNvPr id="61" name="Rectangle 60"/>
+          <p:cNvSpPr/>
+          <p:nvPr/>
+        </p:nvSpPr>
+        <p:spPr>
+          <a:xfrm rot="5400000">
+            <a:off x="624078" y="5495290"/>
+            <a:ext cx="7620" cy="64769"/>
+          </a:xfrm>
+          <a:prstGeom prst="rect">
+            <a:avLst/>
+          </a:prstGeom>
+          <a:solidFill>
+            <a:srgbClr val="FFFFFF"/>
+          </a:solidFill>
+          <a:ln>
+            <a:noFill/>
+          </a:ln>
+          <a:effectLst/>
+        </p:spPr>
+        <p:style>
+          <a:lnRef idx="1">
+            <a:schemeClr val="accent1"/>
+          </a:lnRef>
+          <a:fillRef idx="3">
+            <a:schemeClr val="accent1"/>
+          </a:fillRef>
+          <a:effectRef idx="0">
+            <a:schemeClr val="accent1"/>
+          </a:effectRef>
+          <a:fontRef idx="minor">
+            <a:schemeClr val="lt1"/>
+          </a:fontRef>
+        </p:style>
+        <p:txBody>
+          <a:bodyPr rtlCol="0" anchor="ctr"/>
+          <a:lstStyle/>
+          <a:p>
+            <a:pPr algn="ctr"/>
+          </a:p>
+        </p:txBody>
+      </p:sp>
+      <p:sp>
+        <p:nvSpPr>
+          <p:cNvPr id="62" name="Rectangle 61"/>
+          <p:cNvSpPr/>
+          <p:nvPr/>
+        </p:nvSpPr>
+        <p:spPr>
+          <a:xfrm rot="8100000">
+            <a:off x="667078" y="5391478"/>
+            <a:ext cx="7620" cy="64769"/>
+          </a:xfrm>
+          <a:prstGeom prst="rect">
+            <a:avLst/>
+          </a:prstGeom>
+          <a:solidFill>
+            <a:srgbClr val="FFFFFF"/>
+          </a:solidFill>
+          <a:ln>
+            <a:noFill/>
+          </a:ln>
+          <a:effectLst/>
+        </p:spPr>
+        <p:style>
+          <a:lnRef idx="1">
+            <a:schemeClr val="accent1"/>
+          </a:lnRef>
+          <a:fillRef idx="3">
+            <a:schemeClr val="accent1"/>
+          </a:fillRef>
+          <a:effectRef idx="0">
+            <a:schemeClr val="accent1"/>
+          </a:effectRef>
+          <a:fontRef idx="minor">
+            <a:schemeClr val="lt1"/>
+          </a:fontRef>
+        </p:style>
+        <p:txBody>
+          <a:bodyPr rtlCol="0" anchor="ctr"/>
+          <a:lstStyle/>
+          <a:p>
+            <a:pPr algn="ctr"/>
+          </a:p>
+        </p:txBody>
+      </p:sp>
+      <p:sp>
+        <p:nvSpPr>
+          <p:cNvPr id="63" name="Rectangle 62"/>
+          <p:cNvSpPr/>
+          <p:nvPr/>
+        </p:nvSpPr>
+        <p:spPr>
+          <a:xfrm rot="10800000">
+            <a:off x="770890" y="5348478"/>
+            <a:ext cx="7620" cy="64769"/>
+          </a:xfrm>
+          <a:prstGeom prst="rect">
+            <a:avLst/>
+          </a:prstGeom>
+          <a:solidFill>
+            <a:srgbClr val="FFFFFF"/>
+          </a:solidFill>
+          <a:ln>
+            <a:noFill/>
+          </a:ln>
+          <a:effectLst/>
+        </p:spPr>
+        <p:style>
+          <a:lnRef idx="1">
+            <a:schemeClr val="accent1"/>
+          </a:lnRef>
+          <a:fillRef idx="3">
+            <a:schemeClr val="accent1"/>
+          </a:fillRef>
+          <a:effectRef idx="0">
+            <a:schemeClr val="accent1"/>
+          </a:effectRef>
+          <a:fontRef idx="minor">
+            <a:schemeClr val="lt1"/>
+          </a:fontRef>
+        </p:style>
+        <p:txBody>
+          <a:bodyPr rtlCol="0" anchor="ctr"/>
+          <a:lstStyle/>
+          <a:p>
+            <a:pPr algn="ctr"/>
+          </a:p>
+        </p:txBody>
+      </p:sp>
+      <p:sp>
+        <p:nvSpPr>
+          <p:cNvPr id="64" name="Rectangle 63"/>
+          <p:cNvSpPr/>
+          <p:nvPr/>
+        </p:nvSpPr>
+        <p:spPr>
+          <a:xfrm rot="13500000">
+            <a:off x="874701" y="5391478"/>
+            <a:ext cx="7620" cy="64769"/>
+          </a:xfrm>
+          <a:prstGeom prst="rect">
+            <a:avLst/>
+          </a:prstGeom>
+          <a:solidFill>
+            <a:srgbClr val="FFFFFF"/>
+          </a:solidFill>
+          <a:ln>
+            <a:noFill/>
+          </a:ln>
+          <a:effectLst/>
+        </p:spPr>
+        <p:style>
+          <a:lnRef idx="1">
+            <a:schemeClr val="accent1"/>
+          </a:lnRef>
+          <a:fillRef idx="3">
+            <a:schemeClr val="accent1"/>
+          </a:fillRef>
+          <a:effectRef idx="0">
+            <a:schemeClr val="accent1"/>
+          </a:effectRef>
+          <a:fontRef idx="minor">
+            <a:schemeClr val="lt1"/>
+          </a:fontRef>
+        </p:style>
+        <p:txBody>
+          <a:bodyPr rtlCol="0" anchor="ctr"/>
+          <a:lstStyle/>
+          <a:p>
+            <a:pPr algn="ctr"/>
+          </a:p>
+        </p:txBody>
+      </p:sp>
+      <p:sp>
+        <p:nvSpPr>
+          <p:cNvPr id="65" name="Oval 64"/>
+          <p:cNvSpPr/>
+          <p:nvPr/>
+        </p:nvSpPr>
+        <p:spPr>
+          <a:xfrm>
+            <a:off x="762000" y="5486400"/>
+            <a:ext cx="25400" cy="25400"/>
+          </a:xfrm>
+          <a:prstGeom prst="ellipse">
+            <a:avLst/>
+          </a:prstGeom>
+          <a:solidFill>
+            <a:srgbClr val="FFFFFF"/>
+          </a:solidFill>
+          <a:ln>
+            <a:noFill/>
+          </a:ln>
+          <a:effectLst/>
+        </p:spPr>
+        <p:style>
+          <a:lnRef idx="1">
+            <a:schemeClr val="accent1"/>
+          </a:lnRef>
+          <a:fillRef idx="3">
+            <a:schemeClr val="accent1"/>
+          </a:fillRef>
+          <a:effectRef idx="0">
+            <a:schemeClr val="accent1"/>
+          </a:effectRef>
+          <a:fontRef idx="minor">
+            <a:schemeClr val="lt1"/>
+          </a:fontRef>
+        </p:style>
+        <p:txBody>
+          <a:bodyPr rtlCol="0" anchor="ctr"/>
+          <a:lstStyle/>
+          <a:p>
+            <a:pPr algn="ctr"/>
+          </a:p>
+        </p:txBody>
+      </p:sp>
+      <p:sp>
+        <p:nvSpPr>
+          <p:cNvPr id="66" name="TextBox 65"/>
+          <p:cNvSpPr txBox="1"/>
+          <p:nvPr/>
+        </p:nvSpPr>
+        <p:spPr>
+          <a:xfrm>
+            <a:off x="1397000" y="5219700"/>
+            <a:ext cx="6718300" cy="304800"/>
+          </a:xfrm>
+          <a:prstGeom prst="rect">
+            <a:avLst/>
+          </a:prstGeom>
+          <a:noFill/>
+          <a:effectLst/>
+        </p:spPr>
+        <p:txBody>
+          <a:bodyPr wrap="square" lIns="0" rIns="0" tIns="0" bIns="0" anchor="t">
+            <a:spAutoFit/>
+          </a:bodyPr>
+          <a:lstStyle/>
+          <a:p>
+            <a:pPr algn="l">
+              <a:lnSpc>
+                <a:spcPts val="1920"/>
+              </a:lnSpc>
+              <a:spcBef>
+                <a:spcPts val="0"/>
+              </a:spcBef>
+              <a:spcAft>
+                <a:spcPts val="0"/>
+              </a:spcAft>
+            </a:pPr>
+            <a:r>
+              <a:rPr sz="1600" b="1" i="0" lang="ru-RU">
+                <a:solidFill>
+                  <a:srgbClr val="FF0000"/>
+                </a:solidFill>
+                <a:latin typeface="Verdana"/>
+              </a:rPr>
+              <a:t>Общее количество участников (охват):</a:t>
+            </a:r>
+          </a:p>
+        </p:txBody>
+      </p:sp>
+      <p:sp>
+        <p:nvSpPr>
+          <p:cNvPr id="67" name="TextBox 66"/>
+          <p:cNvSpPr txBox="1"/>
+          <p:nvPr/>
+        </p:nvSpPr>
+        <p:spPr>
+          <a:xfrm>
+            <a:off x="1397000" y="5499100"/>
+            <a:ext cx="6718300" cy="203200"/>
+          </a:xfrm>
+          <a:prstGeom prst="rect">
+            <a:avLst/>
+          </a:prstGeom>
+          <a:noFill/>
+          <a:effectLst/>
+        </p:spPr>
+        <p:txBody>
+          <a:bodyPr wrap="square" lIns="0" rIns="0" tIns="0" bIns="0" anchor="t">
+            <a:spAutoFit/>
+          </a:bodyPr>
+          <a:lstStyle/>
+          <a:p>
+            <a:pPr algn="l">
+              <a:lnSpc>
+                <a:spcPts val="1440"/>
+              </a:lnSpc>
+              <a:spcBef>
+                <a:spcPts val="0"/>
+              </a:spcBef>
+              <a:spcAft>
+                <a:spcPts val="0"/>
+              </a:spcAft>
+            </a:pPr>
+            <a:r>
+              <a:rPr sz="1200" b="0" i="0" lang="ru-RU">
+                <a:solidFill>
+                  <a:srgbClr val="FFFFFF"/>
+                </a:solidFill>
+                <a:latin typeface="Verdana"/>
+              </a:rPr>
+              <a:t>23 человека (по фото команды)</a:t>
+            </a:r>
+          </a:p>
+        </p:txBody>
+      </p:sp>
+      <p:sp>
+        <p:nvSpPr>
+          <p:cNvPr id="68" name="Oval 67"/>
+          <p:cNvSpPr/>
+          <p:nvPr/>
+        </p:nvSpPr>
+        <p:spPr>
+          <a:xfrm>
+            <a:off x="558800" y="5842000"/>
+            <a:ext cx="431800" cy="431800"/>
+          </a:xfrm>
+          <a:prstGeom prst="ellipse">
+            <a:avLst/>
+          </a:prstGeom>
+          <a:noFill/>
+          <a:ln w="7620">
+            <a:solidFill>
+              <a:srgbClr val="FFFFFF"/>
+            </a:solidFill>
+          </a:ln>
+          <a:effectLst/>
+        </p:spPr>
+        <p:style>
+          <a:lnRef idx="1">
+            <a:schemeClr val="accent1"/>
+          </a:lnRef>
+          <a:fillRef idx="3">
+            <a:schemeClr val="accent1"/>
+          </a:fillRef>
+          <a:effectRef idx="0">
+            <a:schemeClr val="accent1"/>
+          </a:effectRef>
+          <a:fontRef idx="minor">
+            <a:schemeClr val="lt1"/>
+          </a:fontRef>
+        </p:style>
+        <p:txBody>
+          <a:bodyPr rtlCol="0" anchor="ctr"/>
+          <a:lstStyle/>
+          <a:p>
+            <a:pPr algn="ctr"/>
+          </a:p>
+        </p:txBody>
+      </p:sp>
+      <p:sp>
+        <p:nvSpPr>
+          <p:cNvPr id="69" name="Rectangle 68"/>
+          <p:cNvSpPr/>
+          <p:nvPr/>
+        </p:nvSpPr>
+        <p:spPr>
+          <a:xfrm rot="16200000">
+            <a:off x="917702" y="6054090"/>
+            <a:ext cx="7620" cy="64769"/>
+          </a:xfrm>
+          <a:prstGeom prst="rect">
+            <a:avLst/>
+          </a:prstGeom>
+          <a:solidFill>
+            <a:srgbClr val="FFFFFF"/>
+          </a:solidFill>
+          <a:ln>
+            <a:noFill/>
+          </a:ln>
+          <a:effectLst/>
+        </p:spPr>
+        <p:style>
+          <a:lnRef idx="1">
+            <a:schemeClr val="accent1"/>
+          </a:lnRef>
+          <a:fillRef idx="3">
+            <a:schemeClr val="accent1"/>
+          </a:fillRef>
+          <a:effectRef idx="0">
+            <a:schemeClr val="accent1"/>
+          </a:effectRef>
+          <a:fontRef idx="minor">
+            <a:schemeClr val="lt1"/>
+          </a:fontRef>
+        </p:style>
+        <p:txBody>
+          <a:bodyPr rtlCol="0" anchor="ctr"/>
+          <a:lstStyle/>
+          <a:p>
+            <a:pPr algn="ctr"/>
+          </a:p>
+        </p:txBody>
+      </p:sp>
+      <p:sp>
+        <p:nvSpPr>
+          <p:cNvPr id="70" name="Rectangle 69"/>
+          <p:cNvSpPr/>
+          <p:nvPr/>
+        </p:nvSpPr>
+        <p:spPr>
+          <a:xfrm rot="18900000">
+            <a:off x="874701" y="6157901"/>
+            <a:ext cx="7620" cy="64769"/>
+          </a:xfrm>
+          <a:prstGeom prst="rect">
+            <a:avLst/>
+          </a:prstGeom>
+          <a:solidFill>
+            <a:srgbClr val="FFFFFF"/>
+          </a:solidFill>
+          <a:ln>
+            <a:noFill/>
+          </a:ln>
+          <a:effectLst/>
+        </p:spPr>
+        <p:style>
+          <a:lnRef idx="1">
+            <a:schemeClr val="accent1"/>
+          </a:lnRef>
+          <a:fillRef idx="3">
+            <a:schemeClr val="accent1"/>
+          </a:fillRef>
+          <a:effectRef idx="0">
+            <a:schemeClr val="accent1"/>
+          </a:effectRef>
+          <a:fontRef idx="minor">
+            <a:schemeClr val="lt1"/>
+          </a:fontRef>
+        </p:style>
+        <p:txBody>
+          <a:bodyPr rtlCol="0" anchor="ctr"/>
+          <a:lstStyle/>
+          <a:p>
+            <a:pPr algn="ctr"/>
+          </a:p>
+        </p:txBody>
+      </p:sp>
+      <p:sp>
+        <p:nvSpPr>
+          <p:cNvPr id="71" name="Rectangle 70"/>
+          <p:cNvSpPr/>
+          <p:nvPr/>
+        </p:nvSpPr>
+        <p:spPr>
+          <a:xfrm>
+            <a:off x="770890" y="6200902"/>
+            <a:ext cx="7620" cy="64769"/>
+          </a:xfrm>
+          <a:prstGeom prst="rect">
+            <a:avLst/>
+          </a:prstGeom>
+          <a:solidFill>
+            <a:srgbClr val="FFFFFF"/>
+          </a:solidFill>
+          <a:ln>
+            <a:noFill/>
+          </a:ln>
+          <a:effectLst/>
+        </p:spPr>
+        <p:style>
+          <a:lnRef idx="1">
+            <a:schemeClr val="accent1"/>
+          </a:lnRef>
+          <a:fillRef idx="3">
+            <a:schemeClr val="accent1"/>
+          </a:fillRef>
+          <a:effectRef idx="0">
+            <a:schemeClr val="accent1"/>
+          </a:effectRef>
+          <a:fontRef idx="minor">
+            <a:schemeClr val="lt1"/>
+          </a:fontRef>
+        </p:style>
+        <p:txBody>
+          <a:bodyPr rtlCol="0" anchor="ctr"/>
+          <a:lstStyle/>
+          <a:p>
+            <a:pPr algn="ctr"/>
+          </a:p>
+        </p:txBody>
+      </p:sp>
+      <p:sp>
+        <p:nvSpPr>
+          <p:cNvPr id="72" name="Rectangle 71"/>
+          <p:cNvSpPr/>
+          <p:nvPr/>
+        </p:nvSpPr>
+        <p:spPr>
+          <a:xfrm rot="2700000">
+            <a:off x="667078" y="6157901"/>
+            <a:ext cx="7620" cy="64769"/>
+          </a:xfrm>
+          <a:prstGeom prst="rect">
+            <a:avLst/>
+          </a:prstGeom>
+          <a:solidFill>
+            <a:srgbClr val="FFFFFF"/>
+          </a:solidFill>
+          <a:ln>
+            <a:noFill/>
+          </a:ln>
+          <a:effectLst/>
+        </p:spPr>
+        <p:style>
+          <a:lnRef idx="1">
+            <a:schemeClr val="accent1"/>
+          </a:lnRef>
+          <a:fillRef idx="3">
+            <a:schemeClr val="accent1"/>
+          </a:fillRef>
+          <a:effectRef idx="0">
+            <a:schemeClr val="accent1"/>
+          </a:effectRef>
+          <a:fontRef idx="minor">
+            <a:schemeClr val="lt1"/>
+          </a:fontRef>
+        </p:style>
+        <p:txBody>
+          <a:bodyPr rtlCol="0" anchor="ctr"/>
+          <a:lstStyle/>
+          <a:p>
+            <a:pPr algn="ctr"/>
+          </a:p>
+        </p:txBody>
+      </p:sp>
+      <p:sp>
+        <p:nvSpPr>
+          <p:cNvPr id="73" name="Rectangle 72"/>
+          <p:cNvSpPr/>
+          <p:nvPr/>
+        </p:nvSpPr>
+        <p:spPr>
+          <a:xfrm rot="5400000">
+            <a:off x="624078" y="6054090"/>
+            <a:ext cx="7620" cy="64769"/>
+          </a:xfrm>
+          <a:prstGeom prst="rect">
+            <a:avLst/>
+          </a:prstGeom>
+          <a:solidFill>
+            <a:srgbClr val="FFFFFF"/>
+          </a:solidFill>
+          <a:ln>
+            <a:noFill/>
+          </a:ln>
+          <a:effectLst/>
+        </p:spPr>
+        <p:style>
+          <a:lnRef idx="1">
+            <a:schemeClr val="accent1"/>
+          </a:lnRef>
+          <a:fillRef idx="3">
+            <a:schemeClr val="accent1"/>
+          </a:fillRef>
+          <a:effectRef idx="0">
+            <a:schemeClr val="accent1"/>
+          </a:effectRef>
+          <a:fontRef idx="minor">
+            <a:schemeClr val="lt1"/>
+          </a:fontRef>
+        </p:style>
+        <p:txBody>
+          <a:bodyPr rtlCol="0" anchor="ctr"/>
+          <a:lstStyle/>
+          <a:p>
+            <a:pPr algn="ctr"/>
+          </a:p>
+        </p:txBody>
+      </p:sp>
+      <p:sp>
+        <p:nvSpPr>
+          <p:cNvPr id="74" name="Rectangle 73"/>
+          <p:cNvSpPr/>
+          <p:nvPr/>
+        </p:nvSpPr>
+        <p:spPr>
+          <a:xfrm rot="8100000">
+            <a:off x="667078" y="5950278"/>
+            <a:ext cx="7620" cy="64769"/>
+          </a:xfrm>
+          <a:prstGeom prst="rect">
+            <a:avLst/>
+          </a:prstGeom>
+          <a:solidFill>
+            <a:srgbClr val="FFFFFF"/>
+          </a:solidFill>
+          <a:ln>
+            <a:noFill/>
+          </a:ln>
+          <a:effectLst/>
+        </p:spPr>
+        <p:style>
+          <a:lnRef idx="1">
+            <a:schemeClr val="accent1"/>
+          </a:lnRef>
+          <a:fillRef idx="3">
+            <a:schemeClr val="accent1"/>
+          </a:fillRef>
+          <a:effectRef idx="0">
+            <a:schemeClr val="accent1"/>
+          </a:effectRef>
+          <a:fontRef idx="minor">
+            <a:schemeClr val="lt1"/>
+          </a:fontRef>
+        </p:style>
+        <p:txBody>
+          <a:bodyPr rtlCol="0" anchor="ctr"/>
+          <a:lstStyle/>
+          <a:p>
+            <a:pPr algn="ctr"/>
+          </a:p>
+        </p:txBody>
+      </p:sp>
+      <p:sp>
+        <p:nvSpPr>
+          <p:cNvPr id="75" name="Rectangle 74"/>
+          <p:cNvSpPr/>
+          <p:nvPr/>
+        </p:nvSpPr>
+        <p:spPr>
+          <a:xfrm rot="10800000">
+            <a:off x="770890" y="5907278"/>
+            <a:ext cx="7620" cy="64769"/>
+          </a:xfrm>
+          <a:prstGeom prst="rect">
+            <a:avLst/>
+          </a:prstGeom>
+          <a:solidFill>
+            <a:srgbClr val="FFFFFF"/>
+          </a:solidFill>
+          <a:ln>
+            <a:noFill/>
+          </a:ln>
+          <a:effectLst/>
+        </p:spPr>
+        <p:style>
+          <a:lnRef idx="1">
+            <a:schemeClr val="accent1"/>
+          </a:lnRef>
+          <a:fillRef idx="3">
+            <a:schemeClr val="accent1"/>
+          </a:fillRef>
+          <a:effectRef idx="0">
+            <a:schemeClr val="accent1"/>
+          </a:effectRef>
+          <a:fontRef idx="minor">
+            <a:schemeClr val="lt1"/>
+          </a:fontRef>
+        </p:style>
+        <p:txBody>
+          <a:bodyPr rtlCol="0" anchor="ctr"/>
+          <a:lstStyle/>
+          <a:p>
+            <a:pPr algn="ctr"/>
+          </a:p>
+        </p:txBody>
+      </p:sp>
+      <p:sp>
+        <p:nvSpPr>
+          <p:cNvPr id="76" name="Rectangle 75"/>
+          <p:cNvSpPr/>
+          <p:nvPr/>
+        </p:nvSpPr>
+        <p:spPr>
+          <a:xfrm rot="13500000">
+            <a:off x="874701" y="5950278"/>
+            <a:ext cx="7620" cy="64769"/>
+          </a:xfrm>
+          <a:prstGeom prst="rect">
+            <a:avLst/>
+          </a:prstGeom>
+          <a:solidFill>
+            <a:srgbClr val="FFFFFF"/>
+          </a:solidFill>
+          <a:ln>
+            <a:noFill/>
+          </a:ln>
+          <a:effectLst/>
+        </p:spPr>
+        <p:style>
+          <a:lnRef idx="1">
+            <a:schemeClr val="accent1"/>
+          </a:lnRef>
+          <a:fillRef idx="3">
+            <a:schemeClr val="accent1"/>
+          </a:fillRef>
+          <a:effectRef idx="0">
+            <a:schemeClr val="accent1"/>
+          </a:effectRef>
+          <a:fontRef idx="minor">
+            <a:schemeClr val="lt1"/>
+          </a:fontRef>
+        </p:style>
+        <p:txBody>
+          <a:bodyPr rtlCol="0" anchor="ctr"/>
+          <a:lstStyle/>
+          <a:p>
+            <a:pPr algn="ctr"/>
+          </a:p>
+        </p:txBody>
+      </p:sp>
+      <p:sp>
+        <p:nvSpPr>
+          <p:cNvPr id="77" name="Oval 76"/>
+          <p:cNvSpPr/>
+          <p:nvPr/>
+        </p:nvSpPr>
+        <p:spPr>
+          <a:xfrm>
+            <a:off x="762000" y="6045200"/>
+            <a:ext cx="25400" cy="25400"/>
+          </a:xfrm>
+          <a:prstGeom prst="ellipse">
+            <a:avLst/>
+          </a:prstGeom>
+          <a:solidFill>
+            <a:srgbClr val="FFFFFF"/>
+          </a:solidFill>
+          <a:ln>
+            <a:noFill/>
+          </a:ln>
+          <a:effectLst/>
+        </p:spPr>
+        <p:style>
+          <a:lnRef idx="1">
+            <a:schemeClr val="accent1"/>
+          </a:lnRef>
+          <a:fillRef idx="3">
+            <a:schemeClr val="accent1"/>
+          </a:fillRef>
+          <a:effectRef idx="0">
+            <a:schemeClr val="accent1"/>
+          </a:effectRef>
+          <a:fontRef idx="minor">
+            <a:schemeClr val="lt1"/>
+          </a:fontRef>
+        </p:style>
+        <p:txBody>
+          <a:bodyPr rtlCol="0" anchor="ctr"/>
+          <a:lstStyle/>
+          <a:p>
+            <a:pPr algn="ctr"/>
+          </a:p>
+        </p:txBody>
+      </p:sp>
+      <p:sp>
+        <p:nvSpPr>
+          <p:cNvPr id="78" name="TextBox 77"/>
+          <p:cNvSpPr txBox="1"/>
+          <p:nvPr/>
+        </p:nvSpPr>
+        <p:spPr>
+          <a:xfrm>
+            <a:off x="1397000" y="5778500"/>
+            <a:ext cx="6718300" cy="304800"/>
+          </a:xfrm>
+          <a:prstGeom prst="rect">
+            <a:avLst/>
+          </a:prstGeom>
+          <a:noFill/>
+          <a:effectLst/>
+        </p:spPr>
+        <p:txBody>
+          <a:bodyPr wrap="square" lIns="0" rIns="0" tIns="0" bIns="0" anchor="t">
+            <a:spAutoFit/>
+          </a:bodyPr>
+          <a:lstStyle/>
+          <a:p>
+            <a:pPr algn="l">
+              <a:lnSpc>
+                <a:spcPts val="1920"/>
+              </a:lnSpc>
+              <a:spcBef>
+                <a:spcPts val="0"/>
+              </a:spcBef>
+              <a:spcAft>
+                <a:spcPts val="0"/>
+              </a:spcAft>
+            </a:pPr>
+            <a:r>
+              <a:rPr sz="1600" b="1" i="0" lang="ru-RU">
+                <a:solidFill>
+                  <a:srgbClr val="FF0000"/>
+                </a:solidFill>
+                <a:latin typeface="Verdana"/>
+              </a:rPr>
+              <a:t>Эффект от мероприятия:</a:t>
+            </a:r>
+          </a:p>
+        </p:txBody>
+      </p:sp>
+      <p:sp>
+        <p:nvSpPr>
+          <p:cNvPr id="79" name="TextBox 78"/>
+          <p:cNvSpPr txBox="1"/>
+          <p:nvPr/>
+        </p:nvSpPr>
+        <p:spPr>
+          <a:xfrm>
+            <a:off x="1397000" y="6057900"/>
+            <a:ext cx="6718300" cy="685800"/>
+          </a:xfrm>
+          <a:prstGeom prst="rect">
+            <a:avLst/>
+          </a:prstGeom>
+          <a:noFill/>
+          <a:effectLst/>
+        </p:spPr>
+        <p:txBody>
+          <a:bodyPr wrap="square" lIns="0" rIns="0" tIns="0" bIns="0" anchor="t">
+            <a:spAutoFit/>
+          </a:bodyPr>
+          <a:lstStyle/>
+          <a:p>
+            <a:pPr algn="l">
+              <a:lnSpc>
+                <a:spcPts val="1440"/>
+              </a:lnSpc>
+              <a:spcBef>
+                <a:spcPts val="0"/>
+              </a:spcBef>
+              <a:spcAft>
+                <a:spcPts val="0"/>
+              </a:spcAft>
+            </a:pPr>
+            <a:r>
+              <a:rPr sz="1200" b="0" i="0" lang="ru-RU">
+                <a:solidFill>
+                  <a:srgbClr val="FFFFFF"/>
+                </a:solidFill>
+                <a:latin typeface="Verdana"/>
+              </a:rPr>
+              <a:t>Укрепление связей между коллективами ЦКБА</a:t>
+            </a:r>
+          </a:p>
+          <a:p>
+            <a:pPr algn="l">
+              <a:lnSpc>
+                <a:spcPts val="1440"/>
+              </a:lnSpc>
+              <a:spcBef>
+                <a:spcPts val="0"/>
+              </a:spcBef>
+              <a:spcAft>
+                <a:spcPts val="0"/>
+              </a:spcAft>
+            </a:pPr>
+            <a:r>
+              <a:rPr sz="1200" b="0" i="0" lang="ru-RU">
+                <a:solidFill>
+                  <a:srgbClr val="FFFFFF"/>
+                </a:solidFill>
+                <a:latin typeface="Verdana"/>
+              </a:rPr>
+              <a:t>и «Высокоточных комплексов», поддержка командного</a:t>
+            </a:r>
+          </a:p>
+          <a:p>
+            <a:pPr algn="l">
+              <a:lnSpc>
+                <a:spcPts val="1440"/>
+              </a:lnSpc>
+              <a:spcBef>
+                <a:spcPts val="0"/>
+              </a:spcBef>
+              <a:spcAft>
+                <a:spcPts val="0"/>
+              </a:spcAft>
+            </a:pPr>
+            <a:r>
+              <a:rPr sz="1200" b="0" i="0" lang="ru-RU">
+                <a:solidFill>
+                  <a:srgbClr val="FFFFFF"/>
+                </a:solidFill>
+                <a:latin typeface="Verdana"/>
+              </a:rPr>
+              <a:t>взаимодействия и популяризация физической активности.</a:t>
+            </a:r>
+          </a:p>
+        </p:txBody>
+      </p:sp>
+    </p:spTree>
+  </p:cSld>
+  <p:clrMapOvr>
+    <a:masterClrMapping/>
+  </p:clrMapOvr>
+</p:sld>
+</file>
+
+<file path=ppt/slides/slide4.xml><?xml version="1.0" encoding="utf-8"?>
+<p:sld xmlns:a="http://schemas.openxmlformats.org/drawingml/2006/main" xmlns:p="http://schemas.openxmlformats.org/presentationml/2006/main" xmlns:r="http://schemas.openxmlformats.org/officeDocument/2006/relationships">
+  <p:cSld>
+    <p:bg>
+      <p:bgPr>
+        <a:solidFill>
           <a:srgbClr val="FFFFFF"/>
         </a:solidFill>
         <a:effectLst/>
@@ -9699,7 +13365,7 @@
 </p:sld>
 </file>
 
-<file path=ppt/slides/slide4.xml><?xml version="1.0" encoding="utf-8"?>
+<file path=ppt/slides/slide5.xml><?xml version="1.0" encoding="utf-8"?>
 <p:sld xmlns:a="http://schemas.openxmlformats.org/drawingml/2006/main" xmlns:p="http://schemas.openxmlformats.org/presentationml/2006/main" xmlns:r="http://schemas.openxmlformats.org/officeDocument/2006/relationships">
   <p:cSld>
     <p:bg>
@@ -10645,7 +14311,7 @@
                 </a:solidFill>
                 <a:latin typeface="Verdana"/>
               </a:rPr>
-              <a:t>1 Развитие взаимопомощи на основе</a:t>
+              <a:t>1 Развитие взаимодействия коллективов</a:t>
             </a:r>
           </a:p>
           <a:p>
@@ -10667,7 +14333,7 @@
                 </a:solidFill>
                 <a:latin typeface="Verdana"/>
               </a:rPr>
-              <a:t>опыта командных соревнований</a:t>
+              <a:t>ЦКБА и «Высокоточных комплексов»</a:t>
             </a:r>
           </a:p>
         </p:txBody>
@@ -11153,7 +14819,7 @@
                 </a:solidFill>
                 <a:latin typeface="Verdana"/>
               </a:rPr>
-              <a:t>2 Вовлечение новичков в мероприятия</a:t>
+              <a:t>2 Вовлечение новичков в доступные</a:t>
             </a:r>
           </a:p>
           <a:p>
@@ -11175,7 +14841,7 @@
                 </a:solidFill>
                 <a:latin typeface="Verdana"/>
               </a:rPr>
-              <a:t>с доступным уровнем нагрузки</a:t>
+              <a:t>совместные мероприятия</a:t>
             </a:r>
           </a:p>
         </p:txBody>
@@ -12677,7 +16343,7 @@
                 </a:solidFill>
                 <a:latin typeface="Verdana"/>
               </a:rPr>
-              <a:t>1 Провести встречу участников гонки:</a:t>
+              <a:t>1 Провести встречу участников гонки</a:t>
             </a:r>
           </a:p>
           <a:p>
@@ -12699,7 +16365,7 @@
                 </a:solidFill>
                 <a:latin typeface="Verdana"/>
               </a:rPr>
-              <a:t>обсудить опыт и пригласить новичков</a:t>
+              <a:t>и забега: обменяться опытом</a:t>
             </a:r>
           </a:p>
         </p:txBody>
@@ -13185,7 +16851,7 @@
                 </a:solidFill>
                 <a:latin typeface="Verdana"/>
               </a:rPr>
-              <a:t>2 Подготовить командный квиз</a:t>
+              <a:t>2 Подготовить совместный зимний квиз</a:t>
             </a:r>
           </a:p>
           <a:p>
@@ -13207,7 +16873,7 @@
                 </a:solidFill>
                 <a:latin typeface="Verdana"/>
               </a:rPr>
-              <a:t>для зимнего сезона</a:t>
+              <a:t>и пригласить новых участников</a:t>
             </a:r>
           </a:p>
         </p:txBody>
